--- a/docs/apresentacao/LockMachine_Andamento_PowerPoint.pptx
+++ b/docs/apresentacao/LockMachine_Andamento_PowerPoint.pptx
@@ -4,6 +4,9 @@
   <p:sldMasterIdLst>
     <p:sldMasterId id="2147483648" r:id="rId1"/>
   </p:sldMasterIdLst>
+  <p:notesMasterIdLst>
+    <p:notesMasterId r:id="rId14"/>
+  </p:notesMasterIdLst>
   <p:sldIdLst>
     <p:sldId id="256" r:id="rId2"/>
     <p:sldId id="257" r:id="rId3"/>
@@ -18,9 +21,6 @@
     <p:sldId id="266" r:id="rId12"/>
     <p:sldId id="267" r:id="rId13"/>
   </p:sldIdLst>
-  <p:notesMasterIdLst>
-    <p:notesMasterId r:id="rId14"/>
-  </p:notesMasterIdLst>
   <p:sldSz cx="12192000" cy="6858000"/>
   <p:notesSz cx="6858000" cy="12192000"/>
   <p:defaultTextStyle>
@@ -118,12 +118,12 @@
   <p:extLst>
     <p:ext uri="{521415D9-36F7-43E2-AB2F-B90AF26B5E84}">
       <p14:sectionLst xmlns:p14="http://schemas.microsoft.com/office/powerpoint/2010/main">
-        <p14:section name="Abertura" id="{eb533636-0888-82d1-662a-5d586b4ca543}">
+        <p14:section name="Abertura" id="{EB533636-0888-82D1-662A-5D586B4CA543}">
           <p14:sldIdLst>
             <p14:sldId id="256"/>
           </p14:sldIdLst>
         </p14:section>
-        <p14:section name="O projeto" id="{478a9251-3a13-7561-db56-cb99b99f0562}">
+        <p14:section name="O projeto" id="{478A9251-3A13-7561-DB56-CB99B99F0562}">
           <p14:sldIdLst>
             <p14:sldId id="257"/>
             <p14:sldId id="258"/>
@@ -131,25 +131,25 @@
             <p14:sldId id="260"/>
           </p14:sldIdLst>
         </p14:section>
-        <p14:section name="Como fizemos" id="{96628578-8eb5-6051-4e1e-75106af83c93}">
+        <p14:section name="Como fizemos" id="{96628578-8EB5-6051-4E1E-75106AF83C93}">
           <p14:sldIdLst>
             <p14:sldId id="261"/>
             <p14:sldId id="262"/>
           </p14:sldIdLst>
         </p14:section>
-        <p14:section name="Andamento" id="{833b642b-88e0-ba97-6de3-0338edb818dc}">
+        <p14:section name="Andamento" id="{833B642B-88E0-BA97-6DE3-0338EDB818DC}">
           <p14:sldIdLst>
             <p14:sldId id="263"/>
             <p14:sldId id="264"/>
             <p14:sldId id="265"/>
           </p14:sldIdLst>
         </p14:section>
-        <p14:section name="Demonstração" id="{32ed6fba-2e67-4adb-adca-69e2ff657f1a}">
+        <p14:section name="Demonstração" id="{32ED6FBA-2E67-4ADB-ADCA-69E2FF657F1A}">
           <p14:sldIdLst>
             <p14:sldId id="266"/>
           </p14:sldIdLst>
         </p14:section>
-        <p14:section name="Encerramento" id="{38d49502-c89a-4ef0-0ac1-be153e515206}">
+        <p14:section name="Encerramento" id="{38D49502-C89A-4EF0-0AC1-BE153E515206}">
           <p14:sldIdLst>
             <p14:sldId id="267"/>
           </p14:sldIdLst>
@@ -185,234 +185,10 @@
           <a:chExt cx="0" cy="0"/>
         </a:xfrm>
       </p:grpSpPr>
-      <p:sp>
-        <p:nvSpPr>
-          <p:cNvPr id="2" name="Header Placeholder 1"/>
-          <p:cNvSpPr>
-            <a:spLocks noGrp="1"/>
-          </p:cNvSpPr>
-          <p:nvPr>
-            <p:ph type="hdr" sz="quarter"/>
-          </p:nvPr>
-        </p:nvSpPr>
-        <p:spPr>
-          <a:xfrm>
-            <a:off x="0" y="0"/>
-            <a:ext cx="2971800" cy="458788"/>
-          </a:xfrm>
-          <a:prstGeom prst="rect">
-            <a:avLst/>
-          </a:prstGeom>
-        </p:spPr>
-        <p:txBody>
-          <a:bodyPr vert="horz" lIns="91440" tIns="45720" rIns="91440" bIns="45720" rtlCol="0"/>
-          <a:lstStyle>
-            <a:lvl1pPr algn="l">
-              <a:defRPr sz="1200"/>
-            </a:lvl1pPr>
-          </a:lstStyle>
-          <a:p>
-            <a:endParaRPr lang="en-US"/>
-          </a:p>
-        </p:txBody>
-      </p:sp>
-      <p:sp>
-        <p:nvSpPr>
-          <p:cNvPr id="3" name="Date Placeholder 2"/>
-          <p:cNvSpPr>
-            <a:spLocks noGrp="1"/>
-          </p:cNvSpPr>
-          <p:nvPr>
-            <p:ph type="dt" idx="1"/>
-          </p:nvPr>
-        </p:nvSpPr>
-        <p:spPr>
-          <a:xfrm>
-            <a:off x="3884613" y="0"/>
-            <a:ext cx="2971800" cy="458788"/>
-          </a:xfrm>
-          <a:prstGeom prst="rect">
-            <a:avLst/>
-          </a:prstGeom>
-        </p:spPr>
-        <p:txBody>
-          <a:bodyPr vert="horz" lIns="91440" tIns="45720" rIns="91440" bIns="45720" rtlCol="0"/>
-          <a:lstStyle>
-            <a:lvl1pPr algn="r">
-              <a:defRPr sz="1200"/>
-            </a:lvl1pPr>
-          </a:lstStyle>
-          <a:p>
-            <a:fld id="{5282F153-3F37-0F45-9E97-73ACFA13230C}" type="datetimeFigureOut">
-              <a:rPr lang="en-US"/>
-              <a:t>7/23/19</a:t>
-            </a:fld>
-            <a:endParaRPr lang="en-US"/>
-          </a:p>
-        </p:txBody>
-      </p:sp>
-      <p:sp>
-        <p:nvSpPr>
-          <p:cNvPr id="4" name="Slide Image Placeholder 3"/>
-          <p:cNvSpPr>
-            <a:spLocks noGrp="1" noRot="1" noChangeAspect="1"/>
-          </p:cNvSpPr>
-          <p:nvPr>
-            <p:ph type="sldImg" idx="2"/>
-          </p:nvPr>
-        </p:nvSpPr>
-        <p:spPr>
-          <a:xfrm>
-            <a:off x="685800" y="1143000"/>
-            <a:ext cx="5486400" cy="3086100"/>
-          </a:xfrm>
-          <a:prstGeom prst="rect">
-            <a:avLst/>
-          </a:prstGeom>
-          <a:noFill/>
-          <a:ln w="12700">
-            <a:solidFill>
-              <a:prstClr val="black"/>
-            </a:solidFill>
-          </a:ln>
-        </p:spPr>
-        <p:txBody>
-          <a:bodyPr vert="horz" lIns="91440" tIns="45720" rIns="91440" bIns="45720" rtlCol="0" anchor="ctr"/>
-          <a:lstStyle/>
-          <a:p>
-            <a:endParaRPr lang="en-US"/>
-          </a:p>
-        </p:txBody>
-      </p:sp>
-      <p:sp>
-        <p:nvSpPr>
-          <p:cNvPr id="5" name="Notes Placeholder 4"/>
-          <p:cNvSpPr>
-            <a:spLocks noGrp="1"/>
-          </p:cNvSpPr>
-          <p:nvPr>
-            <p:ph type="body" sz="quarter" idx="3"/>
-          </p:nvPr>
-        </p:nvSpPr>
-        <p:spPr>
-          <a:xfrm>
-            <a:off x="685800" y="4400550"/>
-            <a:ext cx="5486400" cy="3600450"/>
-          </a:xfrm>
-          <a:prstGeom prst="rect">
-            <a:avLst/>
-          </a:prstGeom>
-        </p:spPr>
-        <p:txBody>
-          <a:bodyPr vert="horz" lIns="91440" tIns="45720" rIns="91440" bIns="45720" rtlCol="0"/>
-          <a:lstStyle/>
-          <a:p>
-            <a:pPr lvl="0"/>
-            <a:r>
-              <a:rPr lang="en-US"/>
-              <a:t>Click to edit Master text styles</a:t>
-            </a:r>
-          </a:p>
-          <a:p>
-            <a:pPr lvl="1"/>
-            <a:r>
-              <a:rPr lang="en-US"/>
-              <a:t>Second level</a:t>
-            </a:r>
-          </a:p>
-          <a:p>
-            <a:pPr lvl="2"/>
-            <a:r>
-              <a:rPr lang="en-US"/>
-              <a:t>Third level</a:t>
-            </a:r>
-          </a:p>
-          <a:p>
-            <a:pPr lvl="3"/>
-            <a:r>
-              <a:rPr lang="en-US"/>
-              <a:t>Fourth level</a:t>
-            </a:r>
-          </a:p>
-          <a:p>
-            <a:pPr lvl="4"/>
-            <a:r>
-              <a:rPr lang="en-US"/>
-              <a:t>Fifth level</a:t>
-            </a:r>
-          </a:p>
-        </p:txBody>
-      </p:sp>
-      <p:sp>
-        <p:nvSpPr>
-          <p:cNvPr id="6" name="Footer Placeholder 5"/>
-          <p:cNvSpPr>
-            <a:spLocks noGrp="1"/>
-          </p:cNvSpPr>
-          <p:nvPr>
-            <p:ph type="ftr" sz="quarter" idx="4"/>
-          </p:nvPr>
-        </p:nvSpPr>
-        <p:spPr>
-          <a:xfrm>
-            <a:off x="0" y="8685213"/>
-            <a:ext cx="2971800" cy="458787"/>
-          </a:xfrm>
-          <a:prstGeom prst="rect">
-            <a:avLst/>
-          </a:prstGeom>
-        </p:spPr>
-        <p:txBody>
-          <a:bodyPr vert="horz" lIns="91440" tIns="45720" rIns="91440" bIns="45720" rtlCol="0" anchor="b"/>
-          <a:lstStyle>
-            <a:lvl1pPr algn="l">
-              <a:defRPr sz="1200"/>
-            </a:lvl1pPr>
-          </a:lstStyle>
-          <a:p>
-            <a:endParaRPr lang="en-US"/>
-          </a:p>
-        </p:txBody>
-      </p:sp>
-      <p:sp>
-        <p:nvSpPr>
-          <p:cNvPr id="7" name="Slide Number Placeholder 6"/>
-          <p:cNvSpPr>
-            <a:spLocks noGrp="1"/>
-          </p:cNvSpPr>
-          <p:nvPr>
-            <p:ph type="sldNum" sz="quarter" idx="5"/>
-          </p:nvPr>
-        </p:nvSpPr>
-        <p:spPr>
-          <a:xfrm>
-            <a:off x="3884613" y="8685213"/>
-            <a:ext cx="2971800" cy="458787"/>
-          </a:xfrm>
-          <a:prstGeom prst="rect">
-            <a:avLst/>
-          </a:prstGeom>
-        </p:spPr>
-        <p:txBody>
-          <a:bodyPr vert="horz" lIns="91440" tIns="45720" rIns="91440" bIns="45720" rtlCol="0" anchor="b"/>
-          <a:lstStyle>
-            <a:lvl1pPr algn="r">
-              <a:defRPr sz="1200"/>
-            </a:lvl1pPr>
-          </a:lstStyle>
-          <a:p>
-            <a:fld id="{CE5E9CC1-C706-0F49-92D6-E571CC5EEA8F}" type="slidenum">
-              <a:rPr lang="en-US"/>
-              <a:t>‹#›</a:t>
-            </a:fld>
-            <a:endParaRPr lang="en-US"/>
-          </a:p>
-        </p:txBody>
-      </p:sp>
     </p:spTree>
     <p:extLst>
       <p:ext uri="{BB962C8B-B14F-4D97-AF65-F5344CB8AC3E}">
-        <p14:creationId xmlns:p14="http://schemas.microsoft.com/office/powerpoint/2010/main" val="1024086991"/>
+        <p14:creationId xmlns:p14="http://schemas.microsoft.com/office/powerpoint/2010/main" val="466701066"/>
       </p:ext>
     </p:extLst>
   </p:cSld>
@@ -564,7 +340,6 @@
 - Primeiro um resumo rápido nos slides; depois mostramos o site e o app funcionando.
 - É um MVP em desenvolvimento.</a:t>
             </a:r>
-            <a:endParaRPr lang="en-US" dirty="0"/>
           </a:p>
         </p:txBody>
       </p:sp>
@@ -655,7 +430,6 @@
 - Aprendizado: é uma sugestão; combinem o aprendizado real da equipe e falem com as suas palavras.
 - Feche com a frase: "Sem capacitação válida, sem acesso." e passe para a demonstração.</a:t>
             </a:r>
-            <a:endParaRPr lang="en-US" dirty="0"/>
           </a:p>
         </p:txBody>
       </p:sp>
@@ -746,11 +520,27 @@
 - Site (Gabriel): página da LinkWave e página do LockMachine; use o simulador com a Ana (liberada) e o Bruno (bloqueado, NR-12 vencida). Diga que os nomes são fictícios.
 - App do administrador (Leonardo opera; Cauê explica a regra e João mostra o banco/histórico): painel, cadastro de um funcionário com capacitação, "Simular leitura" e o resultado no histórico com o motivo.
 - App do funcionário (Evelyn, no celular): entrar com a matrícula, capacitações com validade e máquinas liberadas.
-ANTES DE SEXTA: deixem tudo aberto e logado (no cPanel, se já estiver publicado, ou no notebook com "php -S localhost:8080"). Treinem a demonstração inteira pelo menos duas vezes.
+</a:t>
+            </a:r>
+            <a:r>
+              <a:rPr lang="en-US"/>
+              <a:t>
+</a:t>
+            </a:r>
+            <a:r>
+              <a:rPr lang="pt-BR"/>
+              <a:t>ANTES DE SEXTA: deixem tudo aberto e logado no site publicado (https://somoslinkwave.com.br e https://somoslinkwave.com.br/app/).</a:t>
+            </a:r>
+            <a:r>
+              <a:rPr lang="en-US"/>
+              <a:t> </a:t>
+            </a:r>
+            <a:r>
+              <a:rPr lang="en-US" dirty="0"/>
+              <a:t>Treinem a demonstração inteira pelo menos duas vezes.
 Plano B: se a rede ou o servidor falharem, usem os prints da versão completa da apresentação (pasta completa).
 Depois da demonstração, voltem para o último slide (Obrigado / Perguntas).</a:t>
             </a:r>
-            <a:endParaRPr lang="en-US" dirty="0"/>
           </a:p>
         </p:txBody>
       </p:sp>
@@ -842,7 +632,6 @@
 - Perguntas: quem responde é quem cuida da frente (banco: João; servidor e regra: Cauê; telas: Evelyn; documentação e testes: Gabriel; visão geral e cronograma: Leonardo).
 - Perguntas prováveis: "e se a internet cair?" (na dúvida, bloqueia); "isso substitui a NR-12?" (não, é apoio administrativo); "quando fica pronto?" (próximos passos do slide 9).</a:t>
             </a:r>
-            <a:endParaRPr lang="en-US" dirty="0"/>
           </a:p>
         </p:txBody>
       </p:sp>
@@ -933,7 +722,6 @@
 - O operador aproxima o crachá, o sistema confere cadastro, máquina e validade dos treinamentos, e libera ou bloqueia.
 - Toda tentativa fica no histórico, com o motivo.</a:t>
             </a:r>
-            <a:endParaRPr lang="en-US" dirty="0"/>
           </a:p>
         </p:txBody>
       </p:sp>
@@ -1025,7 +813,6 @@
 - Deixe claro: é apoio administrativo, não substitui NR-12 nem proteções físicas.
 - Se perguntarem: esse cenário ainda vai ser confirmado com entrevistas (o roteiro está pronto).</a:t>
             </a:r>
-            <a:endParaRPr lang="en-US" dirty="0"/>
           </a:p>
         </p:txBody>
       </p:sp>
@@ -1116,7 +903,6 @@
 - Os específicos já mostram o andamento: banco e regra prontos; o app está pronto na web e falta gerar o APK; a leitora tem o programa escrito e falta montar; os testes formais são a próxima etapa.
 - ANTES DE SEXTA: confiram se o objetivo geral está igual ao do documento do TCC.</a:t>
             </a:r>
-            <a:endParaRPr lang="en-US" dirty="0"/>
           </a:p>
         </p:txBody>
       </p:sp>
@@ -1207,7 +993,6 @@
 - Levantamos 12 requisitos funcionais e 7 não funcionais, cada um com um critério de aceitação para conferir no teste.
 - Essenciais: login por perfil, capacitações com validade, liberação pelo cartão e histórico.</a:t>
             </a:r>
-            <a:endParaRPr lang="en-US" dirty="0"/>
           </a:p>
         </p:txBody>
       </p:sp>
@@ -1299,7 +1084,6 @@
 - Tecnologias: site e app em HTML, CSS e JavaScript; servidor em PHP; banco MySQL; leitora com ESP32 e RFID.
 - Escolhemos assim porque tudo roda na hospedagem da escola (cPanel). (Se usaram Trello ou outro quadro, citem aqui.)</a:t>
             </a:r>
-            <a:endParaRPr lang="en-US" dirty="0"/>
           </a:p>
         </p:txBody>
       </p:sp>
@@ -1392,7 +1176,6 @@
 - Regra de ouro: na dúvida, bloqueia. Se cair a rede ou o servidor, a máquina não libera.
 - Tudo fica registrado no banco, com o motivo. Na demonstração mostramos isso funcionando.</a:t>
             </a:r>
-            <a:endParaRPr lang="en-US" dirty="0"/>
           </a:p>
         </p:txBody>
       </p:sp>
@@ -1480,10 +1263,21 @@
               <a:rPr lang="en-US" dirty="0"/>
               <a:t>QUEM FALA: Cauê. Tempo: 40 s.
 - De 9 módulos, 6 estão prontos e funcionando juntos: site, simulador, banco, servidor e os dois apps.
-- Em preparação: o APK (depende de publicar o site) e a leitora (o programa está escrito, falta montar).
+</a:t>
+            </a:r>
+            <a:r>
+              <a:rPr lang="en-US"/>
+              <a:t>- </a:t>
+            </a:r>
+            <a:r>
+              <a:rPr lang="pt-BR"/>
+              <a:t>Em preparação: o APK (o site já está publicado com HTTPS, então já dá para gerar) e a leitora (o programa está escrito, falta montar).</a:t>
+            </a:r>
+            <a:r>
+              <a:rPr lang="en-US" dirty="0"/>
+              <a:t>
 - Testes: testamos durante o desenvolvimento; os testes formais, com evidências, são a próxima etapa. Por isso ainda é um MVP em desenvolvimento.</a:t>
             </a:r>
-            <a:endParaRPr lang="en-US" dirty="0"/>
           </a:p>
         </p:txBody>
       </p:sp>
@@ -1570,10 +1364,21 @@
             <a:r>
               <a:rPr lang="en-US" dirty="0"/>
               <a:t>QUEM FALA: Gabriel. Tempo: 40 s.
-- Próximos passos, em ordem: publicar no servidor da escola (estamos fazendo agora com o professor), gerar o APK, montar a bancada da leitora, executar os testes, registrar as evidências e preparar a apresentação final.
+</a:t>
+            </a:r>
+            <a:r>
+              <a:rPr lang="en-US"/>
+              <a:t>- </a:t>
+            </a:r>
+            <a:r>
+              <a:rPr lang="pt-BR"/>
+              <a:t>O primeiro passo já foi feito: o site e o app estão no ar em somoslinkwave.com.br, com HTTPS. Agora, em ordem: gerar o APK, montar a bancada da leitora, executar os testes, registrar as evidências e preparar a apresentação final.</a:t>
+            </a:r>
+            <a:r>
+              <a:rPr lang="en-US" dirty="0"/>
+              <a:t>
 - Limites, sem medo de falar: é apoio administrativo, não substitui NR-12 nem proteções físicas, e a leitora é de bancada, não liga numa máquina real.</a:t>
             </a:r>
-            <a:endParaRPr lang="en-US" dirty="0"/>
           </a:p>
         </p:txBody>
       </p:sp>
@@ -1651,6 +1456,7 @@
         <a:solidFill>
           <a:srgbClr val="06070A"/>
         </a:solidFill>
+        <a:effectLst/>
       </p:bgPr>
     </p:bg>
     <p:spTree>
@@ -1683,6 +1489,7 @@
         <a:solidFill>
           <a:srgbClr val="06070A"/>
         </a:solidFill>
+        <a:effectLst/>
       </p:bgPr>
     </p:bg>
     <p:spTree>
@@ -1701,14 +1508,14 @@
       </p:grpSpPr>
       <p:pic>
         <p:nvPicPr>
-          <p:cNvPr id="2" name="Image 0" descr="C:/Users/49816471825/Desktop/linkwave-lockmachine/assets/brand/linkwave-simbolo-escuro.png">    </p:cNvPr>
+          <p:cNvPr id="2" name="Image 0" descr="C:/Users/49816471825/Desktop/linkwave-lockmachine/assets/brand/linkwave-simbolo-escuro.png"/>
           <p:cNvPicPr>
             <a:picLocks noChangeAspect="1"/>
           </p:cNvPicPr>
           <p:nvPr/>
         </p:nvPicPr>
         <p:blipFill>
-          <a:blip r:embed="rId1"/>
+          <a:blip r:embed="rId2"/>
           <a:stretch>
             <a:fillRect/>
           </a:stretch>
@@ -1744,7 +1551,7 @@
           <a:bodyPr wrap="square" lIns="0" tIns="0" rIns="0" bIns="0" rtlCol="0" anchor="ctr"/>
           <a:lstStyle/>
           <a:p>
-            <a:pPr indent="0" marL="0">
+            <a:pPr marL="0" indent="0">
               <a:buNone/>
             </a:pPr>
             <a:r>
@@ -1765,9 +1572,11 @@
       <p:sp>
         <p:nvSpPr>
           <p:cNvPr id="4" name="Text 1"/>
-          <p:cNvSpPr/>
+          <p:cNvSpPr>
+            <a:spLocks noGrp="1"/>
+          </p:cNvSpPr>
           <p:nvPr>
-            <p:ph idx="102" type="title" hasCustomPrompt="1"/>
+            <p:ph type="title" idx="102" hasCustomPrompt="1"/>
           </p:nvPr>
         </p:nvSpPr>
         <p:spPr>
@@ -1784,7 +1593,7 @@
         <p:txBody>
           <a:bodyPr wrap="square" rtlCol="0"/>
           <a:lstStyle>
-            <a:lvl1pPr algn="l" indent="0" marL="0">
+            <a:lvl1pPr marL="0" indent="0" algn="l">
               <a:buNone/>
               <a:defRPr lang="en-US" sz="3200" b="1" dirty="0">
                 <a:solidFill>
@@ -1797,7 +1606,7 @@
             </a:lvl1pPr>
           </a:lstStyle>
           <a:p>
-            <a:pPr algn="l" indent="0" marL="0">
+            <a:pPr marL="0" indent="0" algn="l">
               <a:buNone/>
             </a:pPr>
             <a:endParaRPr lang="en-US" sz="3200" dirty="0"/>
@@ -1824,7 +1633,7 @@
           </a:prstGeom>
           <a:extLst>
             <a:ext uri="{C572A759-6A51-4108-AA02-DFA0A04FC94B}">
-              <ma14:wrappingTextBoxFlag xmlns:ma14="http://schemas.microsoft.com/office/mac/drawingml/2011/main" val="0"/>
+              <ma14:wrappingTextBoxFlag xmlns="" xmlns:ma14="http://schemas.microsoft.com/office/mac/drawingml/2011/main" val="0"/>
             </a:ext>
           </a:extLst>
         </p:spPr>
@@ -1845,8 +1654,8 @@
           <a:p>
             <a:pPr algn="r"/>
             <a:fld id="{F7021451-1387-4CA6-816F-3879F97B5CBC}" type="slidenum">
-              <a:rPr b="0" lang="en-US"/>
-              <a:t>1003</a:t>
+              <a:rPr lang="en-US" b="0"/>
+              <a:t>‹nº›</a:t>
             </a:fld>
             <a:endParaRPr lang="en-US"/>
           </a:p>
@@ -1863,6 +1672,11 @@
 <file path=ppt/slideMasters/slideMaster1.xml><?xml version="1.0" encoding="utf-8"?>
 <p:sldMaster xmlns:a="http://schemas.openxmlformats.org/drawingml/2006/main" xmlns:r="http://schemas.openxmlformats.org/officeDocument/2006/relationships" xmlns:p="http://schemas.openxmlformats.org/presentationml/2006/main">
   <p:cSld>
+    <p:bg>
+      <p:bgRef idx="1001">
+        <a:schemeClr val="bg1"/>
+      </p:bgRef>
+    </p:bg>
     <p:spTree>
       <p:nvGrpSpPr>
         <p:cNvPr id="1" name=""/>
@@ -1897,7 +1711,7 @@
           </a:prstGeom>
           <a:extLst>
             <a:ext uri="{C572A759-6A51-4108-AA02-DFA0A04FC94B}">
-              <ma14:wrappingTextBoxFlag xmlns:ma14="http://schemas.microsoft.com/office/mac/drawingml/2011/main" val="0"/>
+              <ma14:wrappingTextBoxFlag xmlns="" xmlns:ma14="http://schemas.microsoft.com/office/mac/drawingml/2011/main" val="0"/>
             </a:ext>
           </a:extLst>
         </p:spPr>
@@ -1918,8 +1732,8 @@
           <a:p>
             <a:pPr algn="r"/>
             <a:fld id="{F7021451-1387-4CA6-816F-3879F97B5CBC}" type="slidenum">
-              <a:rPr b="0" lang="en-US"/>
-              <a:t>null</a:t>
+              <a:rPr lang="en-US" b="0"/>
+              <a:t>‹nº›</a:t>
             </a:fld>
             <a:endParaRPr lang="en-US"/>
           </a:p>
@@ -2206,14 +2020,14 @@
       </p:grpSpPr>
       <p:pic>
         <p:nvPicPr>
-          <p:cNvPr id="2" name="Image 0" descr="C:/Users/49816471825/AppData/Local/Temp/lockmachine/deck/slides-img/capa-prensa.png">    </p:cNvPr>
+          <p:cNvPr id="2" name="Image 0" descr="C:/Users/49816471825/AppData/Local/Temp/lockmachine/deck/slides-img/capa-prensa.png"/>
           <p:cNvPicPr>
             <a:picLocks noChangeAspect="1"/>
           </p:cNvPicPr>
           <p:nvPr/>
         </p:nvPicPr>
         <p:blipFill>
-          <a:blip r:embed="rId1"/>
+          <a:blip r:embed="rId3"/>
           <a:stretch>
             <a:fillRect/>
           </a:stretch>
@@ -2230,14 +2044,14 @@
       </p:pic>
       <p:pic>
         <p:nvPicPr>
-          <p:cNvPr id="3" name="Image 1" descr="C:/Users/49816471825/Desktop/linkwave-lockmachine/assets/brand/lockmachine-horizontal-escuro.png">    </p:cNvPr>
+          <p:cNvPr id="3" name="Image 1" descr="C:/Users/49816471825/Desktop/linkwave-lockmachine/assets/brand/lockmachine-horizontal-escuro.png"/>
           <p:cNvPicPr>
             <a:picLocks noChangeAspect="1"/>
           </p:cNvPicPr>
           <p:nvPr/>
         </p:nvPicPr>
         <p:blipFill>
-          <a:blip r:embed="rId2"/>
+          <a:blip r:embed="rId4"/>
           <a:stretch>
             <a:fillRect/>
           </a:stretch>
@@ -2273,7 +2087,7 @@
           <a:bodyPr wrap="square" lIns="0" tIns="0" rIns="0" bIns="0" rtlCol="0" anchor="t"/>
           <a:lstStyle/>
           <a:p>
-            <a:pPr indent="0" marL="0">
+            <a:pPr marL="0" indent="0">
               <a:lnSpc>
                 <a:spcPct val="95000"/>
               </a:lnSpc>
@@ -2315,7 +2129,7 @@
           <a:bodyPr wrap="square" lIns="0" tIns="0" rIns="0" bIns="0" rtlCol="0" anchor="t"/>
           <a:lstStyle/>
           <a:p>
-            <a:pPr indent="0" marL="0">
+            <a:pPr marL="0" indent="0">
               <a:buNone/>
             </a:pPr>
             <a:r>
@@ -2366,7 +2180,7 @@
           <a:bodyPr wrap="square" lIns="0" tIns="0" rIns="0" bIns="0" rtlCol="0" anchor="ctr"/>
           <a:lstStyle/>
           <a:p>
-            <a:pPr algn="ctr" indent="0" marL="0">
+            <a:pPr marL="0" indent="0" algn="ctr">
               <a:buNone/>
             </a:pPr>
             <a:r>
@@ -2405,11 +2219,11 @@
           <a:bodyPr wrap="square" lIns="0" tIns="0" rIns="0" bIns="0" rtlCol="0" anchor="t"/>
           <a:lstStyle/>
           <a:p>
-            <a:pPr indent="0" marL="0">
-              <a:buNone/>
-            </a:pPr>
-            <a:r>
-              <a:rPr lang="en-US" sz="1000" b="1" spc="120" kern="0" dirty="0">
+            <a:pPr marL="0" indent="0">
+              <a:buNone/>
+            </a:pPr>
+            <a:r>
+              <a:rPr lang="en-US" sz="1000" b="1" kern="0" spc="120" dirty="0">
                 <a:solidFill>
                   <a:srgbClr val="7D849C"/>
                 </a:solidFill>
@@ -2444,7 +2258,7 @@
           <a:bodyPr wrap="square" lIns="0" tIns="0" rIns="0" bIns="0" rtlCol="0" anchor="t"/>
           <a:lstStyle/>
           <a:p>
-            <a:pPr indent="0" marL="0">
+            <a:pPr marL="0" indent="0">
               <a:lnSpc>
                 <a:spcPct val="120000"/>
               </a:lnSpc>
@@ -2464,7 +2278,7 @@
             <a:endParaRPr lang="en-US" sz="1300" dirty="0"/>
           </a:p>
           <a:p>
-            <a:pPr indent="0" marL="0">
+            <a:pPr marL="0" indent="0">
               <a:lnSpc>
                 <a:spcPct val="120000"/>
               </a:lnSpc>
@@ -2484,7 +2298,7 @@
             <a:endParaRPr lang="en-US" sz="1300" dirty="0"/>
           </a:p>
           <a:p>
-            <a:pPr indent="0" marL="0">
+            <a:pPr marL="0" indent="0">
               <a:lnSpc>
                 <a:spcPct val="120000"/>
               </a:lnSpc>
@@ -2504,7 +2318,7 @@
             <a:endParaRPr lang="en-US" sz="1300" dirty="0"/>
           </a:p>
           <a:p>
-            <a:pPr indent="0" marL="0">
+            <a:pPr marL="0" indent="0">
               <a:lnSpc>
                 <a:spcPct val="120000"/>
               </a:lnSpc>
@@ -2524,7 +2338,7 @@
             <a:endParaRPr lang="en-US" sz="1300" dirty="0"/>
           </a:p>
           <a:p>
-            <a:pPr indent="0" marL="0">
+            <a:pPr marL="0" indent="0">
               <a:lnSpc>
                 <a:spcPct val="120000"/>
               </a:lnSpc>
@@ -2553,8 +2367,8 @@
         </p:nvSpPr>
         <p:spPr>
           <a:xfrm>
-            <a:off x="3611880" y="4343400"/>
-            <a:ext cx="2651760" cy="228600"/>
+            <a:off x="3200400" y="4343400"/>
+            <a:ext cx="3086100" cy="228600"/>
           </a:xfrm>
           <a:prstGeom prst="rect">
             <a:avLst/>
@@ -2566,11 +2380,11 @@
           <a:bodyPr wrap="square" lIns="0" tIns="0" rIns="0" bIns="0" rtlCol="0" anchor="t"/>
           <a:lstStyle/>
           <a:p>
-            <a:pPr indent="0" marL="0">
-              <a:buNone/>
-            </a:pPr>
-            <a:r>
-              <a:rPr lang="en-US" sz="1000" b="1" spc="120" kern="0" dirty="0">
+            <a:pPr marL="0" indent="0">
+              <a:buNone/>
+            </a:pPr>
+            <a:r>
+              <a:rPr lang="en-US" sz="1000" b="1" kern="0" spc="120" dirty="0">
                 <a:solidFill>
                   <a:srgbClr val="7D849C"/>
                 </a:solidFill>
@@ -2592,8 +2406,8 @@
         </p:nvSpPr>
         <p:spPr>
           <a:xfrm>
-            <a:off x="3611880" y="4617720"/>
-            <a:ext cx="2651760" cy="457200"/>
+            <a:off x="3200400" y="4617720"/>
+            <a:ext cx="3086100" cy="457200"/>
           </a:xfrm>
           <a:prstGeom prst="rect">
             <a:avLst/>
@@ -2605,7 +2419,7 @@
           <a:bodyPr wrap="square" lIns="0" tIns="0" rIns="0" bIns="0" rtlCol="0" anchor="t"/>
           <a:lstStyle/>
           <a:p>
-            <a:pPr indent="0" marL="0">
+            <a:pPr marL="0" indent="0">
               <a:buNone/>
             </a:pPr>
             <a:r>
@@ -2631,8 +2445,8 @@
         </p:nvSpPr>
         <p:spPr>
           <a:xfrm>
-            <a:off x="3611880" y="5166360"/>
-            <a:ext cx="2651760" cy="228600"/>
+            <a:off x="3200400" y="5166360"/>
+            <a:ext cx="3086100" cy="228600"/>
           </a:xfrm>
           <a:prstGeom prst="rect">
             <a:avLst/>
@@ -2644,11 +2458,11 @@
           <a:bodyPr wrap="square" lIns="0" tIns="0" rIns="0" bIns="0" rtlCol="0" anchor="t"/>
           <a:lstStyle/>
           <a:p>
-            <a:pPr indent="0" marL="0">
-              <a:buNone/>
-            </a:pPr>
-            <a:r>
-              <a:rPr lang="en-US" sz="1000" b="1" spc="120" kern="0" dirty="0">
+            <a:pPr marL="0" indent="0">
+              <a:buNone/>
+            </a:pPr>
+            <a:r>
+              <a:rPr lang="en-US" sz="1000" b="1" kern="0" spc="120" dirty="0">
                 <a:solidFill>
                   <a:srgbClr val="7D849C"/>
                 </a:solidFill>
@@ -2670,8 +2484,8 @@
         </p:nvSpPr>
         <p:spPr>
           <a:xfrm>
-            <a:off x="3611880" y="5440680"/>
-            <a:ext cx="2697480" cy="640080"/>
+            <a:off x="3200400" y="5440680"/>
+            <a:ext cx="3086100" cy="640080"/>
           </a:xfrm>
           <a:prstGeom prst="rect">
             <a:avLst/>
@@ -2683,7 +2497,7 @@
           <a:bodyPr wrap="square" lIns="0" tIns="0" rIns="0" bIns="0" rtlCol="0" anchor="t"/>
           <a:lstStyle/>
           <a:p>
-            <a:pPr indent="0" marL="0">
+            <a:pPr marL="0" indent="0">
               <a:lnSpc>
                 <a:spcPct val="110000"/>
               </a:lnSpc>
@@ -2703,7 +2517,7 @@
             <a:endParaRPr lang="en-US" sz="1300" dirty="0"/>
           </a:p>
           <a:p>
-            <a:pPr indent="0" marL="0">
+            <a:pPr marL="0" indent="0">
               <a:lnSpc>
                 <a:spcPct val="110000"/>
               </a:lnSpc>
@@ -2726,14 +2540,14 @@
       </p:sp>
       <p:pic>
         <p:nvPicPr>
-          <p:cNvPr id="13" name="Image 2" descr="C:/Users/49816471825/Desktop/linkwave-lockmachine/assets/brand/linkwave-horizontal-escuro.png">    </p:cNvPr>
+          <p:cNvPr id="13" name="Image 2" descr="C:/Users/49816471825/Desktop/linkwave-lockmachine/assets/brand/linkwave-horizontal-escuro.png"/>
           <p:cNvPicPr>
             <a:picLocks noChangeAspect="1"/>
           </p:cNvPicPr>
           <p:nvPr/>
         </p:nvPicPr>
         <p:blipFill>
-          <a:blip r:embed="rId3"/>
+          <a:blip r:embed="rId5"/>
           <a:stretch>
             <a:fillRect/>
           </a:stretch>
@@ -2769,7 +2583,7 @@
           <a:bodyPr wrap="square" lIns="0" tIns="0" rIns="0" bIns="0" rtlCol="0" anchor="ctr"/>
           <a:lstStyle/>
           <a:p>
-            <a:pPr indent="0" marL="0">
+            <a:pPr marL="0" indent="0">
               <a:buNone/>
             </a:pPr>
             <a:r>
@@ -2815,9 +2629,11 @@
       <p:sp>
         <p:nvSpPr>
           <p:cNvPr id="2" name="Text 1"/>
-          <p:cNvSpPr/>
+          <p:cNvSpPr>
+            <a:spLocks noGrp="1"/>
+          </p:cNvSpPr>
           <p:nvPr>
-            <p:ph idx="102" type="title" hasCustomPrompt="1"/>
+            <p:ph type="title" idx="102" hasCustomPrompt="1"/>
           </p:nvPr>
         </p:nvSpPr>
         <p:spPr>
@@ -2835,11 +2651,11 @@
           <a:bodyPr wrap="square" lIns="0" tIns="0" rIns="0" bIns="0" rtlCol="0" anchor="ctr"/>
           <a:lstStyle/>
           <a:p>
-            <a:pPr algn="l" indent="0" marL="0">
-              <a:buNone/>
-            </a:pPr>
-            <a:r>
-              <a:rPr lang="en-US" sz="2000" b="1" dirty="0">
+            <a:pPr marL="0" indent="0" algn="l">
+              <a:buNone/>
+            </a:pPr>
+            <a:r>
+              <a:rPr lang="en-US" sz="2000" b="1">
                 <a:solidFill>
                   <a:srgbClr val="FFD23F"/>
                 </a:solidFill>
@@ -2847,11 +2663,8 @@
                 <a:ea typeface="Consolas" pitchFamily="34" charset="-122"/>
                 <a:cs typeface="Consolas" pitchFamily="34" charset="-120"/>
               </a:rPr>
-              <a:t>14  </a:t>
-            </a:r>
-            <a:pPr algn="l" indent="0" marL="0">
-              <a:buNone/>
-            </a:pPr>
+              <a:t>09  </a:t>
+            </a:r>
             <a:r>
               <a:rPr lang="en-US" sz="3200" b="1" dirty="0">
                 <a:solidFill>
@@ -2869,14 +2682,14 @@
       </p:sp>
       <p:pic>
         <p:nvPicPr>
-          <p:cNvPr id="3" name="Image 0" descr="C:/Users/49816471825/AppData/Local/Temp/lockmachine/deck/cards/painel-red-383x290.png">    </p:cNvPr>
+          <p:cNvPr id="3" name="Image 0" descr="C:/Users/49816471825/AppData/Local/Temp/lockmachine/deck/cards/painel-red-383x290.png"/>
           <p:cNvPicPr>
             <a:picLocks noChangeAspect="1"/>
           </p:cNvPicPr>
           <p:nvPr/>
         </p:nvPicPr>
         <p:blipFill>
-          <a:blip r:embed="rId1"/>
+          <a:blip r:embed="rId3"/>
           <a:stretch>
             <a:fillRect/>
           </a:stretch>
@@ -2944,14 +2757,14 @@
       </p:sp>
       <p:pic>
         <p:nvPicPr>
-          <p:cNvPr id="6" name="Image 1" descr="C:/Users/49816471825/AppData/Local/Temp/lockmachine/deck/icones/x-FF7A6F.png">    </p:cNvPr>
+          <p:cNvPr id="6" name="Image 1" descr="C:/Users/49816471825/AppData/Local/Temp/lockmachine/deck/icones/x-FF7A6F.png"/>
           <p:cNvPicPr>
             <a:picLocks noChangeAspect="1"/>
           </p:cNvPicPr>
           <p:nvPr/>
         </p:nvPicPr>
         <p:blipFill>
-          <a:blip r:embed="rId2"/>
+          <a:blip r:embed="rId4"/>
           <a:stretch>
             <a:fillRect/>
           </a:stretch>
@@ -2987,11 +2800,11 @@
           <a:bodyPr wrap="square" lIns="0" tIns="0" rIns="0" bIns="0" rtlCol="0" anchor="t"/>
           <a:lstStyle/>
           <a:p>
-            <a:pPr indent="0" marL="0">
-              <a:buNone/>
-            </a:pPr>
-            <a:r>
-              <a:rPr lang="en-US" sz="1000" b="1" spc="120" kern="0" dirty="0">
+            <a:pPr marL="0" indent="0">
+              <a:buNone/>
+            </a:pPr>
+            <a:r>
+              <a:rPr lang="en-US" sz="1000" b="1" kern="0" spc="120" dirty="0">
                 <a:solidFill>
                   <a:srgbClr val="FF7A6F"/>
                 </a:solidFill>
@@ -3026,7 +2839,7 @@
           <a:bodyPr wrap="square" lIns="0" tIns="0" rIns="0" bIns="0" rtlCol="0" anchor="t"/>
           <a:lstStyle/>
           <a:p>
-            <a:pPr indent="0" marL="0">
+            <a:pPr marL="0" indent="0">
               <a:buNone/>
             </a:pPr>
             <a:r>
@@ -3070,14 +2883,14 @@
       </p:sp>
       <p:pic>
         <p:nvPicPr>
-          <p:cNvPr id="10" name="Image 2" descr="C:/Users/49816471825/AppData/Local/Temp/lockmachine/deck/cards/painel-cobalt-383x290.png">    </p:cNvPr>
+          <p:cNvPr id="10" name="Image 2" descr="C:/Users/49816471825/AppData/Local/Temp/lockmachine/deck/cards/painel-cobalt-383x290.png"/>
           <p:cNvPicPr>
             <a:picLocks noChangeAspect="1"/>
           </p:cNvPicPr>
           <p:nvPr/>
         </p:nvPicPr>
         <p:blipFill>
-          <a:blip r:embed="rId3"/>
+          <a:blip r:embed="rId5"/>
           <a:stretch>
             <a:fillRect/>
           </a:stretch>
@@ -3145,14 +2958,14 @@
       </p:sp>
       <p:pic>
         <p:nvPicPr>
-          <p:cNvPr id="13" name="Image 3" descr="C:/Users/49816471825/AppData/Local/Temp/lockmachine/deck/icones/server-8C9BFF.png">    </p:cNvPr>
+          <p:cNvPr id="13" name="Image 3" descr="C:/Users/49816471825/AppData/Local/Temp/lockmachine/deck/icones/server-8C9BFF.png"/>
           <p:cNvPicPr>
             <a:picLocks noChangeAspect="1"/>
           </p:cNvPicPr>
           <p:nvPr/>
         </p:nvPicPr>
         <p:blipFill>
-          <a:blip r:embed="rId4"/>
+          <a:blip r:embed="rId6"/>
           <a:stretch>
             <a:fillRect/>
           </a:stretch>
@@ -3188,11 +3001,11 @@
           <a:bodyPr wrap="square" lIns="0" tIns="0" rIns="0" bIns="0" rtlCol="0" anchor="t"/>
           <a:lstStyle/>
           <a:p>
-            <a:pPr indent="0" marL="0">
-              <a:buNone/>
-            </a:pPr>
-            <a:r>
-              <a:rPr lang="en-US" sz="1000" b="1" spc="120" kern="0" dirty="0">
+            <a:pPr marL="0" indent="0">
+              <a:buNone/>
+            </a:pPr>
+            <a:r>
+              <a:rPr lang="en-US" sz="1000" b="1" kern="0" spc="120" dirty="0">
                 <a:solidFill>
                   <a:srgbClr val="8C9BFF"/>
                 </a:solidFill>
@@ -3227,7 +3040,7 @@
           <a:bodyPr wrap="square" lIns="0" tIns="0" rIns="0" bIns="0" rtlCol="0" anchor="t"/>
           <a:lstStyle/>
           <a:p>
-            <a:pPr indent="0" marL="0">
+            <a:pPr marL="0" indent="0">
               <a:buNone/>
             </a:pPr>
             <a:r>
@@ -3271,14 +3084,14 @@
       </p:sp>
       <p:pic>
         <p:nvPicPr>
-          <p:cNvPr id="17" name="Image 4" descr="C:/Users/49816471825/AppData/Local/Temp/lockmachine/deck/cards/painel-yellow-383x290.png">    </p:cNvPr>
+          <p:cNvPr id="17" name="Image 4" descr="C:/Users/49816471825/AppData/Local/Temp/lockmachine/deck/cards/painel-yellow-383x290.png"/>
           <p:cNvPicPr>
             <a:picLocks noChangeAspect="1"/>
           </p:cNvPicPr>
           <p:nvPr/>
         </p:nvPicPr>
         <p:blipFill>
-          <a:blip r:embed="rId5"/>
+          <a:blip r:embed="rId7"/>
           <a:stretch>
             <a:fillRect/>
           </a:stretch>
@@ -3346,14 +3159,14 @@
       </p:sp>
       <p:pic>
         <p:nvPicPr>
-          <p:cNvPr id="20" name="Image 5" descr="C:/Users/49816471825/AppData/Local/Temp/lockmachine/deck/icones/users-FFD23F.png">    </p:cNvPr>
+          <p:cNvPr id="20" name="Image 5" descr="C:/Users/49816471825/AppData/Local/Temp/lockmachine/deck/icones/users-FFD23F.png"/>
           <p:cNvPicPr>
             <a:picLocks noChangeAspect="1"/>
           </p:cNvPicPr>
           <p:nvPr/>
         </p:nvPicPr>
         <p:blipFill>
-          <a:blip r:embed="rId6"/>
+          <a:blip r:embed="rId8"/>
           <a:stretch>
             <a:fillRect/>
           </a:stretch>
@@ -3389,11 +3202,11 @@
           <a:bodyPr wrap="square" lIns="0" tIns="0" rIns="0" bIns="0" rtlCol="0" anchor="t"/>
           <a:lstStyle/>
           <a:p>
-            <a:pPr indent="0" marL="0">
-              <a:buNone/>
-            </a:pPr>
-            <a:r>
-              <a:rPr lang="en-US" sz="1000" b="1" spc="120" kern="0" dirty="0">
+            <a:pPr marL="0" indent="0">
+              <a:buNone/>
+            </a:pPr>
+            <a:r>
+              <a:rPr lang="en-US" sz="1000" b="1" kern="0" spc="120" dirty="0">
                 <a:solidFill>
                   <a:srgbClr val="FFD23F"/>
                 </a:solidFill>
@@ -3428,7 +3241,7 @@
           <a:bodyPr wrap="square" lIns="0" tIns="0" rIns="0" bIns="0" rtlCol="0" anchor="t"/>
           <a:lstStyle/>
           <a:p>
-            <a:pPr indent="0" marL="0">
+            <a:pPr marL="0" indent="0">
               <a:buNone/>
             </a:pPr>
             <a:r>
@@ -3467,7 +3280,7 @@
           <a:bodyPr wrap="square" lIns="0" tIns="0" rIns="0" bIns="0" rtlCol="0" anchor="ctr"/>
           <a:lstStyle/>
           <a:p>
-            <a:pPr indent="0" marL="0">
+            <a:pPr marL="0" indent="0">
               <a:buNone/>
             </a:pPr>
             <a:r>
@@ -3481,9 +3294,6 @@
               </a:rPr>
               <a:t>Sem capacitação </a:t>
             </a:r>
-            <a:pPr indent="0" marL="0">
-              <a:buNone/>
-            </a:pPr>
             <a:r>
               <a:rPr lang="en-US" sz="4000" b="1" dirty="0">
                 <a:solidFill>
@@ -3495,9 +3305,6 @@
               </a:rPr>
               <a:t>válida</a:t>
             </a:r>
-            <a:pPr indent="0" marL="0">
-              <a:buNone/>
-            </a:pPr>
             <a:r>
               <a:rPr lang="en-US" sz="4000" b="1" dirty="0">
                 <a:solidFill>
@@ -3533,7 +3340,7 @@
           </a:prstGeom>
           <a:extLst>
             <a:ext uri="{C572A759-6A51-4108-AA02-DFA0A04FC94B}">
-              <ma14:wrappingTextBoxFlag xmlns:ma14="http://schemas.microsoft.com/office/mac/drawingml/2011/main" val="0"/>
+              <ma14:wrappingTextBoxFlag xmlns="" xmlns:ma14="http://schemas.microsoft.com/office/mac/drawingml/2011/main" val="0"/>
             </a:ext>
           </a:extLst>
         </p:spPr>
@@ -3554,7 +3361,7 @@
           <a:p>
             <a:pPr algn="r"/>
             <a:fld id="{F7021451-1387-4CA6-816F-3879F97B5CBC}" type="slidenum">
-              <a:rPr b="0" lang="en-US"/>
+              <a:rPr lang="en-US" b="0"/>
               <a:t>10</a:t>
             </a:fld>
             <a:endParaRPr lang="en-US"/>
@@ -3589,9 +3396,11 @@
       <p:sp>
         <p:nvSpPr>
           <p:cNvPr id="2" name="Text 1"/>
-          <p:cNvSpPr/>
+          <p:cNvSpPr>
+            <a:spLocks noGrp="1"/>
+          </p:cNvSpPr>
           <p:nvPr>
-            <p:ph idx="102" type="title" hasCustomPrompt="1"/>
+            <p:ph type="title" idx="102" hasCustomPrompt="1"/>
           </p:nvPr>
         </p:nvSpPr>
         <p:spPr>
@@ -3609,7 +3418,7 @@
           <a:bodyPr wrap="square" lIns="0" tIns="0" rIns="0" bIns="0" rtlCol="0" anchor="ctr"/>
           <a:lstStyle/>
           <a:p>
-            <a:pPr algn="l" indent="0" marL="0">
+            <a:pPr marL="0" indent="0" algn="l">
               <a:buNone/>
             </a:pPr>
             <a:r>
@@ -3623,9 +3432,6 @@
               </a:rPr>
               <a:t>10  </a:t>
             </a:r>
-            <a:pPr algn="l" indent="0" marL="0">
-              <a:buNone/>
-            </a:pPr>
             <a:r>
               <a:rPr lang="en-US" sz="3200" b="1" dirty="0">
                 <a:solidFill>
@@ -3662,11 +3468,11 @@
           <a:bodyPr wrap="square" lIns="0" tIns="0" rIns="0" bIns="0" rtlCol="0" anchor="t"/>
           <a:lstStyle/>
           <a:p>
-            <a:pPr indent="0" marL="0">
-              <a:buNone/>
-            </a:pPr>
-            <a:r>
-              <a:rPr lang="en-US" sz="1700" dirty="0">
+            <a:pPr marL="0" indent="0">
+              <a:buNone/>
+            </a:pPr>
+            <a:r>
+              <a:rPr lang="pt-BR" sz="1700">
                 <a:solidFill>
                   <a:srgbClr val="A6ACC0"/>
                 </a:solidFill>
@@ -3674,7 +3480,29 @@
                 <a:ea typeface="Arial" pitchFamily="34" charset="-122"/>
                 <a:cs typeface="Arial" pitchFamily="34" charset="-120"/>
               </a:rPr>
-              <a:t>Agora saímos dos slides e mostramos o sistema funcionando.</a:t>
+              <a:t>Agora saímos dos slides e mostramos o sistema funcionando, no ar em </a:t>
+            </a:r>
+            <a:r>
+              <a:rPr lang="pt-BR" sz="1700" b="1">
+                <a:solidFill>
+                  <a:srgbClr val="FFD23F"/>
+                </a:solidFill>
+                <a:latin typeface="Arial" pitchFamily="34" charset="0"/>
+                <a:ea typeface="Arial" pitchFamily="34" charset="-122"/>
+                <a:cs typeface="Arial" pitchFamily="34" charset="-120"/>
+              </a:rPr>
+              <a:t>somoslinkwave.com.br</a:t>
+            </a:r>
+            <a:r>
+              <a:rPr lang="pt-BR" sz="1700">
+                <a:solidFill>
+                  <a:srgbClr val="A6ACC0"/>
+                </a:solidFill>
+                <a:latin typeface="Arial" pitchFamily="34" charset="0"/>
+                <a:ea typeface="Arial" pitchFamily="34" charset="-122"/>
+                <a:cs typeface="Arial" pitchFamily="34" charset="-120"/>
+              </a:rPr>
+              <a:t>.</a:t>
             </a:r>
             <a:endParaRPr lang="en-US" sz="1700" dirty="0"/>
           </a:p>
@@ -3682,158 +3510,7 @@
       </p:sp>
       <p:pic>
         <p:nvPicPr>
-          <p:cNvPr id="4" name="Image 0" descr="C:/Users/49816471825/AppData/Local/Temp/lockmachine/deck/cards/painel-x-383x430.png">    </p:cNvPr>
-          <p:cNvPicPr>
-            <a:picLocks noChangeAspect="1"/>
-          </p:cNvPicPr>
-          <p:nvPr/>
-        </p:nvPicPr>
-        <p:blipFill>
-          <a:blip r:embed="rId1"/>
-          <a:stretch>
-            <a:fillRect/>
-          </a:stretch>
-        </p:blipFill>
-        <p:spPr>
-          <a:xfrm>
-            <a:off x="262890" y="1680210"/>
-            <a:ext cx="4073652" cy="4503420"/>
-          </a:xfrm>
-          <a:prstGeom prst="rect">
-            <a:avLst/>
-          </a:prstGeom>
-        </p:spPr>
-      </p:pic>
-      <p:pic>
-        <p:nvPicPr>
-          <p:cNvPr id="5" name="Image 1" descr="C:/Users/49816471825/AppData/Local/Temp/lockmachine/deck/slides-img/site.png">    </p:cNvPr>
-          <p:cNvPicPr>
-            <a:picLocks noChangeAspect="1"/>
-          </p:cNvPicPr>
-          <p:nvPr/>
-        </p:nvPicPr>
-        <p:blipFill>
-          <a:blip r:embed="rId2"/>
-          <a:stretch>
-            <a:fillRect/>
-          </a:stretch>
-        </p:blipFill>
-        <p:spPr>
-          <a:xfrm>
-            <a:off x="731520" y="2148840"/>
-            <a:ext cx="3136392" cy="1764221"/>
-          </a:xfrm>
-          <a:prstGeom prst="rect">
-            <a:avLst/>
-          </a:prstGeom>
-        </p:spPr>
-      </p:pic>
-      <p:sp>
-        <p:nvSpPr>
-          <p:cNvPr id="6" name="Text 2"/>
-          <p:cNvSpPr txBox="1"/>
-          <p:nvPr/>
-        </p:nvSpPr>
-        <p:spPr>
-          <a:xfrm>
-            <a:off x="777240" y="4114800"/>
-            <a:ext cx="3063240" cy="411480"/>
-          </a:xfrm>
-          <a:prstGeom prst="rect">
-            <a:avLst/>
-          </a:prstGeom>
-          <a:noFill/>
-          <a:ln/>
-        </p:spPr>
-        <p:txBody>
-          <a:bodyPr wrap="square" lIns="0" tIns="0" rIns="0" bIns="0" rtlCol="0" anchor="t"/>
-          <a:lstStyle/>
-          <a:p>
-            <a:pPr indent="0" marL="0">
-              <a:buNone/>
-            </a:pPr>
-            <a:r>
-              <a:rPr lang="en-US" sz="1800" b="1" dirty="0">
-                <a:solidFill>
-                  <a:srgbClr val="ECEEF4"/>
-                </a:solidFill>
-                <a:latin typeface="Arial" pitchFamily="34" charset="0"/>
-                <a:ea typeface="Arial" pitchFamily="34" charset="-122"/>
-                <a:cs typeface="Arial" pitchFamily="34" charset="-120"/>
-              </a:rPr>
-              <a:t>Site</a:t>
-            </a:r>
-            <a:endParaRPr lang="en-US" sz="1800" dirty="0"/>
-          </a:p>
-        </p:txBody>
-      </p:sp>
-      <p:sp>
-        <p:nvSpPr>
-          <p:cNvPr id="7" name="Text 3"/>
-          <p:cNvSpPr txBox="1"/>
-          <p:nvPr/>
-        </p:nvSpPr>
-        <p:spPr>
-          <a:xfrm>
-            <a:off x="777240" y="4572000"/>
-            <a:ext cx="3063240" cy="1188720"/>
-          </a:xfrm>
-          <a:prstGeom prst="rect">
-            <a:avLst/>
-          </a:prstGeom>
-          <a:noFill/>
-          <a:ln/>
-        </p:spPr>
-        <p:txBody>
-          <a:bodyPr wrap="square" lIns="0" tIns="0" rIns="0" bIns="0" rtlCol="0" anchor="t"/>
-          <a:lstStyle/>
-          <a:p>
-            <a:pPr marL="177800" indent="-177800">
-              <a:spcAft>
-                <a:spcPts val="600"/>
-              </a:spcAft>
-              <a:buSzPct val="100000"/>
-              <a:buChar char="•"/>
-            </a:pPr>
-            <a:r>
-              <a:rPr lang="en-US" sz="1400" dirty="0">
-                <a:solidFill>
-                  <a:srgbClr val="A6ACC0"/>
-                </a:solidFill>
-                <a:latin typeface="Arial" pitchFamily="34" charset="0"/>
-                <a:ea typeface="Arial" pitchFamily="34" charset="-122"/>
-                <a:cs typeface="Arial" pitchFamily="34" charset="-120"/>
-              </a:rPr>
-              <a:t>Apresentação da LinkWave e do produto</a:t>
-            </a:r>
-            <a:endParaRPr lang="en-US" sz="1400" dirty="0"/>
-          </a:p>
-          <a:p>
-            <a:pPr marL="177800" indent="-177800">
-              <a:spcAft>
-                <a:spcPts val="600"/>
-              </a:spcAft>
-              <a:buSzPct val="100000"/>
-              <a:buChar char="•"/>
-            </a:pPr>
-            <a:r>
-              <a:rPr lang="en-US" sz="1400" dirty="0">
-                <a:solidFill>
-                  <a:srgbClr val="A6ACC0"/>
-                </a:solidFill>
-                <a:latin typeface="Arial" pitchFamily="34" charset="0"/>
-                <a:ea typeface="Arial" pitchFamily="34" charset="-122"/>
-                <a:cs typeface="Arial" pitchFamily="34" charset="-120"/>
-              </a:rPr>
-              <a:t>Simulador da regra de acesso</a:t>
-            </a:r>
-            <a:endParaRPr lang="en-US" sz="1400" dirty="0"/>
-          </a:p>
-        </p:txBody>
-      </p:sp>
-      <p:pic>
-        <p:nvPicPr>
-          <p:cNvPr id="8" name="Image 2" descr="C:/Users/49816471825/AppData/Local/Temp/lockmachine/deck/cards/painel-x-383x430.png">    </p:cNvPr>
+          <p:cNvPr id="4" name="Image 0" descr="C:/Users/49816471825/AppData/Local/Temp/lockmachine/deck/cards/painel-x-383x430.png"/>
           <p:cNvPicPr>
             <a:picLocks noChangeAspect="1"/>
           </p:cNvPicPr>
@@ -3847,7 +3524,7 @@
         </p:blipFill>
         <p:spPr>
           <a:xfrm>
-            <a:off x="4057650" y="1680210"/>
+            <a:off x="262890" y="1680210"/>
             <a:ext cx="4073652" cy="4503420"/>
           </a:xfrm>
           <a:prstGeom prst="rect">
@@ -3857,7 +3534,7 @@
       </p:pic>
       <p:pic>
         <p:nvPicPr>
-          <p:cNvPr id="9" name="Image 3" descr="C:/Users/49816471825/AppData/Local/Temp/lockmachine/deck/slides-img/painel.png">    </p:cNvPr>
+          <p:cNvPr id="5" name="Image 1" descr="C:/Users/49816471825/AppData/Local/Temp/lockmachine/deck/slides-img/site.png"/>
           <p:cNvPicPr>
             <a:picLocks noChangeAspect="1"/>
           </p:cNvPicPr>
@@ -3871,8 +3548,8 @@
         </p:blipFill>
         <p:spPr>
           <a:xfrm>
-            <a:off x="4722876" y="2148840"/>
-            <a:ext cx="2743200" cy="1763486"/>
+            <a:off x="731520" y="2148840"/>
+            <a:ext cx="3136392" cy="1764221"/>
           </a:xfrm>
           <a:prstGeom prst="rect">
             <a:avLst/>
@@ -3881,13 +3558,13 @@
       </p:pic>
       <p:sp>
         <p:nvSpPr>
-          <p:cNvPr id="10" name="Text 4"/>
+          <p:cNvPr id="6" name="Text 2"/>
           <p:cNvSpPr txBox="1"/>
           <p:nvPr/>
         </p:nvSpPr>
         <p:spPr>
           <a:xfrm>
-            <a:off x="4572000" y="4114800"/>
+            <a:off x="777240" y="4114800"/>
             <a:ext cx="3063240" cy="411480"/>
           </a:xfrm>
           <a:prstGeom prst="rect">
@@ -3900,7 +3577,7 @@
           <a:bodyPr wrap="square" lIns="0" tIns="0" rIns="0" bIns="0" rtlCol="0" anchor="t"/>
           <a:lstStyle/>
           <a:p>
-            <a:pPr indent="0" marL="0">
+            <a:pPr marL="0" indent="0">
               <a:buNone/>
             </a:pPr>
             <a:r>
@@ -3912,7 +3589,7 @@
                 <a:ea typeface="Arial" pitchFamily="34" charset="-122"/>
                 <a:cs typeface="Arial" pitchFamily="34" charset="-120"/>
               </a:rPr>
-              <a:t>App do administrador</a:t>
+              <a:t>Site</a:t>
             </a:r>
             <a:endParaRPr lang="en-US" sz="1800" dirty="0"/>
           </a:p>
@@ -3920,13 +3597,13 @@
       </p:sp>
       <p:sp>
         <p:nvSpPr>
-          <p:cNvPr id="11" name="Text 5"/>
+          <p:cNvPr id="7" name="Text 3"/>
           <p:cNvSpPr txBox="1"/>
           <p:nvPr/>
         </p:nvSpPr>
         <p:spPr>
           <a:xfrm>
-            <a:off x="4572000" y="4572000"/>
+            <a:off x="777240" y="4572000"/>
             <a:ext cx="3063240" cy="1188720"/>
           </a:xfrm>
           <a:prstGeom prst="rect">
@@ -3955,7 +3632,7 @@
                 <a:ea typeface="Arial" pitchFamily="34" charset="-122"/>
                 <a:cs typeface="Arial" pitchFamily="34" charset="-120"/>
               </a:rPr>
-              <a:t>Painel, cadastros e capacitações</a:t>
+              <a:t>Apresentação da LinkWave e do produto</a:t>
             </a:r>
             <a:endParaRPr lang="en-US" sz="1400" dirty="0"/>
           </a:p>
@@ -3976,7 +3653,7 @@
                 <a:ea typeface="Arial" pitchFamily="34" charset="-122"/>
                 <a:cs typeface="Arial" pitchFamily="34" charset="-120"/>
               </a:rPr>
-              <a:t>Simular leitura e ver o histórico</a:t>
+              <a:t>Simulador da regra de acesso</a:t>
             </a:r>
             <a:endParaRPr lang="en-US" sz="1400" dirty="0"/>
           </a:p>
@@ -3984,7 +3661,31 @@
       </p:sp>
       <p:pic>
         <p:nvPicPr>
-          <p:cNvPr id="12" name="Image 4" descr="C:/Users/49816471825/AppData/Local/Temp/lockmachine/deck/cards/painel-x-383x430.png">    </p:cNvPr>
+          <p:cNvPr id="8" name="Image 2" descr="C:/Users/49816471825/AppData/Local/Temp/lockmachine/deck/cards/painel-x-383x430.png"/>
+          <p:cNvPicPr>
+            <a:picLocks noChangeAspect="1"/>
+          </p:cNvPicPr>
+          <p:nvPr/>
+        </p:nvPicPr>
+        <p:blipFill>
+          <a:blip r:embed="rId3"/>
+          <a:stretch>
+            <a:fillRect/>
+          </a:stretch>
+        </p:blipFill>
+        <p:spPr>
+          <a:xfrm>
+            <a:off x="4057650" y="1680210"/>
+            <a:ext cx="4073652" cy="4503420"/>
+          </a:xfrm>
+          <a:prstGeom prst="rect">
+            <a:avLst/>
+          </a:prstGeom>
+        </p:spPr>
+      </p:pic>
+      <p:pic>
+        <p:nvPicPr>
+          <p:cNvPr id="9" name="Image 3" descr="C:/Users/49816471825/AppData/Local/Temp/lockmachine/deck/slides-img/painel.png"/>
           <p:cNvPicPr>
             <a:picLocks noChangeAspect="1"/>
           </p:cNvPicPr>
@@ -3998,6 +3699,133 @@
         </p:blipFill>
         <p:spPr>
           <a:xfrm>
+            <a:off x="4722876" y="2148840"/>
+            <a:ext cx="2743200" cy="1763486"/>
+          </a:xfrm>
+          <a:prstGeom prst="rect">
+            <a:avLst/>
+          </a:prstGeom>
+        </p:spPr>
+      </p:pic>
+      <p:sp>
+        <p:nvSpPr>
+          <p:cNvPr id="10" name="Text 4"/>
+          <p:cNvSpPr txBox="1"/>
+          <p:nvPr/>
+        </p:nvSpPr>
+        <p:spPr>
+          <a:xfrm>
+            <a:off x="4572000" y="4114800"/>
+            <a:ext cx="3063240" cy="411480"/>
+          </a:xfrm>
+          <a:prstGeom prst="rect">
+            <a:avLst/>
+          </a:prstGeom>
+          <a:noFill/>
+          <a:ln/>
+        </p:spPr>
+        <p:txBody>
+          <a:bodyPr wrap="square" lIns="0" tIns="0" rIns="0" bIns="0" rtlCol="0" anchor="t"/>
+          <a:lstStyle/>
+          <a:p>
+            <a:pPr marL="0" indent="0">
+              <a:buNone/>
+            </a:pPr>
+            <a:r>
+              <a:rPr lang="en-US" sz="1800" b="1" dirty="0">
+                <a:solidFill>
+                  <a:srgbClr val="ECEEF4"/>
+                </a:solidFill>
+                <a:latin typeface="Arial" pitchFamily="34" charset="0"/>
+                <a:ea typeface="Arial" pitchFamily="34" charset="-122"/>
+                <a:cs typeface="Arial" pitchFamily="34" charset="-120"/>
+              </a:rPr>
+              <a:t>App do administrador</a:t>
+            </a:r>
+            <a:endParaRPr lang="en-US" sz="1800" dirty="0"/>
+          </a:p>
+        </p:txBody>
+      </p:sp>
+      <p:sp>
+        <p:nvSpPr>
+          <p:cNvPr id="11" name="Text 5"/>
+          <p:cNvSpPr txBox="1"/>
+          <p:nvPr/>
+        </p:nvSpPr>
+        <p:spPr>
+          <a:xfrm>
+            <a:off x="4572000" y="4572000"/>
+            <a:ext cx="3063240" cy="1188720"/>
+          </a:xfrm>
+          <a:prstGeom prst="rect">
+            <a:avLst/>
+          </a:prstGeom>
+          <a:noFill/>
+          <a:ln/>
+        </p:spPr>
+        <p:txBody>
+          <a:bodyPr wrap="square" lIns="0" tIns="0" rIns="0" bIns="0" rtlCol="0" anchor="t"/>
+          <a:lstStyle/>
+          <a:p>
+            <a:pPr marL="177800" indent="-177800">
+              <a:spcAft>
+                <a:spcPts val="600"/>
+              </a:spcAft>
+              <a:buSzPct val="100000"/>
+              <a:buChar char="•"/>
+            </a:pPr>
+            <a:r>
+              <a:rPr lang="en-US" sz="1400" dirty="0">
+                <a:solidFill>
+                  <a:srgbClr val="A6ACC0"/>
+                </a:solidFill>
+                <a:latin typeface="Arial" pitchFamily="34" charset="0"/>
+                <a:ea typeface="Arial" pitchFamily="34" charset="-122"/>
+                <a:cs typeface="Arial" pitchFamily="34" charset="-120"/>
+              </a:rPr>
+              <a:t>Painel, cadastros e capacitações</a:t>
+            </a:r>
+            <a:endParaRPr lang="en-US" sz="1400" dirty="0"/>
+          </a:p>
+          <a:p>
+            <a:pPr marL="177800" indent="-177800">
+              <a:spcAft>
+                <a:spcPts val="600"/>
+              </a:spcAft>
+              <a:buSzPct val="100000"/>
+              <a:buChar char="•"/>
+            </a:pPr>
+            <a:r>
+              <a:rPr lang="en-US" sz="1400" dirty="0">
+                <a:solidFill>
+                  <a:srgbClr val="A6ACC0"/>
+                </a:solidFill>
+                <a:latin typeface="Arial" pitchFamily="34" charset="0"/>
+                <a:ea typeface="Arial" pitchFamily="34" charset="-122"/>
+                <a:cs typeface="Arial" pitchFamily="34" charset="-120"/>
+              </a:rPr>
+              <a:t>Simular leitura e ver o histórico</a:t>
+            </a:r>
+            <a:endParaRPr lang="en-US" sz="1400" dirty="0"/>
+          </a:p>
+        </p:txBody>
+      </p:sp>
+      <p:pic>
+        <p:nvPicPr>
+          <p:cNvPr id="12" name="Image 4" descr="C:/Users/49816471825/AppData/Local/Temp/lockmachine/deck/cards/painel-x-383x430.png"/>
+          <p:cNvPicPr>
+            <a:picLocks noChangeAspect="1"/>
+          </p:cNvPicPr>
+          <p:nvPr/>
+        </p:nvPicPr>
+        <p:blipFill>
+          <a:blip r:embed="rId3"/>
+          <a:stretch>
+            <a:fillRect/>
+          </a:stretch>
+        </p:blipFill>
+        <p:spPr>
+          <a:xfrm>
             <a:off x="7852410" y="1680210"/>
             <a:ext cx="4073652" cy="4503420"/>
           </a:xfrm>
@@ -4008,7 +3836,7 @@
       </p:pic>
       <p:pic>
         <p:nvPicPr>
-          <p:cNvPr id="13" name="Image 5" descr="C:/Users/49816471825/AppData/Local/Temp/lockmachine/deck/slides-img/cel-inicio.png">    </p:cNvPr>
+          <p:cNvPr id="13" name="Image 5" descr="C:/Users/49816471825/AppData/Local/Temp/lockmachine/deck/slides-img/cel-inicio.png"/>
           <p:cNvPicPr>
             <a:picLocks noChangeAspect="1"/>
           </p:cNvPicPr>
@@ -4032,7 +3860,7 @@
       </p:pic>
       <p:pic>
         <p:nvPicPr>
-          <p:cNvPr id="14" name="Image 6" descr="C:/Users/49816471825/AppData/Local/Temp/lockmachine/deck/slides-img/cel-capacitacoes.png">    </p:cNvPr>
+          <p:cNvPr id="14" name="Image 6" descr="C:/Users/49816471825/AppData/Local/Temp/lockmachine/deck/slides-img/cel-capacitacoes.png"/>
           <p:cNvPicPr>
             <a:picLocks noChangeAspect="1"/>
           </p:cNvPicPr>
@@ -4075,7 +3903,7 @@
           <a:bodyPr wrap="square" lIns="0" tIns="0" rIns="0" bIns="0" rtlCol="0" anchor="t"/>
           <a:lstStyle/>
           <a:p>
-            <a:pPr indent="0" marL="0">
+            <a:pPr marL="0" indent="0">
               <a:buNone/>
             </a:pPr>
             <a:r>
@@ -4177,7 +4005,7 @@
           </a:prstGeom>
           <a:extLst>
             <a:ext uri="{C572A759-6A51-4108-AA02-DFA0A04FC94B}">
-              <ma14:wrappingTextBoxFlag xmlns:ma14="http://schemas.microsoft.com/office/mac/drawingml/2011/main" val="0"/>
+              <ma14:wrappingTextBoxFlag xmlns="" xmlns:ma14="http://schemas.microsoft.com/office/mac/drawingml/2011/main" val="0"/>
             </a:ext>
           </a:extLst>
         </p:spPr>
@@ -4198,7 +4026,7 @@
           <a:p>
             <a:pPr algn="r"/>
             <a:fld id="{F7021451-1387-4CA6-816F-3879F97B5CBC}" type="slidenum">
-              <a:rPr b="0" lang="en-US"/>
+              <a:rPr lang="en-US" b="0"/>
               <a:t>11</a:t>
             </a:fld>
             <a:endParaRPr lang="en-US"/>
@@ -4232,14 +4060,14 @@
       </p:grpSpPr>
       <p:pic>
         <p:nvPicPr>
-          <p:cNvPr id="2" name="Image 0" descr="C:/Users/49816471825/AppData/Local/Temp/lockmachine/deck/slides-img/fim-simbolo.png">    </p:cNvPr>
+          <p:cNvPr id="2" name="Image 0" descr="C:/Users/49816471825/AppData/Local/Temp/lockmachine/deck/slides-img/fim-simbolo.png"/>
           <p:cNvPicPr>
             <a:picLocks noChangeAspect="1"/>
           </p:cNvPicPr>
           <p:nvPr/>
         </p:nvPicPr>
         <p:blipFill>
-          <a:blip r:embed="rId1"/>
+          <a:blip r:embed="rId3"/>
           <a:stretch>
             <a:fillRect/>
           </a:stretch>
@@ -4275,7 +4103,7 @@
           <a:bodyPr wrap="square" lIns="0" tIns="0" rIns="0" bIns="0" rtlCol="0" anchor="ctr"/>
           <a:lstStyle/>
           <a:p>
-            <a:pPr indent="0" marL="0">
+            <a:pPr marL="0" indent="0">
               <a:buNone/>
             </a:pPr>
             <a:r>
@@ -4314,7 +4142,7 @@
           <a:bodyPr wrap="square" lIns="0" tIns="0" rIns="0" bIns="0" rtlCol="0" anchor="ctr"/>
           <a:lstStyle/>
           <a:p>
-            <a:pPr indent="0" marL="0">
+            <a:pPr marL="0" indent="0">
               <a:buNone/>
             </a:pPr>
             <a:r>
@@ -4353,11 +4181,11 @@
           <a:bodyPr wrap="square" lIns="0" tIns="0" rIns="0" bIns="0" rtlCol="0" anchor="t"/>
           <a:lstStyle/>
           <a:p>
-            <a:pPr indent="0" marL="0">
-              <a:buNone/>
-            </a:pPr>
-            <a:r>
-              <a:rPr lang="en-US" sz="1000" b="1" spc="120" kern="0" dirty="0">
+            <a:pPr marL="0" indent="0">
+              <a:buNone/>
+            </a:pPr>
+            <a:r>
+              <a:rPr lang="en-US" sz="1000" b="1" kern="0" spc="120" dirty="0">
                 <a:solidFill>
                   <a:srgbClr val="7D849C"/>
                 </a:solidFill>
@@ -4394,7 +4222,7 @@
           <a:bodyPr wrap="square" lIns="0" tIns="0" rIns="0" bIns="0" rtlCol="0" anchor="ctr"/>
           <a:lstStyle/>
           <a:p>
-            <a:pPr algn="ctr" indent="0" marL="0">
+            <a:pPr marL="0" indent="0" algn="ctr">
               <a:buNone/>
             </a:pPr>
             <a:r>
@@ -4433,7 +4261,7 @@
           <a:bodyPr wrap="square" lIns="0" tIns="0" rIns="0" bIns="0" rtlCol="0" anchor="ctr"/>
           <a:lstStyle/>
           <a:p>
-            <a:pPr indent="0" marL="0">
+            <a:pPr marL="0" indent="0">
               <a:buNone/>
             </a:pPr>
             <a:r>
@@ -4447,9 +4275,6 @@
               </a:rPr>
               <a:t>Leonardo Kronka Rodrigues  </a:t>
             </a:r>
-            <a:pPr indent="0" marL="0">
-              <a:buNone/>
-            </a:pPr>
             <a:r>
               <a:rPr lang="en-US" sz="1200" dirty="0">
                 <a:solidFill>
@@ -4488,7 +4313,7 @@
           <a:bodyPr wrap="square" lIns="0" tIns="0" rIns="0" bIns="0" rtlCol="0" anchor="ctr"/>
           <a:lstStyle/>
           <a:p>
-            <a:pPr algn="ctr" indent="0" marL="0">
+            <a:pPr marL="0" indent="0" algn="ctr">
               <a:buNone/>
             </a:pPr>
             <a:r>
@@ -4527,7 +4352,7 @@
           <a:bodyPr wrap="square" lIns="0" tIns="0" rIns="0" bIns="0" rtlCol="0" anchor="ctr"/>
           <a:lstStyle/>
           <a:p>
-            <a:pPr indent="0" marL="0">
+            <a:pPr marL="0" indent="0">
               <a:buNone/>
             </a:pPr>
             <a:r>
@@ -4541,9 +4366,6 @@
               </a:rPr>
               <a:t>Cauê Henrique de Oliveira  </a:t>
             </a:r>
-            <a:pPr indent="0" marL="0">
-              <a:buNone/>
-            </a:pPr>
             <a:r>
               <a:rPr lang="en-US" sz="1200" dirty="0">
                 <a:solidFill>
@@ -4582,7 +4404,7 @@
           <a:bodyPr wrap="square" lIns="0" tIns="0" rIns="0" bIns="0" rtlCol="0" anchor="ctr"/>
           <a:lstStyle/>
           <a:p>
-            <a:pPr algn="ctr" indent="0" marL="0">
+            <a:pPr marL="0" indent="0" algn="ctr">
               <a:buNone/>
             </a:pPr>
             <a:r>
@@ -4621,7 +4443,7 @@
           <a:bodyPr wrap="square" lIns="0" tIns="0" rIns="0" bIns="0" rtlCol="0" anchor="ctr"/>
           <a:lstStyle/>
           <a:p>
-            <a:pPr indent="0" marL="0">
+            <a:pPr marL="0" indent="0">
               <a:buNone/>
             </a:pPr>
             <a:r>
@@ -4635,9 +4457,6 @@
               </a:rPr>
               <a:t>Evelyn Caporali Escanavaque  </a:t>
             </a:r>
-            <a:pPr indent="0" marL="0">
-              <a:buNone/>
-            </a:pPr>
             <a:r>
               <a:rPr lang="en-US" sz="1200" dirty="0">
                 <a:solidFill>
@@ -4680,7 +4499,7 @@
           <a:bodyPr wrap="square" lIns="0" tIns="0" rIns="0" bIns="0" rtlCol="0" anchor="ctr"/>
           <a:lstStyle/>
           <a:p>
-            <a:pPr algn="ctr" indent="0" marL="0">
+            <a:pPr marL="0" indent="0" algn="ctr">
               <a:buNone/>
             </a:pPr>
             <a:r>
@@ -4719,7 +4538,7 @@
           <a:bodyPr wrap="square" lIns="0" tIns="0" rIns="0" bIns="0" rtlCol="0" anchor="ctr"/>
           <a:lstStyle/>
           <a:p>
-            <a:pPr indent="0" marL="0">
+            <a:pPr marL="0" indent="0">
               <a:buNone/>
             </a:pPr>
             <a:r>
@@ -4733,9 +4552,6 @@
               </a:rPr>
               <a:t>João Victor Monteiro Gamero  </a:t>
             </a:r>
-            <a:pPr indent="0" marL="0">
-              <a:buNone/>
-            </a:pPr>
             <a:r>
               <a:rPr lang="en-US" sz="1200" dirty="0">
                 <a:solidFill>
@@ -4774,7 +4590,7 @@
           <a:bodyPr wrap="square" lIns="0" tIns="0" rIns="0" bIns="0" rtlCol="0" anchor="ctr"/>
           <a:lstStyle/>
           <a:p>
-            <a:pPr algn="ctr" indent="0" marL="0">
+            <a:pPr marL="0" indent="0" algn="ctr">
               <a:buNone/>
             </a:pPr>
             <a:r>
@@ -4813,7 +4629,7 @@
           <a:bodyPr wrap="square" lIns="0" tIns="0" rIns="0" bIns="0" rtlCol="0" anchor="ctr"/>
           <a:lstStyle/>
           <a:p>
-            <a:pPr indent="0" marL="0">
+            <a:pPr marL="0" indent="0">
               <a:buNone/>
             </a:pPr>
             <a:r>
@@ -4827,9 +4643,6 @@
               </a:rPr>
               <a:t>Gabriel Miranda  </a:t>
             </a:r>
-            <a:pPr indent="0" marL="0">
-              <a:buNone/>
-            </a:pPr>
             <a:r>
               <a:rPr lang="en-US" sz="1200" dirty="0">
                 <a:solidFill>
@@ -4866,11 +4679,11 @@
           <a:bodyPr wrap="square" lIns="0" tIns="0" rIns="0" bIns="0" rtlCol="0" anchor="t"/>
           <a:lstStyle/>
           <a:p>
-            <a:pPr indent="0" marL="0">
-              <a:buNone/>
-            </a:pPr>
-            <a:r>
-              <a:rPr lang="en-US" sz="1000" b="1" spc="120" kern="0" dirty="0">
+            <a:pPr marL="0" indent="0">
+              <a:buNone/>
+            </a:pPr>
+            <a:r>
+              <a:rPr lang="en-US" sz="1000" b="1" kern="0" spc="120">
                 <a:solidFill>
                   <a:srgbClr val="7D849C"/>
                 </a:solidFill>
@@ -4878,7 +4691,7 @@
                 <a:ea typeface="Arial" pitchFamily="34" charset="-122"/>
                 <a:cs typeface="Arial" pitchFamily="34" charset="-120"/>
               </a:rPr>
-              <a:t>15 · REFERÊNCIAS</a:t>
+              <a:t>REFERÊNCIAS</a:t>
             </a:r>
             <a:endParaRPr lang="en-US" sz="1000" dirty="0"/>
           </a:p>
@@ -4905,7 +4718,7 @@
           <a:bodyPr wrap="square" lIns="0" tIns="0" rIns="0" bIns="0" rtlCol="0" anchor="t"/>
           <a:lstStyle/>
           <a:p>
-            <a:pPr indent="0" marL="0">
+            <a:pPr marL="0" indent="0">
               <a:buNone/>
             </a:pPr>
             <a:r>
@@ -4925,14 +4738,14 @@
       </p:sp>
       <p:pic>
         <p:nvPicPr>
-          <p:cNvPr id="18" name="Image 1" descr="C:/Users/49816471825/Desktop/linkwave-lockmachine/assets/brand/linkwave-horizontal-escuro.png">    </p:cNvPr>
+          <p:cNvPr id="18" name="Image 1" descr="C:/Users/49816471825/Desktop/linkwave-lockmachine/assets/brand/linkwave-horizontal-escuro.png"/>
           <p:cNvPicPr>
             <a:picLocks noChangeAspect="1"/>
           </p:cNvPicPr>
           <p:nvPr/>
         </p:nvPicPr>
         <p:blipFill>
-          <a:blip r:embed="rId2"/>
+          <a:blip r:embed="rId4"/>
           <a:stretch>
             <a:fillRect/>
           </a:stretch>
@@ -4949,14 +4762,14 @@
       </p:pic>
       <p:pic>
         <p:nvPicPr>
-          <p:cNvPr id="19" name="Image 2" descr="C:/Users/49816471825/Desktop/linkwave-lockmachine/assets/brand/lockmachine-horizontal-escuro.png">    </p:cNvPr>
+          <p:cNvPr id="19" name="Image 2" descr="C:/Users/49816471825/Desktop/linkwave-lockmachine/assets/brand/lockmachine-horizontal-escuro.png"/>
           <p:cNvPicPr>
             <a:picLocks noChangeAspect="1"/>
           </p:cNvPicPr>
           <p:nvPr/>
         </p:nvPicPr>
         <p:blipFill>
-          <a:blip r:embed="rId3"/>
+          <a:blip r:embed="rId5"/>
           <a:stretch>
             <a:fillRect/>
           </a:stretch>
@@ -4999,9 +4812,11 @@
       <p:sp>
         <p:nvSpPr>
           <p:cNvPr id="2" name="Text 1"/>
-          <p:cNvSpPr/>
+          <p:cNvSpPr>
+            <a:spLocks noGrp="1"/>
+          </p:cNvSpPr>
           <p:nvPr>
-            <p:ph idx="102" type="title" hasCustomPrompt="1"/>
+            <p:ph type="title" idx="102" hasCustomPrompt="1"/>
           </p:nvPr>
         </p:nvSpPr>
         <p:spPr>
@@ -5019,7 +4834,7 @@
           <a:bodyPr wrap="square" lIns="0" tIns="0" rIns="0" bIns="0" rtlCol="0" anchor="ctr"/>
           <a:lstStyle/>
           <a:p>
-            <a:pPr algn="l" indent="0" marL="0">
+            <a:pPr marL="0" indent="0" algn="l">
               <a:buNone/>
             </a:pPr>
             <a:r>
@@ -5033,9 +4848,6 @@
               </a:rPr>
               <a:t>01  </a:t>
             </a:r>
-            <a:pPr algn="l" indent="0" marL="0">
-              <a:buNone/>
-            </a:pPr>
             <a:r>
               <a:rPr lang="en-US" sz="3200" b="1" dirty="0">
                 <a:solidFill>
@@ -5072,7 +4884,7 @@
           <a:bodyPr wrap="square" lIns="0" tIns="0" rIns="0" bIns="0" rtlCol="0" anchor="t"/>
           <a:lstStyle/>
           <a:p>
-            <a:pPr indent="0" marL="0">
+            <a:pPr marL="0" indent="0">
               <a:buNone/>
             </a:pPr>
             <a:r>
@@ -5086,9 +4898,6 @@
               </a:rPr>
               <a:t>O cartão identifica. </a:t>
             </a:r>
-            <a:pPr indent="0" marL="0">
-              <a:buNone/>
-            </a:pPr>
             <a:r>
               <a:rPr lang="en-US" sz="3000" b="1" dirty="0">
                 <a:solidFill>
@@ -5125,7 +4934,7 @@
           <a:bodyPr wrap="square" lIns="0" tIns="0" rIns="0" bIns="0" rtlCol="0" anchor="t"/>
           <a:lstStyle/>
           <a:p>
-            <a:pPr indent="0" marL="0">
+            <a:pPr marL="0" indent="0">
               <a:buNone/>
             </a:pPr>
             <a:r>
@@ -5145,14 +4954,14 @@
       </p:sp>
       <p:pic>
         <p:nvPicPr>
-          <p:cNvPr id="5" name="Image 0" descr="C:/Users/49816471825/AppData/Local/Temp/lockmachine/deck/cards/painel-yellow-383x285.png">    </p:cNvPr>
+          <p:cNvPr id="5" name="Image 0" descr="C:/Users/49816471825/AppData/Local/Temp/lockmachine/deck/cards/painel-yellow-383x285.png"/>
           <p:cNvPicPr>
             <a:picLocks noChangeAspect="1"/>
           </p:cNvPicPr>
           <p:nvPr/>
         </p:nvPicPr>
         <p:blipFill>
-          <a:blip r:embed="rId1"/>
+          <a:blip r:embed="rId3"/>
           <a:stretch>
             <a:fillRect/>
           </a:stretch>
@@ -5220,14 +5029,14 @@
       </p:sp>
       <p:pic>
         <p:nvPicPr>
-          <p:cNvPr id="8" name="Image 1" descr="C:/Users/49816471825/AppData/Local/Temp/lockmachine/deck/icones/rfid-FFD23F.png">    </p:cNvPr>
+          <p:cNvPr id="8" name="Image 1" descr="C:/Users/49816471825/AppData/Local/Temp/lockmachine/deck/icones/rfid-FFD23F.png"/>
           <p:cNvPicPr>
             <a:picLocks noChangeAspect="1"/>
           </p:cNvPicPr>
           <p:nvPr/>
         </p:nvPicPr>
         <p:blipFill>
-          <a:blip r:embed="rId2"/>
+          <a:blip r:embed="rId4"/>
           <a:stretch>
             <a:fillRect/>
           </a:stretch>
@@ -5263,7 +5072,7 @@
           <a:bodyPr wrap="square" lIns="0" tIns="0" rIns="0" bIns="0" rtlCol="0" anchor="t"/>
           <a:lstStyle/>
           <a:p>
-            <a:pPr algn="r" indent="0" marL="0">
+            <a:pPr marL="0" indent="0" algn="r">
               <a:buNone/>
             </a:pPr>
             <a:r>
@@ -5302,7 +5111,7 @@
           <a:bodyPr wrap="square" lIns="0" tIns="0" rIns="0" bIns="0" rtlCol="0" anchor="t"/>
           <a:lstStyle/>
           <a:p>
-            <a:pPr indent="0" marL="0">
+            <a:pPr marL="0" indent="0">
               <a:buNone/>
             </a:pPr>
             <a:r>
@@ -5341,7 +5150,7 @@
           <a:bodyPr wrap="square" lIns="0" tIns="0" rIns="0" bIns="0" rtlCol="0" anchor="t"/>
           <a:lstStyle/>
           <a:p>
-            <a:pPr indent="0" marL="0">
+            <a:pPr marL="0" indent="0">
               <a:buNone/>
             </a:pPr>
             <a:r>
@@ -5385,14 +5194,14 @@
       </p:sp>
       <p:pic>
         <p:nvPicPr>
-          <p:cNvPr id="13" name="Image 2" descr="C:/Users/49816471825/AppData/Local/Temp/lockmachine/deck/cards/painel-cobalt-383x285.png">    </p:cNvPr>
+          <p:cNvPr id="13" name="Image 2" descr="C:/Users/49816471825/AppData/Local/Temp/lockmachine/deck/cards/painel-cobalt-383x285.png"/>
           <p:cNvPicPr>
             <a:picLocks noChangeAspect="1"/>
           </p:cNvPicPr>
           <p:nvPr/>
         </p:nvPicPr>
         <p:blipFill>
-          <a:blip r:embed="rId3"/>
+          <a:blip r:embed="rId5"/>
           <a:stretch>
             <a:fillRect/>
           </a:stretch>
@@ -5460,14 +5269,14 @@
       </p:sp>
       <p:pic>
         <p:nvPicPr>
-          <p:cNvPr id="16" name="Image 3" descr="C:/Users/49816471825/AppData/Local/Temp/lockmachine/deck/icones/server-8C9BFF.png">    </p:cNvPr>
+          <p:cNvPr id="16" name="Image 3" descr="C:/Users/49816471825/AppData/Local/Temp/lockmachine/deck/icones/server-8C9BFF.png"/>
           <p:cNvPicPr>
             <a:picLocks noChangeAspect="1"/>
           </p:cNvPicPr>
           <p:nvPr/>
         </p:nvPicPr>
         <p:blipFill>
-          <a:blip r:embed="rId4"/>
+          <a:blip r:embed="rId6"/>
           <a:stretch>
             <a:fillRect/>
           </a:stretch>
@@ -5503,7 +5312,7 @@
           <a:bodyPr wrap="square" lIns="0" tIns="0" rIns="0" bIns="0" rtlCol="0" anchor="t"/>
           <a:lstStyle/>
           <a:p>
-            <a:pPr algn="r" indent="0" marL="0">
+            <a:pPr marL="0" indent="0" algn="r">
               <a:buNone/>
             </a:pPr>
             <a:r>
@@ -5542,7 +5351,7 @@
           <a:bodyPr wrap="square" lIns="0" tIns="0" rIns="0" bIns="0" rtlCol="0" anchor="t"/>
           <a:lstStyle/>
           <a:p>
-            <a:pPr indent="0" marL="0">
+            <a:pPr marL="0" indent="0">
               <a:buNone/>
             </a:pPr>
             <a:r>
@@ -5581,7 +5390,7 @@
           <a:bodyPr wrap="square" lIns="0" tIns="0" rIns="0" bIns="0" rtlCol="0" anchor="t"/>
           <a:lstStyle/>
           <a:p>
-            <a:pPr indent="0" marL="0">
+            <a:pPr marL="0" indent="0">
               <a:buNone/>
             </a:pPr>
             <a:r>
@@ -5625,14 +5434,14 @@
       </p:sp>
       <p:pic>
         <p:nvPicPr>
-          <p:cNvPr id="21" name="Image 4" descr="C:/Users/49816471825/AppData/Local/Temp/lockmachine/deck/cards/painel-green-383x285.png">    </p:cNvPr>
+          <p:cNvPr id="21" name="Image 4" descr="C:/Users/49816471825/AppData/Local/Temp/lockmachine/deck/cards/painel-green-383x285.png"/>
           <p:cNvPicPr>
             <a:picLocks noChangeAspect="1"/>
           </p:cNvPicPr>
           <p:nvPr/>
         </p:nvPicPr>
         <p:blipFill>
-          <a:blip r:embed="rId5"/>
+          <a:blip r:embed="rId7"/>
           <a:stretch>
             <a:fillRect/>
           </a:stretch>
@@ -5700,14 +5509,14 @@
       </p:sp>
       <p:pic>
         <p:nvPicPr>
-          <p:cNvPr id="24" name="Image 5" descr="C:/Users/49816471825/AppData/Local/Temp/lockmachine/deck/icones/db-22D07B.png">    </p:cNvPr>
+          <p:cNvPr id="24" name="Image 5" descr="C:/Users/49816471825/AppData/Local/Temp/lockmachine/deck/icones/db-22D07B.png"/>
           <p:cNvPicPr>
             <a:picLocks noChangeAspect="1"/>
           </p:cNvPicPr>
           <p:nvPr/>
         </p:nvPicPr>
         <p:blipFill>
-          <a:blip r:embed="rId6"/>
+          <a:blip r:embed="rId8"/>
           <a:stretch>
             <a:fillRect/>
           </a:stretch>
@@ -5743,7 +5552,7 @@
           <a:bodyPr wrap="square" lIns="0" tIns="0" rIns="0" bIns="0" rtlCol="0" anchor="t"/>
           <a:lstStyle/>
           <a:p>
-            <a:pPr algn="r" indent="0" marL="0">
+            <a:pPr marL="0" indent="0" algn="r">
               <a:buNone/>
             </a:pPr>
             <a:r>
@@ -5782,7 +5591,7 @@
           <a:bodyPr wrap="square" lIns="0" tIns="0" rIns="0" bIns="0" rtlCol="0" anchor="t"/>
           <a:lstStyle/>
           <a:p>
-            <a:pPr indent="0" marL="0">
+            <a:pPr marL="0" indent="0">
               <a:buNone/>
             </a:pPr>
             <a:r>
@@ -5821,7 +5630,7 @@
           <a:bodyPr wrap="square" lIns="0" tIns="0" rIns="0" bIns="0" rtlCol="0" anchor="t"/>
           <a:lstStyle/>
           <a:p>
-            <a:pPr indent="0" marL="0">
+            <a:pPr marL="0" indent="0">
               <a:buNone/>
             </a:pPr>
             <a:r>
@@ -5841,7 +5650,7 @@
       </p:sp>
       <p:sp>
         <p:nvSpPr>
-          <p:cNvPr id="25" name="Slide Number Placeholder 0"/>
+          <p:cNvPr id="28" name="Slide Number Placeholder 0"/>
           <p:cNvSpPr>
             <a:spLocks noGrp="1"/>
           </p:cNvSpPr>
@@ -5859,7 +5668,7 @@
           </a:prstGeom>
           <a:extLst>
             <a:ext uri="{C572A759-6A51-4108-AA02-DFA0A04FC94B}">
-              <ma14:wrappingTextBoxFlag xmlns:ma14="http://schemas.microsoft.com/office/mac/drawingml/2011/main" val="0"/>
+              <ma14:wrappingTextBoxFlag xmlns="" xmlns:ma14="http://schemas.microsoft.com/office/mac/drawingml/2011/main" val="0"/>
             </a:ext>
           </a:extLst>
         </p:spPr>
@@ -5880,7 +5689,7 @@
           <a:p>
             <a:pPr algn="r"/>
             <a:fld id="{F7021451-1387-4CA6-816F-3879F97B5CBC}" type="slidenum">
-              <a:rPr b="0" lang="en-US"/>
+              <a:rPr lang="en-US" b="0"/>
               <a:t>2</a:t>
             </a:fld>
             <a:endParaRPr lang="en-US"/>
@@ -5915,9 +5724,11 @@
       <p:sp>
         <p:nvSpPr>
           <p:cNvPr id="2" name="Text 1"/>
-          <p:cNvSpPr/>
+          <p:cNvSpPr>
+            <a:spLocks noGrp="1"/>
+          </p:cNvSpPr>
           <p:nvPr>
-            <p:ph idx="102" type="title" hasCustomPrompt="1"/>
+            <p:ph type="title" idx="102" hasCustomPrompt="1"/>
           </p:nvPr>
         </p:nvSpPr>
         <p:spPr>
@@ -5935,11 +5746,11 @@
           <a:bodyPr wrap="square" lIns="0" tIns="0" rIns="0" bIns="0" rtlCol="0" anchor="ctr"/>
           <a:lstStyle/>
           <a:p>
-            <a:pPr algn="l" indent="0" marL="0">
-              <a:buNone/>
-            </a:pPr>
-            <a:r>
-              <a:rPr lang="en-US" sz="2000" b="1" dirty="0">
+            <a:pPr marL="0" indent="0" algn="l">
+              <a:buNone/>
+            </a:pPr>
+            <a:r>
+              <a:rPr lang="en-US" sz="2000" b="1">
                 <a:solidFill>
                   <a:srgbClr val="FFD23F"/>
                 </a:solidFill>
@@ -5947,11 +5758,8 @@
                 <a:ea typeface="Consolas" pitchFamily="34" charset="-122"/>
                 <a:cs typeface="Consolas" pitchFamily="34" charset="-120"/>
               </a:rPr>
-              <a:t>02 · 03  </a:t>
-            </a:r>
-            <a:pPr algn="l" indent="0" marL="0">
-              <a:buNone/>
-            </a:pPr>
+              <a:t>02  </a:t>
+            </a:r>
             <a:r>
               <a:rPr lang="en-US" sz="3200" b="1" dirty="0">
                 <a:solidFill>
@@ -5988,7 +5796,7 @@
           <a:bodyPr wrap="square" lIns="0" tIns="0" rIns="0" bIns="0" rtlCol="0" anchor="t"/>
           <a:lstStyle/>
           <a:p>
-            <a:pPr indent="0" marL="0">
+            <a:pPr marL="0" indent="0">
               <a:buNone/>
             </a:pPr>
             <a:r>
@@ -6008,14 +5816,14 @@
       </p:sp>
       <p:pic>
         <p:nvPicPr>
-          <p:cNvPr id="4" name="Image 0" descr="C:/Users/49816471825/AppData/Local/Temp/lockmachine/deck/cards/painel-cobalt-235x132.png">    </p:cNvPr>
+          <p:cNvPr id="4" name="Image 0" descr="C:/Users/49816471825/AppData/Local/Temp/lockmachine/deck/cards/painel-cobalt-235x132.png"/>
           <p:cNvPicPr>
             <a:picLocks noChangeAspect="1"/>
           </p:cNvPicPr>
           <p:nvPr/>
         </p:nvPicPr>
         <p:blipFill>
-          <a:blip r:embed="rId1"/>
+          <a:blip r:embed="rId3"/>
           <a:stretch>
             <a:fillRect/>
           </a:stretch>
@@ -6083,14 +5891,14 @@
       </p:sp>
       <p:pic>
         <p:nvPicPr>
-          <p:cNvPr id="7" name="Image 1" descr="C:/Users/49816471825/AppData/Local/Temp/lockmachine/deck/icones/grid-8C9BFF.png">    </p:cNvPr>
+          <p:cNvPr id="7" name="Image 1" descr="C:/Users/49816471825/AppData/Local/Temp/lockmachine/deck/icones/grid-8C9BFF.png"/>
           <p:cNvPicPr>
             <a:picLocks noChangeAspect="1"/>
           </p:cNvPicPr>
           <p:nvPr/>
         </p:nvPicPr>
         <p:blipFill>
-          <a:blip r:embed="rId2"/>
+          <a:blip r:embed="rId4"/>
           <a:stretch>
             <a:fillRect/>
           </a:stretch>
@@ -6126,11 +5934,11 @@
           <a:bodyPr wrap="square" lIns="0" tIns="0" rIns="0" bIns="0" rtlCol="0" anchor="t"/>
           <a:lstStyle/>
           <a:p>
-            <a:pPr indent="0" marL="0">
-              <a:buNone/>
-            </a:pPr>
-            <a:r>
-              <a:rPr lang="en-US" sz="1000" b="1" spc="80" kern="0" dirty="0">
+            <a:pPr marL="0" indent="0">
+              <a:buNone/>
+            </a:pPr>
+            <a:r>
+              <a:rPr lang="en-US" sz="1000" b="1" kern="0" spc="80" dirty="0">
                 <a:solidFill>
                   <a:srgbClr val="7D849C"/>
                 </a:solidFill>
@@ -6165,7 +5973,7 @@
           <a:bodyPr wrap="square" lIns="0" tIns="0" rIns="0" bIns="0" rtlCol="0" anchor="t"/>
           <a:lstStyle/>
           <a:p>
-            <a:pPr indent="0" marL="0">
+            <a:pPr marL="0" indent="0">
               <a:buNone/>
             </a:pPr>
             <a:r>
@@ -6185,7 +5993,7 @@
       </p:sp>
       <p:pic>
         <p:nvPicPr>
-          <p:cNvPr id="10" name="Image 2" descr="C:/Users/49816471825/AppData/Local/Temp/lockmachine/deck/cards/painel-cobalt-235x132.png">    </p:cNvPr>
+          <p:cNvPr id="10" name="Image 2" descr="C:/Users/49816471825/AppData/Local/Temp/lockmachine/deck/cards/painel-cobalt-235x132.png"/>
           <p:cNvPicPr>
             <a:picLocks noChangeAspect="1"/>
           </p:cNvPicPr>
@@ -6260,14 +6068,14 @@
       </p:sp>
       <p:pic>
         <p:nvPicPr>
-          <p:cNvPr id="13" name="Image 3" descr="C:/Users/49816471825/AppData/Local/Temp/lockmachine/deck/icones/card-8C9BFF.png">    </p:cNvPr>
+          <p:cNvPr id="13" name="Image 3" descr="C:/Users/49816471825/AppData/Local/Temp/lockmachine/deck/icones/card-8C9BFF.png"/>
           <p:cNvPicPr>
             <a:picLocks noChangeAspect="1"/>
           </p:cNvPicPr>
           <p:nvPr/>
         </p:nvPicPr>
         <p:blipFill>
-          <a:blip r:embed="rId4"/>
+          <a:blip r:embed="rId5"/>
           <a:stretch>
             <a:fillRect/>
           </a:stretch>
@@ -6303,11 +6111,11 @@
           <a:bodyPr wrap="square" lIns="0" tIns="0" rIns="0" bIns="0" rtlCol="0" anchor="t"/>
           <a:lstStyle/>
           <a:p>
-            <a:pPr indent="0" marL="0">
-              <a:buNone/>
-            </a:pPr>
-            <a:r>
-              <a:rPr lang="en-US" sz="1000" b="1" spc="80" kern="0" dirty="0">
+            <a:pPr marL="0" indent="0">
+              <a:buNone/>
+            </a:pPr>
+            <a:r>
+              <a:rPr lang="en-US" sz="1000" b="1" kern="0" spc="80" dirty="0">
                 <a:solidFill>
                   <a:srgbClr val="7D849C"/>
                 </a:solidFill>
@@ -6342,7 +6150,7 @@
           <a:bodyPr wrap="square" lIns="0" tIns="0" rIns="0" bIns="0" rtlCol="0" anchor="t"/>
           <a:lstStyle/>
           <a:p>
-            <a:pPr indent="0" marL="0">
+            <a:pPr marL="0" indent="0">
               <a:buNone/>
             </a:pPr>
             <a:r>
@@ -6362,14 +6170,14 @@
       </p:sp>
       <p:pic>
         <p:nvPicPr>
-          <p:cNvPr id="16" name="Image 4" descr="C:/Users/49816471825/AppData/Local/Temp/lockmachine/deck/cards/painel-steel-235x132.png">    </p:cNvPr>
+          <p:cNvPr id="16" name="Image 4" descr="C:/Users/49816471825/AppData/Local/Temp/lockmachine/deck/cards/painel-steel-235x132.png"/>
           <p:cNvPicPr>
             <a:picLocks noChangeAspect="1"/>
           </p:cNvPicPr>
           <p:nvPr/>
         </p:nvPicPr>
         <p:blipFill>
-          <a:blip r:embed="rId5"/>
+          <a:blip r:embed="rId6"/>
           <a:stretch>
             <a:fillRect/>
           </a:stretch>
@@ -6437,14 +6245,14 @@
       </p:sp>
       <p:pic>
         <p:nvPicPr>
-          <p:cNvPr id="19" name="Image 5" descr="C:/Users/49816471825/AppData/Local/Temp/lockmachine/deck/icones/files-A6ACC0.png">    </p:cNvPr>
+          <p:cNvPr id="19" name="Image 5" descr="C:/Users/49816471825/AppData/Local/Temp/lockmachine/deck/icones/files-A6ACC0.png"/>
           <p:cNvPicPr>
             <a:picLocks noChangeAspect="1"/>
           </p:cNvPicPr>
           <p:nvPr/>
         </p:nvPicPr>
         <p:blipFill>
-          <a:blip r:embed="rId6"/>
+          <a:blip r:embed="rId7"/>
           <a:stretch>
             <a:fillRect/>
           </a:stretch>
@@ -6480,11 +6288,11 @@
           <a:bodyPr wrap="square" lIns="0" tIns="0" rIns="0" bIns="0" rtlCol="0" anchor="t"/>
           <a:lstStyle/>
           <a:p>
-            <a:pPr indent="0" marL="0">
-              <a:buNone/>
-            </a:pPr>
-            <a:r>
-              <a:rPr lang="en-US" sz="1000" b="1" spc="80" kern="0" dirty="0">
+            <a:pPr marL="0" indent="0">
+              <a:buNone/>
+            </a:pPr>
+            <a:r>
+              <a:rPr lang="en-US" sz="1000" b="1" kern="0" spc="80" dirty="0">
                 <a:solidFill>
                   <a:srgbClr val="7D849C"/>
                 </a:solidFill>
@@ -6519,7 +6327,7 @@
           <a:bodyPr wrap="square" lIns="0" tIns="0" rIns="0" bIns="0" rtlCol="0" anchor="t"/>
           <a:lstStyle/>
           <a:p>
-            <a:pPr indent="0" marL="0">
+            <a:pPr marL="0" indent="0">
               <a:buNone/>
             </a:pPr>
             <a:r>
@@ -6539,14 +6347,14 @@
       </p:sp>
       <p:pic>
         <p:nvPicPr>
-          <p:cNvPr id="22" name="Image 6" descr="C:/Users/49816471825/AppData/Local/Temp/lockmachine/deck/cards/painel-yellow-235x132.png">    </p:cNvPr>
+          <p:cNvPr id="22" name="Image 6" descr="C:/Users/49816471825/AppData/Local/Temp/lockmachine/deck/cards/painel-yellow-235x132.png"/>
           <p:cNvPicPr>
             <a:picLocks noChangeAspect="1"/>
           </p:cNvPicPr>
           <p:nvPr/>
         </p:nvPicPr>
         <p:blipFill>
-          <a:blip r:embed="rId7"/>
+          <a:blip r:embed="rId8"/>
           <a:stretch>
             <a:fillRect/>
           </a:stretch>
@@ -6614,14 +6422,14 @@
       </p:sp>
       <p:pic>
         <p:nvPicPr>
-          <p:cNvPr id="25" name="Image 7" descr="C:/Users/49816471825/AppData/Local/Temp/lockmachine/deck/icones/calendar-FFD23F.png">    </p:cNvPr>
+          <p:cNvPr id="25" name="Image 7" descr="C:/Users/49816471825/AppData/Local/Temp/lockmachine/deck/icones/calendar-FFD23F.png"/>
           <p:cNvPicPr>
             <a:picLocks noChangeAspect="1"/>
           </p:cNvPicPr>
           <p:nvPr/>
         </p:nvPicPr>
         <p:blipFill>
-          <a:blip r:embed="rId8"/>
+          <a:blip r:embed="rId9"/>
           <a:stretch>
             <a:fillRect/>
           </a:stretch>
@@ -6657,11 +6465,11 @@
           <a:bodyPr wrap="square" lIns="0" tIns="0" rIns="0" bIns="0" rtlCol="0" anchor="t"/>
           <a:lstStyle/>
           <a:p>
-            <a:pPr indent="0" marL="0">
-              <a:buNone/>
-            </a:pPr>
-            <a:r>
-              <a:rPr lang="en-US" sz="1000" b="1" spc="80" kern="0" dirty="0">
+            <a:pPr marL="0" indent="0">
+              <a:buNone/>
+            </a:pPr>
+            <a:r>
+              <a:rPr lang="en-US" sz="1000" b="1" kern="0" spc="80" dirty="0">
                 <a:solidFill>
                   <a:srgbClr val="7D849C"/>
                 </a:solidFill>
@@ -6696,7 +6504,7 @@
           <a:bodyPr wrap="square" lIns="0" tIns="0" rIns="0" bIns="0" rtlCol="0" anchor="t"/>
           <a:lstStyle/>
           <a:p>
-            <a:pPr indent="0" marL="0">
+            <a:pPr marL="0" indent="0">
               <a:buNone/>
             </a:pPr>
             <a:r>
@@ -6716,14 +6524,14 @@
       </p:sp>
       <p:pic>
         <p:nvPicPr>
-          <p:cNvPr id="28" name="Image 8" descr="C:/Users/49816471825/AppData/Local/Temp/lockmachine/deck/cards/painel-yellow-235x132.png">    </p:cNvPr>
+          <p:cNvPr id="28" name="Image 8" descr="C:/Users/49816471825/AppData/Local/Temp/lockmachine/deck/cards/painel-yellow-235x132.png"/>
           <p:cNvPicPr>
             <a:picLocks noChangeAspect="1"/>
           </p:cNvPicPr>
           <p:nvPr/>
         </p:nvPicPr>
         <p:blipFill>
-          <a:blip r:embed="rId9"/>
+          <a:blip r:embed="rId8"/>
           <a:stretch>
             <a:fillRect/>
           </a:stretch>
@@ -6791,7 +6599,7 @@
       </p:sp>
       <p:pic>
         <p:nvPicPr>
-          <p:cNvPr id="31" name="Image 9" descr="C:/Users/49816471825/AppData/Local/Temp/lockmachine/deck/icones/users-FFD23F.png">    </p:cNvPr>
+          <p:cNvPr id="31" name="Image 9" descr="C:/Users/49816471825/AppData/Local/Temp/lockmachine/deck/icones/users-FFD23F.png"/>
           <p:cNvPicPr>
             <a:picLocks noChangeAspect="1"/>
           </p:cNvPicPr>
@@ -6834,11 +6642,11 @@
           <a:bodyPr wrap="square" lIns="0" tIns="0" rIns="0" bIns="0" rtlCol="0" anchor="t"/>
           <a:lstStyle/>
           <a:p>
-            <a:pPr indent="0" marL="0">
-              <a:buNone/>
-            </a:pPr>
-            <a:r>
-              <a:rPr lang="en-US" sz="1000" b="1" spc="80" kern="0" dirty="0">
+            <a:pPr marL="0" indent="0">
+              <a:buNone/>
+            </a:pPr>
+            <a:r>
+              <a:rPr lang="en-US" sz="1000" b="1" kern="0" spc="80" dirty="0">
                 <a:solidFill>
                   <a:srgbClr val="7D849C"/>
                 </a:solidFill>
@@ -6873,7 +6681,7 @@
           <a:bodyPr wrap="square" lIns="0" tIns="0" rIns="0" bIns="0" rtlCol="0" anchor="t"/>
           <a:lstStyle/>
           <a:p>
-            <a:pPr indent="0" marL="0">
+            <a:pPr marL="0" indent="0">
               <a:buNone/>
             </a:pPr>
             <a:r>
@@ -6893,7 +6701,7 @@
       </p:sp>
       <p:pic>
         <p:nvPicPr>
-          <p:cNvPr id="34" name="Image 10" descr="C:/Users/49816471825/AppData/Local/Temp/lockmachine/deck/cards/painel-red-235x132.png">    </p:cNvPr>
+          <p:cNvPr id="34" name="Image 10" descr="C:/Users/49816471825/AppData/Local/Temp/lockmachine/deck/cards/painel-red-235x132.png"/>
           <p:cNvPicPr>
             <a:picLocks noChangeAspect="1"/>
           </p:cNvPicPr>
@@ -6968,7 +6776,7 @@
       </p:sp>
       <p:pic>
         <p:nvPicPr>
-          <p:cNvPr id="37" name="Image 11" descr="C:/Users/49816471825/AppData/Local/Temp/lockmachine/deck/icones/x-FF7A6F.png">    </p:cNvPr>
+          <p:cNvPr id="37" name="Image 11" descr="C:/Users/49816471825/AppData/Local/Temp/lockmachine/deck/icones/x-FF7A6F.png"/>
           <p:cNvPicPr>
             <a:picLocks noChangeAspect="1"/>
           </p:cNvPicPr>
@@ -7011,11 +6819,11 @@
           <a:bodyPr wrap="square" lIns="0" tIns="0" rIns="0" bIns="0" rtlCol="0" anchor="t"/>
           <a:lstStyle/>
           <a:p>
-            <a:pPr indent="0" marL="0">
-              <a:buNone/>
-            </a:pPr>
-            <a:r>
-              <a:rPr lang="en-US" sz="1000" b="1" spc="80" kern="0" dirty="0">
+            <a:pPr marL="0" indent="0">
+              <a:buNone/>
+            </a:pPr>
+            <a:r>
+              <a:rPr lang="en-US" sz="1000" b="1" kern="0" spc="80" dirty="0">
                 <a:solidFill>
                   <a:srgbClr val="7D849C"/>
                 </a:solidFill>
@@ -7050,7 +6858,7 @@
           <a:bodyPr wrap="square" lIns="0" tIns="0" rIns="0" bIns="0" rtlCol="0" anchor="t"/>
           <a:lstStyle/>
           <a:p>
-            <a:pPr indent="0" marL="0">
+            <a:pPr marL="0" indent="0">
               <a:buNone/>
             </a:pPr>
             <a:r>
@@ -7089,7 +6897,7 @@
           <a:bodyPr wrap="square" lIns="0" tIns="0" rIns="0" bIns="0" rtlCol="0" anchor="t"/>
           <a:lstStyle/>
           <a:p>
-            <a:pPr indent="0" marL="0">
+            <a:pPr marL="0" indent="0">
               <a:buNone/>
             </a:pPr>
             <a:r>
@@ -7109,7 +6917,7 @@
       </p:sp>
       <p:pic>
         <p:nvPicPr>
-          <p:cNvPr id="41" name="Image 12" descr="C:/Users/49816471825/AppData/Local/Temp/lockmachine/deck/cards/painel-x-418x445.png">    </p:cNvPr>
+          <p:cNvPr id="41" name="Image 12" descr="C:/Users/49816471825/AppData/Local/Temp/lockmachine/deck/cards/painel-x-418x445.png"/>
           <p:cNvPicPr>
             <a:picLocks noChangeAspect="1"/>
           </p:cNvPicPr>
@@ -7152,7 +6960,7 @@
           <a:bodyPr wrap="square" lIns="0" tIns="0" rIns="0" bIns="0" rtlCol="0" anchor="t"/>
           <a:lstStyle/>
           <a:p>
-            <a:pPr indent="0" marL="0">
+            <a:pPr marL="0" indent="0">
               <a:buNone/>
             </a:pPr>
             <a:r>
@@ -7223,7 +7031,7 @@
       </p:sp>
       <p:pic>
         <p:nvPicPr>
-          <p:cNvPr id="45" name="Image 13" descr="C:/Users/49816471825/AppData/Local/Temp/lockmachine/deck/icones/shield-FF7A6F.png">    </p:cNvPr>
+          <p:cNvPr id="45" name="Image 13" descr="C:/Users/49816471825/AppData/Local/Temp/lockmachine/deck/icones/shield-FF7A6F.png"/>
           <p:cNvPicPr>
             <a:picLocks noChangeAspect="1"/>
           </p:cNvPicPr>
@@ -7266,7 +7074,7 @@
           <a:bodyPr wrap="square" lIns="0" tIns="0" rIns="0" bIns="0" rtlCol="0" anchor="t"/>
           <a:lstStyle/>
           <a:p>
-            <a:pPr indent="0" marL="0">
+            <a:pPr marL="0" indent="0">
               <a:buNone/>
             </a:pPr>
             <a:r>
@@ -7283,7 +7091,7 @@
             <a:endParaRPr lang="en-US" sz="1400" dirty="0"/>
           </a:p>
           <a:p>
-            <a:pPr indent="0" marL="0">
+            <a:pPr marL="0" indent="0">
               <a:buNone/>
             </a:pPr>
             <a:r>
@@ -7354,7 +7162,7 @@
       </p:sp>
       <p:pic>
         <p:nvPicPr>
-          <p:cNvPr id="49" name="Image 14" descr="C:/Users/49816471825/AppData/Local/Temp/lockmachine/deck/icones/history-8C9BFF.png">    </p:cNvPr>
+          <p:cNvPr id="49" name="Image 14" descr="C:/Users/49816471825/AppData/Local/Temp/lockmachine/deck/icones/history-8C9BFF.png"/>
           <p:cNvPicPr>
             <a:picLocks noChangeAspect="1"/>
           </p:cNvPicPr>
@@ -7397,7 +7205,7 @@
           <a:bodyPr wrap="square" lIns="0" tIns="0" rIns="0" bIns="0" rtlCol="0" anchor="t"/>
           <a:lstStyle/>
           <a:p>
-            <a:pPr indent="0" marL="0">
+            <a:pPr marL="0" indent="0">
               <a:buNone/>
             </a:pPr>
             <a:r>
@@ -7414,7 +7222,7 @@
             <a:endParaRPr lang="en-US" sz="1400" dirty="0"/>
           </a:p>
           <a:p>
-            <a:pPr indent="0" marL="0">
+            <a:pPr marL="0" indent="0">
               <a:buNone/>
             </a:pPr>
             <a:r>
@@ -7485,7 +7293,7 @@
       </p:sp>
       <p:pic>
         <p:nvPicPr>
-          <p:cNvPr id="53" name="Image 15" descr="C:/Users/49816471825/AppData/Local/Temp/lockmachine/deck/icones/check-22D07B.png">    </p:cNvPr>
+          <p:cNvPr id="53" name="Image 15" descr="C:/Users/49816471825/AppData/Local/Temp/lockmachine/deck/icones/check-22D07B.png"/>
           <p:cNvPicPr>
             <a:picLocks noChangeAspect="1"/>
           </p:cNvPicPr>
@@ -7528,7 +7336,7 @@
           <a:bodyPr wrap="square" lIns="0" tIns="0" rIns="0" bIns="0" rtlCol="0" anchor="t"/>
           <a:lstStyle/>
           <a:p>
-            <a:pPr indent="0" marL="0">
+            <a:pPr marL="0" indent="0">
               <a:buNone/>
             </a:pPr>
             <a:r>
@@ -7545,7 +7353,7 @@
             <a:endParaRPr lang="en-US" sz="1400" dirty="0"/>
           </a:p>
           <a:p>
-            <a:pPr indent="0" marL="0">
+            <a:pPr marL="0" indent="0">
               <a:buNone/>
             </a:pPr>
             <a:r>
@@ -7626,7 +7434,7 @@
           <a:bodyPr wrap="square" lIns="0" tIns="0" rIns="0" bIns="0" rtlCol="0" anchor="ctr"/>
           <a:lstStyle/>
           <a:p>
-            <a:pPr indent="0" marL="0">
+            <a:pPr marL="0" indent="0">
               <a:buNone/>
             </a:pPr>
             <a:r>
@@ -7646,7 +7454,7 @@
       </p:sp>
       <p:sp>
         <p:nvSpPr>
-          <p:cNvPr id="25" name="Slide Number Placeholder 0"/>
+          <p:cNvPr id="58" name="Slide Number Placeholder 0"/>
           <p:cNvSpPr>
             <a:spLocks noGrp="1"/>
           </p:cNvSpPr>
@@ -7664,7 +7472,7 @@
           </a:prstGeom>
           <a:extLst>
             <a:ext uri="{C572A759-6A51-4108-AA02-DFA0A04FC94B}">
-              <ma14:wrappingTextBoxFlag xmlns:ma14="http://schemas.microsoft.com/office/mac/drawingml/2011/main" val="0"/>
+              <ma14:wrappingTextBoxFlag xmlns="" xmlns:ma14="http://schemas.microsoft.com/office/mac/drawingml/2011/main" val="0"/>
             </a:ext>
           </a:extLst>
         </p:spPr>
@@ -7685,7 +7493,7 @@
           <a:p>
             <a:pPr algn="r"/>
             <a:fld id="{F7021451-1387-4CA6-816F-3879F97B5CBC}" type="slidenum">
-              <a:rPr b="0" lang="en-US"/>
+              <a:rPr lang="en-US" b="0"/>
               <a:t>3</a:t>
             </a:fld>
             <a:endParaRPr lang="en-US"/>
@@ -7720,9 +7528,11 @@
       <p:sp>
         <p:nvSpPr>
           <p:cNvPr id="2" name="Text 1"/>
-          <p:cNvSpPr/>
+          <p:cNvSpPr>
+            <a:spLocks noGrp="1"/>
+          </p:cNvSpPr>
           <p:nvPr>
-            <p:ph idx="102" type="title" hasCustomPrompt="1"/>
+            <p:ph type="title" idx="102" hasCustomPrompt="1"/>
           </p:nvPr>
         </p:nvSpPr>
         <p:spPr>
@@ -7740,11 +7550,11 @@
           <a:bodyPr wrap="square" lIns="0" tIns="0" rIns="0" bIns="0" rtlCol="0" anchor="ctr"/>
           <a:lstStyle/>
           <a:p>
-            <a:pPr algn="l" indent="0" marL="0">
-              <a:buNone/>
-            </a:pPr>
-            <a:r>
-              <a:rPr lang="en-US" sz="2000" b="1" dirty="0">
+            <a:pPr marL="0" indent="0" algn="l">
+              <a:buNone/>
+            </a:pPr>
+            <a:r>
+              <a:rPr lang="en-US" sz="2000" b="1">
                 <a:solidFill>
                   <a:srgbClr val="FFD23F"/>
                 </a:solidFill>
@@ -7752,11 +7562,8 @@
                 <a:ea typeface="Consolas" pitchFamily="34" charset="-122"/>
                 <a:cs typeface="Consolas" pitchFamily="34" charset="-120"/>
               </a:rPr>
-              <a:t>04  </a:t>
-            </a:r>
-            <a:pPr algn="l" indent="0" marL="0">
-              <a:buNone/>
-            </a:pPr>
+              <a:t>03  </a:t>
+            </a:r>
             <a:r>
               <a:rPr lang="en-US" sz="3200" b="1" dirty="0">
                 <a:solidFill>
@@ -7774,14 +7581,14 @@
       </p:sp>
       <p:pic>
         <p:nvPicPr>
-          <p:cNvPr id="3" name="Image 0" descr="C:/Users/49816471825/AppData/Local/Temp/lockmachine/deck/cards/painel2-yellow-1213x125.png">    </p:cNvPr>
+          <p:cNvPr id="3" name="Image 0" descr="C:/Users/49816471825/AppData/Local/Temp/lockmachine/deck/cards/painel2-yellow-1213x125.png"/>
           <p:cNvPicPr>
             <a:picLocks noChangeAspect="1"/>
           </p:cNvPicPr>
           <p:nvPr/>
         </p:nvPicPr>
         <p:blipFill>
-          <a:blip r:embed="rId1"/>
+          <a:blip r:embed="rId3"/>
           <a:stretch>
             <a:fillRect/>
           </a:stretch>
@@ -7817,11 +7624,11 @@
           <a:bodyPr wrap="square" lIns="0" tIns="0" rIns="0" bIns="0" rtlCol="0" anchor="t"/>
           <a:lstStyle/>
           <a:p>
-            <a:pPr indent="0" marL="0">
-              <a:buNone/>
-            </a:pPr>
-            <a:r>
-              <a:rPr lang="en-US" sz="1000" b="1" spc="120" kern="0" dirty="0">
+            <a:pPr marL="0" indent="0">
+              <a:buNone/>
+            </a:pPr>
+            <a:r>
+              <a:rPr lang="en-US" sz="1000" b="1" kern="0" spc="120" dirty="0">
                 <a:solidFill>
                   <a:srgbClr val="FFD23F"/>
                 </a:solidFill>
@@ -7856,7 +7663,7 @@
           <a:bodyPr wrap="square" lIns="0" tIns="0" rIns="0" bIns="0" rtlCol="0" anchor="t"/>
           <a:lstStyle/>
           <a:p>
-            <a:pPr indent="0" marL="0">
+            <a:pPr marL="0" indent="0">
               <a:buNone/>
             </a:pPr>
             <a:r>
@@ -7895,11 +7702,11 @@
           <a:bodyPr wrap="square" lIns="0" tIns="0" rIns="0" bIns="0" rtlCol="0" anchor="t"/>
           <a:lstStyle/>
           <a:p>
-            <a:pPr indent="0" marL="0">
-              <a:buNone/>
-            </a:pPr>
-            <a:r>
-              <a:rPr lang="en-US" sz="1000" b="1" spc="120" kern="0" dirty="0">
+            <a:pPr marL="0" indent="0">
+              <a:buNone/>
+            </a:pPr>
+            <a:r>
+              <a:rPr lang="en-US" sz="1000" b="1" kern="0" spc="120" dirty="0">
                 <a:solidFill>
                   <a:srgbClr val="7D849C"/>
                 </a:solidFill>
@@ -7915,14 +7722,14 @@
       </p:sp>
       <p:pic>
         <p:nvPicPr>
-          <p:cNvPr id="7" name="Image 1" descr="C:/Users/49816471825/AppData/Local/Temp/lockmachine/deck/cards/painel-green-229x265.png">    </p:cNvPr>
+          <p:cNvPr id="7" name="Image 1" descr="C:/Users/49816471825/AppData/Local/Temp/lockmachine/deck/cards/painel-green-229x265.png"/>
           <p:cNvPicPr>
             <a:picLocks noChangeAspect="1"/>
           </p:cNvPicPr>
           <p:nvPr/>
         </p:nvPicPr>
         <p:blipFill>
-          <a:blip r:embed="rId2"/>
+          <a:blip r:embed="rId4"/>
           <a:stretch>
             <a:fillRect/>
           </a:stretch>
@@ -7990,14 +7797,14 @@
       </p:sp>
       <p:pic>
         <p:nvPicPr>
-          <p:cNvPr id="10" name="Image 2" descr="C:/Users/49816471825/AppData/Local/Temp/lockmachine/deck/icones/db-22D07B.png">    </p:cNvPr>
+          <p:cNvPr id="10" name="Image 2" descr="C:/Users/49816471825/AppData/Local/Temp/lockmachine/deck/icones/db-22D07B.png"/>
           <p:cNvPicPr>
             <a:picLocks noChangeAspect="1"/>
           </p:cNvPicPr>
           <p:nvPr/>
         </p:nvPicPr>
         <p:blipFill>
-          <a:blip r:embed="rId3"/>
+          <a:blip r:embed="rId5"/>
           <a:stretch>
             <a:fillRect/>
           </a:stretch>
@@ -8033,7 +7840,7 @@
           <a:bodyPr wrap="square" lIns="0" tIns="0" rIns="0" bIns="0" rtlCol="0" anchor="t"/>
           <a:lstStyle/>
           <a:p>
-            <a:pPr indent="0" marL="0">
+            <a:pPr marL="0" indent="0">
               <a:buNone/>
             </a:pPr>
             <a:r>
@@ -8084,7 +7891,7 @@
           <a:bodyPr wrap="square" lIns="0" tIns="0" rIns="0" bIns="0" rtlCol="0" anchor="ctr"/>
           <a:lstStyle/>
           <a:p>
-            <a:pPr algn="ctr" indent="0" marL="0">
+            <a:pPr marL="0" indent="0" algn="ctr">
               <a:buNone/>
             </a:pPr>
             <a:r>
@@ -8104,14 +7911,14 @@
       </p:sp>
       <p:pic>
         <p:nvPicPr>
-          <p:cNvPr id="13" name="Image 3" descr="C:/Users/49816471825/AppData/Local/Temp/lockmachine/deck/cards/painel-red-229x265.png">    </p:cNvPr>
+          <p:cNvPr id="13" name="Image 3" descr="C:/Users/49816471825/AppData/Local/Temp/lockmachine/deck/cards/painel-red-229x265.png"/>
           <p:cNvPicPr>
             <a:picLocks noChangeAspect="1"/>
           </p:cNvPicPr>
           <p:nvPr/>
         </p:nvPicPr>
         <p:blipFill>
-          <a:blip r:embed="rId4"/>
+          <a:blip r:embed="rId6"/>
           <a:stretch>
             <a:fillRect/>
           </a:stretch>
@@ -8179,14 +7986,14 @@
       </p:sp>
       <p:pic>
         <p:nvPicPr>
-          <p:cNvPr id="16" name="Image 4" descr="C:/Users/49816471825/AppData/Local/Temp/lockmachine/deck/icones/server-FF7A6F.png">    </p:cNvPr>
+          <p:cNvPr id="16" name="Image 4" descr="C:/Users/49816471825/AppData/Local/Temp/lockmachine/deck/icones/server-FF7A6F.png"/>
           <p:cNvPicPr>
             <a:picLocks noChangeAspect="1"/>
           </p:cNvPicPr>
           <p:nvPr/>
         </p:nvPicPr>
         <p:blipFill>
-          <a:blip r:embed="rId5"/>
+          <a:blip r:embed="rId7"/>
           <a:stretch>
             <a:fillRect/>
           </a:stretch>
@@ -8222,7 +8029,7 @@
           <a:bodyPr wrap="square" lIns="0" tIns="0" rIns="0" bIns="0" rtlCol="0" anchor="t"/>
           <a:lstStyle/>
           <a:p>
-            <a:pPr indent="0" marL="0">
+            <a:pPr marL="0" indent="0">
               <a:buNone/>
             </a:pPr>
             <a:r>
@@ -8273,7 +8080,7 @@
           <a:bodyPr wrap="square" lIns="0" tIns="0" rIns="0" bIns="0" rtlCol="0" anchor="ctr"/>
           <a:lstStyle/>
           <a:p>
-            <a:pPr algn="ctr" indent="0" marL="0">
+            <a:pPr marL="0" indent="0" algn="ctr">
               <a:buNone/>
             </a:pPr>
             <a:r>
@@ -8293,14 +8100,14 @@
       </p:sp>
       <p:pic>
         <p:nvPicPr>
-          <p:cNvPr id="19" name="Image 5" descr="C:/Users/49816471825/AppData/Local/Temp/lockmachine/deck/cards/painel-cobalt-229x265.png">    </p:cNvPr>
+          <p:cNvPr id="19" name="Image 5" descr="C:/Users/49816471825/AppData/Local/Temp/lockmachine/deck/cards/painel-cobalt-229x265.png"/>
           <p:cNvPicPr>
             <a:picLocks noChangeAspect="1"/>
           </p:cNvPicPr>
           <p:nvPr/>
         </p:nvPicPr>
         <p:blipFill>
-          <a:blip r:embed="rId6"/>
+          <a:blip r:embed="rId8"/>
           <a:stretch>
             <a:fillRect/>
           </a:stretch>
@@ -8368,14 +8175,14 @@
       </p:sp>
       <p:pic>
         <p:nvPicPr>
-          <p:cNvPr id="22" name="Image 6" descr="C:/Users/49816471825/AppData/Local/Temp/lockmachine/deck/icones/browser-8C9BFF.png">    </p:cNvPr>
+          <p:cNvPr id="22" name="Image 6" descr="C:/Users/49816471825/AppData/Local/Temp/lockmachine/deck/icones/browser-8C9BFF.png"/>
           <p:cNvPicPr>
             <a:picLocks noChangeAspect="1"/>
           </p:cNvPicPr>
           <p:nvPr/>
         </p:nvPicPr>
         <p:blipFill>
-          <a:blip r:embed="rId7"/>
+          <a:blip r:embed="rId9"/>
           <a:stretch>
             <a:fillRect/>
           </a:stretch>
@@ -8411,7 +8218,7 @@
           <a:bodyPr wrap="square" lIns="0" tIns="0" rIns="0" bIns="0" rtlCol="0" anchor="t"/>
           <a:lstStyle/>
           <a:p>
-            <a:pPr indent="0" marL="0">
+            <a:pPr marL="0" indent="0">
               <a:buNone/>
             </a:pPr>
             <a:r>
@@ -8462,7 +8269,7 @@
           <a:bodyPr wrap="square" lIns="0" tIns="0" rIns="0" bIns="0" rtlCol="0" anchor="ctr"/>
           <a:lstStyle/>
           <a:p>
-            <a:pPr algn="ctr" indent="0" marL="0">
+            <a:pPr marL="0" indent="0" algn="ctr">
               <a:buNone/>
             </a:pPr>
             <a:r>
@@ -8482,14 +8289,14 @@
       </p:sp>
       <p:pic>
         <p:nvPicPr>
-          <p:cNvPr id="25" name="Image 7" descr="C:/Users/49816471825/AppData/Local/Temp/lockmachine/deck/cards/painel-yellow-229x265.png">    </p:cNvPr>
+          <p:cNvPr id="25" name="Image 7" descr="C:/Users/49816471825/AppData/Local/Temp/lockmachine/deck/cards/painel-yellow-229x265.png"/>
           <p:cNvPicPr>
             <a:picLocks noChangeAspect="1"/>
           </p:cNvPicPr>
           <p:nvPr/>
         </p:nvPicPr>
         <p:blipFill>
-          <a:blip r:embed="rId8"/>
+          <a:blip r:embed="rId10"/>
           <a:stretch>
             <a:fillRect/>
           </a:stretch>
@@ -8557,14 +8364,14 @@
       </p:sp>
       <p:pic>
         <p:nvPicPr>
-          <p:cNvPr id="28" name="Image 8" descr="C:/Users/49816471825/AppData/Local/Temp/lockmachine/deck/icones/chip-FFD23F.png">    </p:cNvPr>
+          <p:cNvPr id="28" name="Image 8" descr="C:/Users/49816471825/AppData/Local/Temp/lockmachine/deck/icones/chip-FFD23F.png"/>
           <p:cNvPicPr>
             <a:picLocks noChangeAspect="1"/>
           </p:cNvPicPr>
           <p:nvPr/>
         </p:nvPicPr>
         <p:blipFill>
-          <a:blip r:embed="rId9"/>
+          <a:blip r:embed="rId11"/>
           <a:stretch>
             <a:fillRect/>
           </a:stretch>
@@ -8600,7 +8407,7 @@
           <a:bodyPr wrap="square" lIns="0" tIns="0" rIns="0" bIns="0" rtlCol="0" anchor="t"/>
           <a:lstStyle/>
           <a:p>
-            <a:pPr indent="0" marL="0">
+            <a:pPr marL="0" indent="0">
               <a:buNone/>
             </a:pPr>
             <a:r>
@@ -8651,7 +8458,7 @@
           <a:bodyPr wrap="square" lIns="0" tIns="0" rIns="0" bIns="0" rtlCol="0" anchor="ctr"/>
           <a:lstStyle/>
           <a:p>
-            <a:pPr algn="ctr" indent="0" marL="0">
+            <a:pPr marL="0" indent="0" algn="ctr">
               <a:buNone/>
             </a:pPr>
             <a:r>
@@ -8671,14 +8478,14 @@
       </p:sp>
       <p:pic>
         <p:nvPicPr>
-          <p:cNvPr id="31" name="Image 9" descr="C:/Users/49816471825/AppData/Local/Temp/lockmachine/deck/cards/painel-steel-229x265.png">    </p:cNvPr>
+          <p:cNvPr id="31" name="Image 9" descr="C:/Users/49816471825/AppData/Local/Temp/lockmachine/deck/cards/painel-steel-229x265.png"/>
           <p:cNvPicPr>
             <a:picLocks noChangeAspect="1"/>
           </p:cNvPicPr>
           <p:nvPr/>
         </p:nvPicPr>
         <p:blipFill>
-          <a:blip r:embed="rId10"/>
+          <a:blip r:embed="rId12"/>
           <a:stretch>
             <a:fillRect/>
           </a:stretch>
@@ -8746,14 +8553,14 @@
       </p:sp>
       <p:pic>
         <p:nvPicPr>
-          <p:cNvPr id="34" name="Image 10" descr="C:/Users/49816471825/AppData/Local/Temp/lockmachine/deck/icones/files-A6ACC0.png">    </p:cNvPr>
+          <p:cNvPr id="34" name="Image 10" descr="C:/Users/49816471825/AppData/Local/Temp/lockmachine/deck/icones/files-A6ACC0.png"/>
           <p:cNvPicPr>
             <a:picLocks noChangeAspect="1"/>
           </p:cNvPicPr>
           <p:nvPr/>
         </p:nvPicPr>
         <p:blipFill>
-          <a:blip r:embed="rId11"/>
+          <a:blip r:embed="rId13"/>
           <a:stretch>
             <a:fillRect/>
           </a:stretch>
@@ -8789,7 +8596,7 @@
           <a:bodyPr wrap="square" lIns="0" tIns="0" rIns="0" bIns="0" rtlCol="0" anchor="t"/>
           <a:lstStyle/>
           <a:p>
-            <a:pPr indent="0" marL="0">
+            <a:pPr marL="0" indent="0">
               <a:buNone/>
             </a:pPr>
             <a:r>
@@ -8840,7 +8647,7 @@
           <a:bodyPr wrap="square" lIns="0" tIns="0" rIns="0" bIns="0" rtlCol="0" anchor="ctr"/>
           <a:lstStyle/>
           <a:p>
-            <a:pPr algn="ctr" indent="0" marL="0">
+            <a:pPr marL="0" indent="0" algn="ctr">
               <a:buNone/>
             </a:pPr>
             <a:r>
@@ -8860,7 +8667,7 @@
       </p:sp>
       <p:sp>
         <p:nvSpPr>
-          <p:cNvPr id="25" name="Slide Number Placeholder 0"/>
+          <p:cNvPr id="37" name="Slide Number Placeholder 0"/>
           <p:cNvSpPr>
             <a:spLocks noGrp="1"/>
           </p:cNvSpPr>
@@ -8878,7 +8685,7 @@
           </a:prstGeom>
           <a:extLst>
             <a:ext uri="{C572A759-6A51-4108-AA02-DFA0A04FC94B}">
-              <ma14:wrappingTextBoxFlag xmlns:ma14="http://schemas.microsoft.com/office/mac/drawingml/2011/main" val="0"/>
+              <ma14:wrappingTextBoxFlag xmlns="" xmlns:ma14="http://schemas.microsoft.com/office/mac/drawingml/2011/main" val="0"/>
             </a:ext>
           </a:extLst>
         </p:spPr>
@@ -8899,7 +8706,7 @@
           <a:p>
             <a:pPr algn="r"/>
             <a:fld id="{F7021451-1387-4CA6-816F-3879F97B5CBC}" type="slidenum">
-              <a:rPr b="0" lang="en-US"/>
+              <a:rPr lang="en-US" b="0"/>
               <a:t>4</a:t>
             </a:fld>
             <a:endParaRPr lang="en-US"/>
@@ -8934,9 +8741,11 @@
       <p:sp>
         <p:nvSpPr>
           <p:cNvPr id="2" name="Text 1"/>
-          <p:cNvSpPr/>
+          <p:cNvSpPr>
+            <a:spLocks noGrp="1"/>
+          </p:cNvSpPr>
           <p:nvPr>
-            <p:ph idx="102" type="title" hasCustomPrompt="1"/>
+            <p:ph type="title" idx="102" hasCustomPrompt="1"/>
           </p:nvPr>
         </p:nvSpPr>
         <p:spPr>
@@ -8954,11 +8763,11 @@
           <a:bodyPr wrap="square" lIns="0" tIns="0" rIns="0" bIns="0" rtlCol="0" anchor="ctr"/>
           <a:lstStyle/>
           <a:p>
-            <a:pPr algn="l" indent="0" marL="0">
-              <a:buNone/>
-            </a:pPr>
-            <a:r>
-              <a:rPr lang="en-US" sz="2000" b="1" dirty="0">
+            <a:pPr marL="0" indent="0" algn="l">
+              <a:buNone/>
+            </a:pPr>
+            <a:r>
+              <a:rPr lang="en-US" sz="2000" b="1">
                 <a:solidFill>
                   <a:srgbClr val="FFD23F"/>
                 </a:solidFill>
@@ -8966,11 +8775,8 @@
                 <a:ea typeface="Consolas" pitchFamily="34" charset="-122"/>
                 <a:cs typeface="Consolas" pitchFamily="34" charset="-120"/>
               </a:rPr>
-              <a:t>05  </a:t>
-            </a:r>
-            <a:pPr algn="l" indent="0" marL="0">
-              <a:buNone/>
-            </a:pPr>
+              <a:t>04  </a:t>
+            </a:r>
             <a:r>
               <a:rPr lang="en-US" sz="3200" b="1" dirty="0">
                 <a:solidFill>
@@ -9007,7 +8813,7 @@
           <a:bodyPr wrap="square" lIns="0" tIns="0" rIns="0" bIns="0" rtlCol="0" anchor="t"/>
           <a:lstStyle/>
           <a:p>
-            <a:pPr indent="0" marL="0">
+            <a:pPr marL="0" indent="0">
               <a:buNone/>
             </a:pPr>
             <a:r>
@@ -9027,14 +8833,14 @@
       </p:sp>
       <p:pic>
         <p:nvPicPr>
-          <p:cNvPr id="4" name="Image 0" descr="C:/Users/49816471825/AppData/Local/Temp/lockmachine/deck/cards/painel-cobalt-383x260.png">    </p:cNvPr>
+          <p:cNvPr id="4" name="Image 0" descr="C:/Users/49816471825/AppData/Local/Temp/lockmachine/deck/cards/painel-cobalt-383x260.png"/>
           <p:cNvPicPr>
             <a:picLocks noChangeAspect="1"/>
           </p:cNvPicPr>
           <p:nvPr/>
         </p:nvPicPr>
         <p:blipFill>
-          <a:blip r:embed="rId1"/>
+          <a:blip r:embed="rId3"/>
           <a:stretch>
             <a:fillRect/>
           </a:stretch>
@@ -9102,14 +8908,14 @@
       </p:sp>
       <p:pic>
         <p:nvPicPr>
-          <p:cNvPr id="7" name="Image 1" descr="C:/Users/49816471825/AppData/Local/Temp/lockmachine/deck/icones/users-8C9BFF.png">    </p:cNvPr>
+          <p:cNvPr id="7" name="Image 1" descr="C:/Users/49816471825/AppData/Local/Temp/lockmachine/deck/icones/users-8C9BFF.png"/>
           <p:cNvPicPr>
             <a:picLocks noChangeAspect="1"/>
           </p:cNvPicPr>
           <p:nvPr/>
         </p:nvPicPr>
         <p:blipFill>
-          <a:blip r:embed="rId2"/>
+          <a:blip r:embed="rId4"/>
           <a:stretch>
             <a:fillRect/>
           </a:stretch>
@@ -9145,7 +8951,7 @@
           <a:bodyPr wrap="square" lIns="0" tIns="0" rIns="0" bIns="0" rtlCol="0" anchor="t"/>
           <a:lstStyle/>
           <a:p>
-            <a:pPr indent="0" marL="0">
+            <a:pPr marL="0" indent="0">
               <a:buNone/>
             </a:pPr>
             <a:r>
@@ -9162,7 +8968,7 @@
             <a:endParaRPr lang="en-US" sz="1400" dirty="0"/>
           </a:p>
           <a:p>
-            <a:pPr indent="0" marL="0">
+            <a:pPr marL="0" indent="0">
               <a:buNone/>
             </a:pPr>
             <a:r>
@@ -9201,7 +9007,7 @@
           <a:bodyPr wrap="square" lIns="0" tIns="0" rIns="0" bIns="0" rtlCol="0" anchor="t"/>
           <a:lstStyle/>
           <a:p>
-            <a:pPr indent="0" marL="0">
+            <a:pPr marL="0" indent="0">
               <a:buNone/>
             </a:pPr>
             <a:r>
@@ -9221,14 +9027,14 @@
       </p:sp>
       <p:pic>
         <p:nvPicPr>
-          <p:cNvPr id="10" name="Image 2" descr="C:/Users/49816471825/AppData/Local/Temp/lockmachine/deck/cards/painel-green-383x260.png">    </p:cNvPr>
+          <p:cNvPr id="10" name="Image 2" descr="C:/Users/49816471825/AppData/Local/Temp/lockmachine/deck/cards/painel-green-383x260.png"/>
           <p:cNvPicPr>
             <a:picLocks noChangeAspect="1"/>
           </p:cNvPicPr>
           <p:nvPr/>
         </p:nvPicPr>
         <p:blipFill>
-          <a:blip r:embed="rId3"/>
+          <a:blip r:embed="rId5"/>
           <a:stretch>
             <a:fillRect/>
           </a:stretch>
@@ -9296,14 +9102,14 @@
       </p:sp>
       <p:pic>
         <p:nvPicPr>
-          <p:cNvPr id="13" name="Image 3" descr="C:/Users/49816471825/AppData/Local/Temp/lockmachine/deck/icones/user-22D07B.png">    </p:cNvPr>
+          <p:cNvPr id="13" name="Image 3" descr="C:/Users/49816471825/AppData/Local/Temp/lockmachine/deck/icones/user-22D07B.png"/>
           <p:cNvPicPr>
             <a:picLocks noChangeAspect="1"/>
           </p:cNvPicPr>
           <p:nvPr/>
         </p:nvPicPr>
         <p:blipFill>
-          <a:blip r:embed="rId4"/>
+          <a:blip r:embed="rId6"/>
           <a:stretch>
             <a:fillRect/>
           </a:stretch>
@@ -9339,7 +9145,7 @@
           <a:bodyPr wrap="square" lIns="0" tIns="0" rIns="0" bIns="0" rtlCol="0" anchor="t"/>
           <a:lstStyle/>
           <a:p>
-            <a:pPr indent="0" marL="0">
+            <a:pPr marL="0" indent="0">
               <a:buNone/>
             </a:pPr>
             <a:r>
@@ -9356,7 +9162,7 @@
             <a:endParaRPr lang="en-US" sz="1400" dirty="0"/>
           </a:p>
           <a:p>
-            <a:pPr indent="0" marL="0">
+            <a:pPr marL="0" indent="0">
               <a:buNone/>
             </a:pPr>
             <a:r>
@@ -9395,7 +9201,7 @@
           <a:bodyPr wrap="square" lIns="0" tIns="0" rIns="0" bIns="0" rtlCol="0" anchor="t"/>
           <a:lstStyle/>
           <a:p>
-            <a:pPr indent="0" marL="0">
+            <a:pPr marL="0" indent="0">
               <a:buNone/>
             </a:pPr>
             <a:r>
@@ -9415,14 +9221,14 @@
       </p:sp>
       <p:pic>
         <p:nvPicPr>
-          <p:cNvPr id="16" name="Image 4" descr="C:/Users/49816471825/AppData/Local/Temp/lockmachine/deck/cards/painel-yellow-383x260.png">    </p:cNvPr>
+          <p:cNvPr id="16" name="Image 4" descr="C:/Users/49816471825/AppData/Local/Temp/lockmachine/deck/cards/painel-yellow-383x260.png"/>
           <p:cNvPicPr>
             <a:picLocks noChangeAspect="1"/>
           </p:cNvPicPr>
           <p:nvPr/>
         </p:nvPicPr>
         <p:blipFill>
-          <a:blip r:embed="rId5"/>
+          <a:blip r:embed="rId7"/>
           <a:stretch>
             <a:fillRect/>
           </a:stretch>
@@ -9490,14 +9296,14 @@
       </p:sp>
       <p:pic>
         <p:nvPicPr>
-          <p:cNvPr id="19" name="Image 5" descr="C:/Users/49816471825/AppData/Local/Temp/lockmachine/deck/icones/chip-FFD23F.png">    </p:cNvPr>
+          <p:cNvPr id="19" name="Image 5" descr="C:/Users/49816471825/AppData/Local/Temp/lockmachine/deck/icones/chip-FFD23F.png"/>
           <p:cNvPicPr>
             <a:picLocks noChangeAspect="1"/>
           </p:cNvPicPr>
           <p:nvPr/>
         </p:nvPicPr>
         <p:blipFill>
-          <a:blip r:embed="rId6"/>
+          <a:blip r:embed="rId8"/>
           <a:stretch>
             <a:fillRect/>
           </a:stretch>
@@ -9533,7 +9339,7 @@
           <a:bodyPr wrap="square" lIns="0" tIns="0" rIns="0" bIns="0" rtlCol="0" anchor="t"/>
           <a:lstStyle/>
           <a:p>
-            <a:pPr indent="0" marL="0">
+            <a:pPr marL="0" indent="0">
               <a:buNone/>
             </a:pPr>
             <a:r>
@@ -9550,7 +9356,7 @@
             <a:endParaRPr lang="en-US" sz="1400" dirty="0"/>
           </a:p>
           <a:p>
-            <a:pPr indent="0" marL="0">
+            <a:pPr marL="0" indent="0">
               <a:buNone/>
             </a:pPr>
             <a:r>
@@ -9589,7 +9395,7 @@
           <a:bodyPr wrap="square" lIns="0" tIns="0" rIns="0" bIns="0" rtlCol="0" anchor="t"/>
           <a:lstStyle/>
           <a:p>
-            <a:pPr indent="0" marL="0">
+            <a:pPr marL="0" indent="0">
               <a:buNone/>
             </a:pPr>
             <a:r>
@@ -9609,14 +9415,14 @@
       </p:sp>
       <p:pic>
         <p:nvPicPr>
-          <p:cNvPr id="22" name="Image 6" descr="C:/Users/49816471825/AppData/Local/Temp/lockmachine/deck/cards/painel2-x-1213x150.png">    </p:cNvPr>
+          <p:cNvPr id="22" name="Image 6" descr="C:/Users/49816471825/AppData/Local/Temp/lockmachine/deck/cards/painel2-x-1213x150.png"/>
           <p:cNvPicPr>
             <a:picLocks noChangeAspect="1"/>
           </p:cNvPicPr>
           <p:nvPr/>
         </p:nvPicPr>
         <p:blipFill>
-          <a:blip r:embed="rId7"/>
+          <a:blip r:embed="rId9"/>
           <a:stretch>
             <a:fillRect/>
           </a:stretch>
@@ -9652,7 +9458,7 @@
           <a:bodyPr wrap="square" lIns="0" tIns="0" rIns="0" bIns="0" rtlCol="0" anchor="ctr"/>
           <a:lstStyle/>
           <a:p>
-            <a:pPr indent="0" marL="0">
+            <a:pPr marL="0" indent="0">
               <a:buNone/>
             </a:pPr>
             <a:r>
@@ -9691,7 +9497,7 @@
           <a:bodyPr wrap="square" lIns="0" tIns="0" rIns="0" bIns="0" rtlCol="0" anchor="ctr"/>
           <a:lstStyle/>
           <a:p>
-            <a:pPr indent="0" marL="0">
+            <a:pPr marL="0" indent="0">
               <a:buNone/>
             </a:pPr>
             <a:r>
@@ -9730,7 +9536,7 @@
           <a:bodyPr wrap="square" lIns="0" tIns="0" rIns="0" bIns="0" rtlCol="0" anchor="ctr"/>
           <a:lstStyle/>
           <a:p>
-            <a:pPr indent="0" marL="0">
+            <a:pPr marL="0" indent="0">
               <a:buNone/>
             </a:pPr>
             <a:r>
@@ -9756,7 +9562,7 @@
         </p:nvSpPr>
         <p:spPr>
           <a:xfrm>
-            <a:off x="5486400" y="4526280"/>
+            <a:off x="5135563" y="4526280"/>
             <a:ext cx="2286000" cy="1371600"/>
           </a:xfrm>
           <a:prstGeom prst="rect">
@@ -9769,7 +9575,7 @@
           <a:bodyPr wrap="square" lIns="0" tIns="0" rIns="0" bIns="0" rtlCol="0" anchor="ctr"/>
           <a:lstStyle/>
           <a:p>
-            <a:pPr indent="0" marL="0">
+            <a:pPr marL="0" indent="0">
               <a:buNone/>
             </a:pPr>
             <a:r>
@@ -9840,14 +9646,14 @@
       </p:sp>
       <p:pic>
         <p:nvPicPr>
-          <p:cNvPr id="29" name="Image 7" descr="C:/Users/49816471825/AppData/Local/Temp/lockmachine/deck/icones/check-22D07B.png">    </p:cNvPr>
+          <p:cNvPr id="29" name="Image 7" descr="C:/Users/49816471825/AppData/Local/Temp/lockmachine/deck/icones/check-22D07B.png"/>
           <p:cNvPicPr>
             <a:picLocks noChangeAspect="1"/>
           </p:cNvPicPr>
           <p:nvPr/>
         </p:nvPicPr>
         <p:blipFill>
-          <a:blip r:embed="rId8"/>
+          <a:blip r:embed="rId10"/>
           <a:stretch>
             <a:fillRect/>
           </a:stretch>
@@ -9883,7 +9689,7 @@
           <a:bodyPr wrap="square" lIns="0" tIns="0" rIns="0" bIns="0" rtlCol="0" anchor="ctr"/>
           <a:lstStyle/>
           <a:p>
-            <a:pPr indent="0" marL="0">
+            <a:pPr marL="0" indent="0">
               <a:buNone/>
             </a:pPr>
             <a:r>
@@ -9903,7 +9709,7 @@
       </p:sp>
       <p:sp>
         <p:nvSpPr>
-          <p:cNvPr id="25" name="Slide Number Placeholder 0"/>
+          <p:cNvPr id="31" name="Slide Number Placeholder 0"/>
           <p:cNvSpPr>
             <a:spLocks noGrp="1"/>
           </p:cNvSpPr>
@@ -9921,7 +9727,7 @@
           </a:prstGeom>
           <a:extLst>
             <a:ext uri="{C572A759-6A51-4108-AA02-DFA0A04FC94B}">
-              <ma14:wrappingTextBoxFlag xmlns:ma14="http://schemas.microsoft.com/office/mac/drawingml/2011/main" val="0"/>
+              <ma14:wrappingTextBoxFlag xmlns="" xmlns:ma14="http://schemas.microsoft.com/office/mac/drawingml/2011/main" val="0"/>
             </a:ext>
           </a:extLst>
         </p:spPr>
@@ -9942,7 +9748,7 @@
           <a:p>
             <a:pPr algn="r"/>
             <a:fld id="{F7021451-1387-4CA6-816F-3879F97B5CBC}" type="slidenum">
-              <a:rPr b="0" lang="en-US"/>
+              <a:rPr lang="en-US" b="0"/>
               <a:t>5</a:t>
             </a:fld>
             <a:endParaRPr lang="en-US"/>
@@ -9977,9 +9783,11 @@
       <p:sp>
         <p:nvSpPr>
           <p:cNvPr id="2" name="Text 1"/>
-          <p:cNvSpPr/>
+          <p:cNvSpPr>
+            <a:spLocks noGrp="1"/>
+          </p:cNvSpPr>
           <p:nvPr>
-            <p:ph idx="102" type="title" hasCustomPrompt="1"/>
+            <p:ph type="title" idx="102" hasCustomPrompt="1"/>
           </p:nvPr>
         </p:nvSpPr>
         <p:spPr>
@@ -9997,11 +9805,11 @@
           <a:bodyPr wrap="square" lIns="0" tIns="0" rIns="0" bIns="0" rtlCol="0" anchor="ctr"/>
           <a:lstStyle/>
           <a:p>
-            <a:pPr algn="l" indent="0" marL="0">
-              <a:buNone/>
-            </a:pPr>
-            <a:r>
-              <a:rPr lang="en-US" sz="2000" b="1" dirty="0">
+            <a:pPr marL="0" indent="0" algn="l">
+              <a:buNone/>
+            </a:pPr>
+            <a:r>
+              <a:rPr lang="en-US" sz="2000" b="1">
                 <a:solidFill>
                   <a:srgbClr val="FFD23F"/>
                 </a:solidFill>
@@ -10009,11 +9817,8 @@
                 <a:ea typeface="Consolas" pitchFamily="34" charset="-122"/>
                 <a:cs typeface="Consolas" pitchFamily="34" charset="-120"/>
               </a:rPr>
-              <a:t>06 · 07  </a:t>
-            </a:r>
-            <a:pPr algn="l" indent="0" marL="0">
-              <a:buNone/>
-            </a:pPr>
+              <a:t>05  </a:t>
+            </a:r>
             <a:r>
               <a:rPr lang="en-US" sz="3200" b="1" dirty="0">
                 <a:solidFill>
@@ -10050,7 +9855,7 @@
           <a:bodyPr wrap="square" lIns="0" tIns="0" rIns="0" bIns="0" rtlCol="0" anchor="t"/>
           <a:lstStyle/>
           <a:p>
-            <a:pPr indent="0" marL="0">
+            <a:pPr marL="0" indent="0">
               <a:buNone/>
             </a:pPr>
             <a:r>
@@ -10089,11 +9894,11 @@
           <a:bodyPr wrap="square" lIns="0" tIns="0" rIns="0" bIns="0" rtlCol="0" anchor="t"/>
           <a:lstStyle/>
           <a:p>
-            <a:pPr indent="0" marL="0">
-              <a:buNone/>
-            </a:pPr>
-            <a:r>
-              <a:rPr lang="en-US" sz="1000" b="1" spc="120" kern="0" dirty="0">
+            <a:pPr marL="0" indent="0">
+              <a:buNone/>
+            </a:pPr>
+            <a:r>
+              <a:rPr lang="en-US" sz="1000" b="1" kern="0" spc="120" dirty="0">
                 <a:solidFill>
                   <a:srgbClr val="7D849C"/>
                 </a:solidFill>
@@ -10109,293 +9914,7 @@
       </p:sp>
       <p:pic>
         <p:nvPicPr>
-          <p:cNvPr id="5" name="Image 0" descr="C:/Users/49816471825/AppData/Local/Temp/lockmachine/deck/cards/painel-cobalt-229x155.png">    </p:cNvPr>
-          <p:cNvPicPr>
-            <a:picLocks noChangeAspect="1"/>
-          </p:cNvPicPr>
-          <p:nvPr/>
-        </p:nvPicPr>
-        <p:blipFill>
-          <a:blip r:embed="rId1"/>
-          <a:stretch>
-            <a:fillRect/>
-          </a:stretch>
-        </p:blipFill>
-        <p:spPr>
-          <a:xfrm>
-            <a:off x="262890" y="2000250"/>
-            <a:ext cx="2665476" cy="1988820"/>
-          </a:xfrm>
-          <a:prstGeom prst="rect">
-            <a:avLst/>
-          </a:prstGeom>
-        </p:spPr>
-      </p:pic>
-      <p:sp>
-        <p:nvSpPr>
-          <p:cNvPr id="6" name="Text 3"/>
-          <p:cNvSpPr/>
-          <p:nvPr/>
-        </p:nvSpPr>
-        <p:spPr>
-          <a:xfrm>
-            <a:off x="749808" y="2468880"/>
-            <a:ext cx="512064" cy="512064"/>
-          </a:xfrm>
-          <a:prstGeom prst="ellipse">
-            <a:avLst/>
-          </a:prstGeom>
-          <a:solidFill>
-            <a:srgbClr val="2F45FF"/>
-          </a:solidFill>
-          <a:ln/>
-        </p:spPr>
-        <p:txBody>
-          <a:bodyPr wrap="square" lIns="0" tIns="0" rIns="0" bIns="0" rtlCol="0" anchor="ctr"/>
-          <a:lstStyle/>
-          <a:p>
-            <a:pPr algn="ctr" indent="0" marL="0">
-              <a:buNone/>
-            </a:pPr>
-            <a:r>
-              <a:rPr lang="en-US" sz="1300" b="1" dirty="0">
-                <a:solidFill>
-                  <a:srgbClr val="FFFFFF"/>
-                </a:solidFill>
-                <a:latin typeface="Arial" pitchFamily="34" charset="0"/>
-                <a:ea typeface="Arial" pitchFamily="34" charset="-122"/>
-                <a:cs typeface="Arial" pitchFamily="34" charset="-120"/>
-              </a:rPr>
-              <a:t>LK</a:t>
-            </a:r>
-            <a:endParaRPr lang="en-US" sz="1300" dirty="0"/>
-          </a:p>
-        </p:txBody>
-      </p:sp>
-      <p:sp>
-        <p:nvSpPr>
-          <p:cNvPr id="7" name="Text 4"/>
-          <p:cNvSpPr txBox="1"/>
-          <p:nvPr/>
-        </p:nvSpPr>
-        <p:spPr>
-          <a:xfrm>
-            <a:off x="749808" y="3063240"/>
-            <a:ext cx="1828800" cy="274320"/>
-          </a:xfrm>
-          <a:prstGeom prst="rect">
-            <a:avLst/>
-          </a:prstGeom>
-          <a:noFill/>
-          <a:ln/>
-        </p:spPr>
-        <p:txBody>
-          <a:bodyPr wrap="square" lIns="0" tIns="0" rIns="0" bIns="0" rtlCol="0" anchor="t"/>
-          <a:lstStyle/>
-          <a:p>
-            <a:pPr indent="0" marL="0">
-              <a:buNone/>
-            </a:pPr>
-            <a:r>
-              <a:rPr lang="en-US" sz="1400" b="1" dirty="0">
-                <a:solidFill>
-                  <a:srgbClr val="ECEEF4"/>
-                </a:solidFill>
-                <a:latin typeface="Arial" pitchFamily="34" charset="0"/>
-                <a:ea typeface="Arial" pitchFamily="34" charset="-122"/>
-                <a:cs typeface="Arial" pitchFamily="34" charset="-120"/>
-              </a:rPr>
-              <a:t>Leonardo Kronka</a:t>
-            </a:r>
-            <a:endParaRPr lang="en-US" sz="1400" dirty="0"/>
-          </a:p>
-        </p:txBody>
-      </p:sp>
-      <p:sp>
-        <p:nvSpPr>
-          <p:cNvPr id="8" name="Text 5"/>
-          <p:cNvSpPr txBox="1"/>
-          <p:nvPr/>
-        </p:nvSpPr>
-        <p:spPr>
-          <a:xfrm>
-            <a:off x="749808" y="3337560"/>
-            <a:ext cx="1828800" cy="274320"/>
-          </a:xfrm>
-          <a:prstGeom prst="rect">
-            <a:avLst/>
-          </a:prstGeom>
-          <a:noFill/>
-          <a:ln/>
-        </p:spPr>
-        <p:txBody>
-          <a:bodyPr wrap="square" lIns="0" tIns="0" rIns="0" bIns="0" rtlCol="0" anchor="t"/>
-          <a:lstStyle/>
-          <a:p>
-            <a:pPr indent="0" marL="0">
-              <a:buNone/>
-            </a:pPr>
-            <a:r>
-              <a:rPr lang="en-US" sz="1100" dirty="0">
-                <a:solidFill>
-                  <a:srgbClr val="7D849C"/>
-                </a:solidFill>
-                <a:latin typeface="Arial" pitchFamily="34" charset="0"/>
-                <a:ea typeface="Arial" pitchFamily="34" charset="-122"/>
-                <a:cs typeface="Arial" pitchFamily="34" charset="-120"/>
-              </a:rPr>
-              <a:t>Product Owner · Full-stack</a:t>
-            </a:r>
-            <a:endParaRPr lang="en-US" sz="1100" dirty="0"/>
-          </a:p>
-        </p:txBody>
-      </p:sp>
-      <p:pic>
-        <p:nvPicPr>
-          <p:cNvPr id="9" name="Image 1" descr="C:/Users/49816471825/AppData/Local/Temp/lockmachine/deck/cards/painel-red-229x155.png">    </p:cNvPr>
-          <p:cNvPicPr>
-            <a:picLocks noChangeAspect="1"/>
-          </p:cNvPicPr>
-          <p:nvPr/>
-        </p:nvPicPr>
-        <p:blipFill>
-          <a:blip r:embed="rId2"/>
-          <a:stretch>
-            <a:fillRect/>
-          </a:stretch>
-        </p:blipFill>
-        <p:spPr>
-          <a:xfrm>
-            <a:off x="2512314" y="2000250"/>
-            <a:ext cx="2665476" cy="1988820"/>
-          </a:xfrm>
-          <a:prstGeom prst="rect">
-            <a:avLst/>
-          </a:prstGeom>
-        </p:spPr>
-      </p:pic>
-      <p:sp>
-        <p:nvSpPr>
-          <p:cNvPr id="10" name="Text 6"/>
-          <p:cNvSpPr/>
-          <p:nvPr/>
-        </p:nvSpPr>
-        <p:spPr>
-          <a:xfrm>
-            <a:off x="2999232" y="2468880"/>
-            <a:ext cx="512064" cy="512064"/>
-          </a:xfrm>
-          <a:prstGeom prst="ellipse">
-            <a:avLst/>
-          </a:prstGeom>
-          <a:solidFill>
-            <a:srgbClr val="FF3D2E"/>
-          </a:solidFill>
-          <a:ln/>
-        </p:spPr>
-        <p:txBody>
-          <a:bodyPr wrap="square" lIns="0" tIns="0" rIns="0" bIns="0" rtlCol="0" anchor="ctr"/>
-          <a:lstStyle/>
-          <a:p>
-            <a:pPr algn="ctr" indent="0" marL="0">
-              <a:buNone/>
-            </a:pPr>
-            <a:r>
-              <a:rPr lang="en-US" sz="1300" b="1" dirty="0">
-                <a:solidFill>
-                  <a:srgbClr val="1C212D"/>
-                </a:solidFill>
-                <a:latin typeface="Arial" pitchFamily="34" charset="0"/>
-                <a:ea typeface="Arial" pitchFamily="34" charset="-122"/>
-                <a:cs typeface="Arial" pitchFamily="34" charset="-120"/>
-              </a:rPr>
-              <a:t>CH</a:t>
-            </a:r>
-            <a:endParaRPr lang="en-US" sz="1300" dirty="0"/>
-          </a:p>
-        </p:txBody>
-      </p:sp>
-      <p:sp>
-        <p:nvSpPr>
-          <p:cNvPr id="11" name="Text 7"/>
-          <p:cNvSpPr txBox="1"/>
-          <p:nvPr/>
-        </p:nvSpPr>
-        <p:spPr>
-          <a:xfrm>
-            <a:off x="2999232" y="3063240"/>
-            <a:ext cx="1828800" cy="274320"/>
-          </a:xfrm>
-          <a:prstGeom prst="rect">
-            <a:avLst/>
-          </a:prstGeom>
-          <a:noFill/>
-          <a:ln/>
-        </p:spPr>
-        <p:txBody>
-          <a:bodyPr wrap="square" lIns="0" tIns="0" rIns="0" bIns="0" rtlCol="0" anchor="t"/>
-          <a:lstStyle/>
-          <a:p>
-            <a:pPr indent="0" marL="0">
-              <a:buNone/>
-            </a:pPr>
-            <a:r>
-              <a:rPr lang="en-US" sz="1400" b="1" dirty="0">
-                <a:solidFill>
-                  <a:srgbClr val="ECEEF4"/>
-                </a:solidFill>
-                <a:latin typeface="Arial" pitchFamily="34" charset="0"/>
-                <a:ea typeface="Arial" pitchFamily="34" charset="-122"/>
-                <a:cs typeface="Arial" pitchFamily="34" charset="-120"/>
-              </a:rPr>
-              <a:t>Cauê Henrique</a:t>
-            </a:r>
-            <a:endParaRPr lang="en-US" sz="1400" dirty="0"/>
-          </a:p>
-        </p:txBody>
-      </p:sp>
-      <p:sp>
-        <p:nvSpPr>
-          <p:cNvPr id="12" name="Text 8"/>
-          <p:cNvSpPr txBox="1"/>
-          <p:nvPr/>
-        </p:nvSpPr>
-        <p:spPr>
-          <a:xfrm>
-            <a:off x="2999232" y="3337560"/>
-            <a:ext cx="1828800" cy="274320"/>
-          </a:xfrm>
-          <a:prstGeom prst="rect">
-            <a:avLst/>
-          </a:prstGeom>
-          <a:noFill/>
-          <a:ln/>
-        </p:spPr>
-        <p:txBody>
-          <a:bodyPr wrap="square" lIns="0" tIns="0" rIns="0" bIns="0" rtlCol="0" anchor="t"/>
-          <a:lstStyle/>
-          <a:p>
-            <a:pPr indent="0" marL="0">
-              <a:buNone/>
-            </a:pPr>
-            <a:r>
-              <a:rPr lang="en-US" sz="1100" dirty="0">
-                <a:solidFill>
-                  <a:srgbClr val="7D849C"/>
-                </a:solidFill>
-                <a:latin typeface="Arial" pitchFamily="34" charset="0"/>
-                <a:ea typeface="Arial" pitchFamily="34" charset="-122"/>
-                <a:cs typeface="Arial" pitchFamily="34" charset="-120"/>
-              </a:rPr>
-              <a:t>Scrum Master · Back-end</a:t>
-            </a:r>
-            <a:endParaRPr lang="en-US" sz="1100" dirty="0"/>
-          </a:p>
-        </p:txBody>
-      </p:sp>
-      <p:pic>
-        <p:nvPicPr>
-          <p:cNvPr id="13" name="Image 2" descr="C:/Users/49816471825/AppData/Local/Temp/lockmachine/deck/cards/painel-green-229x155.png">    </p:cNvPr>
+          <p:cNvPr id="5" name="Image 0" descr="C:/Users/49816471825/AppData/Local/Temp/lockmachine/deck/cards/painel-cobalt-229x155.png"/>
           <p:cNvPicPr>
             <a:picLocks noChangeAspect="1"/>
           </p:cNvPicPr>
@@ -10409,6 +9928,292 @@
         </p:blipFill>
         <p:spPr>
           <a:xfrm>
+            <a:off x="262890" y="2000250"/>
+            <a:ext cx="2665476" cy="1988820"/>
+          </a:xfrm>
+          <a:prstGeom prst="rect">
+            <a:avLst/>
+          </a:prstGeom>
+        </p:spPr>
+      </p:pic>
+      <p:sp>
+        <p:nvSpPr>
+          <p:cNvPr id="6" name="Text 3"/>
+          <p:cNvSpPr/>
+          <p:nvPr/>
+        </p:nvSpPr>
+        <p:spPr>
+          <a:xfrm>
+            <a:off x="749808" y="2468880"/>
+            <a:ext cx="512064" cy="512064"/>
+          </a:xfrm>
+          <a:prstGeom prst="ellipse">
+            <a:avLst/>
+          </a:prstGeom>
+          <a:solidFill>
+            <a:srgbClr val="2F45FF"/>
+          </a:solidFill>
+          <a:ln/>
+        </p:spPr>
+        <p:txBody>
+          <a:bodyPr wrap="square" lIns="0" tIns="0" rIns="0" bIns="0" rtlCol="0" anchor="ctr"/>
+          <a:lstStyle/>
+          <a:p>
+            <a:pPr marL="0" indent="0" algn="ctr">
+              <a:buNone/>
+            </a:pPr>
+            <a:r>
+              <a:rPr lang="en-US" sz="1300" b="1" dirty="0">
+                <a:solidFill>
+                  <a:srgbClr val="FFFFFF"/>
+                </a:solidFill>
+                <a:latin typeface="Arial" pitchFamily="34" charset="0"/>
+                <a:ea typeface="Arial" pitchFamily="34" charset="-122"/>
+                <a:cs typeface="Arial" pitchFamily="34" charset="-120"/>
+              </a:rPr>
+              <a:t>LK</a:t>
+            </a:r>
+            <a:endParaRPr lang="en-US" sz="1300" dirty="0"/>
+          </a:p>
+        </p:txBody>
+      </p:sp>
+      <p:sp>
+        <p:nvSpPr>
+          <p:cNvPr id="7" name="Text 4"/>
+          <p:cNvSpPr txBox="1"/>
+          <p:nvPr/>
+        </p:nvSpPr>
+        <p:spPr>
+          <a:xfrm>
+            <a:off x="749808" y="3063240"/>
+            <a:ext cx="1828800" cy="274320"/>
+          </a:xfrm>
+          <a:prstGeom prst="rect">
+            <a:avLst/>
+          </a:prstGeom>
+          <a:noFill/>
+          <a:ln/>
+        </p:spPr>
+        <p:txBody>
+          <a:bodyPr wrap="square" lIns="0" tIns="0" rIns="0" bIns="0" rtlCol="0" anchor="t"/>
+          <a:lstStyle/>
+          <a:p>
+            <a:pPr marL="0" indent="0">
+              <a:buNone/>
+            </a:pPr>
+            <a:r>
+              <a:rPr lang="en-US" sz="1400" b="1" dirty="0">
+                <a:solidFill>
+                  <a:srgbClr val="ECEEF4"/>
+                </a:solidFill>
+                <a:latin typeface="Arial" pitchFamily="34" charset="0"/>
+                <a:ea typeface="Arial" pitchFamily="34" charset="-122"/>
+                <a:cs typeface="Arial" pitchFamily="34" charset="-120"/>
+              </a:rPr>
+              <a:t>Leonardo Kronka</a:t>
+            </a:r>
+            <a:endParaRPr lang="en-US" sz="1400" dirty="0"/>
+          </a:p>
+        </p:txBody>
+      </p:sp>
+      <p:sp>
+        <p:nvSpPr>
+          <p:cNvPr id="8" name="Text 5"/>
+          <p:cNvSpPr txBox="1"/>
+          <p:nvPr/>
+        </p:nvSpPr>
+        <p:spPr>
+          <a:xfrm>
+            <a:off x="749808" y="3337560"/>
+            <a:ext cx="1828800" cy="274320"/>
+          </a:xfrm>
+          <a:prstGeom prst="rect">
+            <a:avLst/>
+          </a:prstGeom>
+          <a:noFill/>
+          <a:ln/>
+        </p:spPr>
+        <p:txBody>
+          <a:bodyPr wrap="square" lIns="0" tIns="0" rIns="0" bIns="0" rtlCol="0" anchor="t"/>
+          <a:lstStyle/>
+          <a:p>
+            <a:pPr marL="0" indent="0">
+              <a:buNone/>
+            </a:pPr>
+            <a:r>
+              <a:rPr lang="en-US" sz="1100" dirty="0">
+                <a:solidFill>
+                  <a:srgbClr val="7D849C"/>
+                </a:solidFill>
+                <a:latin typeface="Arial" pitchFamily="34" charset="0"/>
+                <a:ea typeface="Arial" pitchFamily="34" charset="-122"/>
+                <a:cs typeface="Arial" pitchFamily="34" charset="-120"/>
+              </a:rPr>
+              <a:t>Product Owner · Full-stack</a:t>
+            </a:r>
+            <a:endParaRPr lang="en-US" sz="1100" dirty="0"/>
+          </a:p>
+        </p:txBody>
+      </p:sp>
+      <p:pic>
+        <p:nvPicPr>
+          <p:cNvPr id="9" name="Image 1" descr="C:/Users/49816471825/AppData/Local/Temp/lockmachine/deck/cards/painel-red-229x155.png"/>
+          <p:cNvPicPr>
+            <a:picLocks noChangeAspect="1"/>
+          </p:cNvPicPr>
+          <p:nvPr/>
+        </p:nvPicPr>
+        <p:blipFill>
+          <a:blip r:embed="rId4"/>
+          <a:stretch>
+            <a:fillRect/>
+          </a:stretch>
+        </p:blipFill>
+        <p:spPr>
+          <a:xfrm>
+            <a:off x="2512314" y="2000250"/>
+            <a:ext cx="2665476" cy="1988820"/>
+          </a:xfrm>
+          <a:prstGeom prst="rect">
+            <a:avLst/>
+          </a:prstGeom>
+        </p:spPr>
+      </p:pic>
+      <p:sp>
+        <p:nvSpPr>
+          <p:cNvPr id="10" name="Text 6"/>
+          <p:cNvSpPr/>
+          <p:nvPr/>
+        </p:nvSpPr>
+        <p:spPr>
+          <a:xfrm>
+            <a:off x="2999232" y="2468880"/>
+            <a:ext cx="512064" cy="512064"/>
+          </a:xfrm>
+          <a:prstGeom prst="ellipse">
+            <a:avLst/>
+          </a:prstGeom>
+          <a:solidFill>
+            <a:srgbClr val="FF3D2E"/>
+          </a:solidFill>
+          <a:ln/>
+        </p:spPr>
+        <p:txBody>
+          <a:bodyPr wrap="square" lIns="0" tIns="0" rIns="0" bIns="0" rtlCol="0" anchor="ctr"/>
+          <a:lstStyle/>
+          <a:p>
+            <a:pPr marL="0" indent="0" algn="ctr">
+              <a:buNone/>
+            </a:pPr>
+            <a:r>
+              <a:rPr lang="en-US" sz="1300" b="1" dirty="0">
+                <a:solidFill>
+                  <a:srgbClr val="1C212D"/>
+                </a:solidFill>
+                <a:latin typeface="Arial" pitchFamily="34" charset="0"/>
+                <a:ea typeface="Arial" pitchFamily="34" charset="-122"/>
+                <a:cs typeface="Arial" pitchFamily="34" charset="-120"/>
+              </a:rPr>
+              <a:t>CH</a:t>
+            </a:r>
+            <a:endParaRPr lang="en-US" sz="1300" dirty="0"/>
+          </a:p>
+        </p:txBody>
+      </p:sp>
+      <p:sp>
+        <p:nvSpPr>
+          <p:cNvPr id="11" name="Text 7"/>
+          <p:cNvSpPr txBox="1"/>
+          <p:nvPr/>
+        </p:nvSpPr>
+        <p:spPr>
+          <a:xfrm>
+            <a:off x="2999232" y="3063240"/>
+            <a:ext cx="1828800" cy="274320"/>
+          </a:xfrm>
+          <a:prstGeom prst="rect">
+            <a:avLst/>
+          </a:prstGeom>
+          <a:noFill/>
+          <a:ln/>
+        </p:spPr>
+        <p:txBody>
+          <a:bodyPr wrap="square" lIns="0" tIns="0" rIns="0" bIns="0" rtlCol="0" anchor="t"/>
+          <a:lstStyle/>
+          <a:p>
+            <a:pPr marL="0" indent="0">
+              <a:buNone/>
+            </a:pPr>
+            <a:r>
+              <a:rPr lang="en-US" sz="1400" b="1" dirty="0">
+                <a:solidFill>
+                  <a:srgbClr val="ECEEF4"/>
+                </a:solidFill>
+                <a:latin typeface="Arial" pitchFamily="34" charset="0"/>
+                <a:ea typeface="Arial" pitchFamily="34" charset="-122"/>
+                <a:cs typeface="Arial" pitchFamily="34" charset="-120"/>
+              </a:rPr>
+              <a:t>Cauê Henrique</a:t>
+            </a:r>
+            <a:endParaRPr lang="en-US" sz="1400" dirty="0"/>
+          </a:p>
+        </p:txBody>
+      </p:sp>
+      <p:sp>
+        <p:nvSpPr>
+          <p:cNvPr id="12" name="Text 8"/>
+          <p:cNvSpPr txBox="1"/>
+          <p:nvPr/>
+        </p:nvSpPr>
+        <p:spPr>
+          <a:xfrm>
+            <a:off x="2999232" y="3337560"/>
+            <a:ext cx="1828800" cy="274320"/>
+          </a:xfrm>
+          <a:prstGeom prst="rect">
+            <a:avLst/>
+          </a:prstGeom>
+          <a:noFill/>
+          <a:ln/>
+        </p:spPr>
+        <p:txBody>
+          <a:bodyPr wrap="square" lIns="0" tIns="0" rIns="0" bIns="0" rtlCol="0" anchor="t"/>
+          <a:lstStyle/>
+          <a:p>
+            <a:pPr marL="0" indent="0">
+              <a:buNone/>
+            </a:pPr>
+            <a:r>
+              <a:rPr lang="en-US" sz="1100" dirty="0">
+                <a:solidFill>
+                  <a:srgbClr val="7D849C"/>
+                </a:solidFill>
+                <a:latin typeface="Arial" pitchFamily="34" charset="0"/>
+                <a:ea typeface="Arial" pitchFamily="34" charset="-122"/>
+                <a:cs typeface="Arial" pitchFamily="34" charset="-120"/>
+              </a:rPr>
+              <a:t>Scrum Master · Back-end</a:t>
+            </a:r>
+            <a:endParaRPr lang="en-US" sz="1100" dirty="0"/>
+          </a:p>
+        </p:txBody>
+      </p:sp>
+      <p:pic>
+        <p:nvPicPr>
+          <p:cNvPr id="13" name="Image 2" descr="C:/Users/49816471825/AppData/Local/Temp/lockmachine/deck/cards/painel-green-229x155.png"/>
+          <p:cNvPicPr>
+            <a:picLocks noChangeAspect="1"/>
+          </p:cNvPicPr>
+          <p:nvPr/>
+        </p:nvPicPr>
+        <p:blipFill>
+          <a:blip r:embed="rId5"/>
+          <a:stretch>
+            <a:fillRect/>
+          </a:stretch>
+        </p:blipFill>
+        <p:spPr>
+          <a:xfrm>
             <a:off x="4761738" y="2000250"/>
             <a:ext cx="2665476" cy="1988820"/>
           </a:xfrm>
@@ -10440,7 +10245,7 @@
           <a:bodyPr wrap="square" lIns="0" tIns="0" rIns="0" bIns="0" rtlCol="0" anchor="ctr"/>
           <a:lstStyle/>
           <a:p>
-            <a:pPr algn="ctr" indent="0" marL="0">
+            <a:pPr marL="0" indent="0" algn="ctr">
               <a:buNone/>
             </a:pPr>
             <a:r>
@@ -10479,7 +10284,7 @@
           <a:bodyPr wrap="square" lIns="0" tIns="0" rIns="0" bIns="0" rtlCol="0" anchor="t"/>
           <a:lstStyle/>
           <a:p>
-            <a:pPr indent="0" marL="0">
+            <a:pPr marL="0" indent="0">
               <a:buNone/>
             </a:pPr>
             <a:r>
@@ -10518,7 +10323,7 @@
           <a:bodyPr wrap="square" lIns="0" tIns="0" rIns="0" bIns="0" rtlCol="0" anchor="t"/>
           <a:lstStyle/>
           <a:p>
-            <a:pPr indent="0" marL="0">
+            <a:pPr marL="0" indent="0">
               <a:buNone/>
             </a:pPr>
             <a:r>
@@ -10538,14 +10343,14 @@
       </p:sp>
       <p:pic>
         <p:nvPicPr>
-          <p:cNvPr id="17" name="Image 3" descr="C:/Users/49816471825/AppData/Local/Temp/lockmachine/deck/cards/painel-x-229x155.png">    </p:cNvPr>
+          <p:cNvPr id="17" name="Image 3" descr="C:/Users/49816471825/AppData/Local/Temp/lockmachine/deck/cards/painel-x-229x155.png"/>
           <p:cNvPicPr>
             <a:picLocks noChangeAspect="1"/>
           </p:cNvPicPr>
           <p:nvPr/>
         </p:nvPicPr>
         <p:blipFill>
-          <a:blip r:embed="rId4"/>
+          <a:blip r:embed="rId6"/>
           <a:stretch>
             <a:fillRect/>
           </a:stretch>
@@ -10587,7 +10392,7 @@
           <a:bodyPr wrap="square" lIns="0" tIns="0" rIns="0" bIns="0" rtlCol="0" anchor="ctr"/>
           <a:lstStyle/>
           <a:p>
-            <a:pPr algn="ctr" indent="0" marL="0">
+            <a:pPr marL="0" indent="0" algn="ctr">
               <a:buNone/>
             </a:pPr>
             <a:r>
@@ -10626,7 +10431,7 @@
           <a:bodyPr wrap="square" lIns="0" tIns="0" rIns="0" bIns="0" rtlCol="0" anchor="t"/>
           <a:lstStyle/>
           <a:p>
-            <a:pPr indent="0" marL="0">
+            <a:pPr marL="0" indent="0">
               <a:buNone/>
             </a:pPr>
             <a:r>
@@ -10665,7 +10470,7 @@
           <a:bodyPr wrap="square" lIns="0" tIns="0" rIns="0" bIns="0" rtlCol="0" anchor="t"/>
           <a:lstStyle/>
           <a:p>
-            <a:pPr indent="0" marL="0">
+            <a:pPr marL="0" indent="0">
               <a:buNone/>
             </a:pPr>
             <a:r>
@@ -10685,14 +10490,14 @@
       </p:sp>
       <p:pic>
         <p:nvPicPr>
-          <p:cNvPr id="21" name="Image 4" descr="C:/Users/49816471825/AppData/Local/Temp/lockmachine/deck/cards/painel-yellow-229x155.png">    </p:cNvPr>
+          <p:cNvPr id="21" name="Image 4" descr="C:/Users/49816471825/AppData/Local/Temp/lockmachine/deck/cards/painel-yellow-229x155.png"/>
           <p:cNvPicPr>
             <a:picLocks noChangeAspect="1"/>
           </p:cNvPicPr>
           <p:nvPr/>
         </p:nvPicPr>
         <p:blipFill>
-          <a:blip r:embed="rId5"/>
+          <a:blip r:embed="rId7"/>
           <a:stretch>
             <a:fillRect/>
           </a:stretch>
@@ -10730,7 +10535,7 @@
           <a:bodyPr wrap="square" lIns="0" tIns="0" rIns="0" bIns="0" rtlCol="0" anchor="ctr"/>
           <a:lstStyle/>
           <a:p>
-            <a:pPr algn="ctr" indent="0" marL="0">
+            <a:pPr marL="0" indent="0" algn="ctr">
               <a:buNone/>
             </a:pPr>
             <a:r>
@@ -10769,7 +10574,7 @@
           <a:bodyPr wrap="square" lIns="0" tIns="0" rIns="0" bIns="0" rtlCol="0" anchor="t"/>
           <a:lstStyle/>
           <a:p>
-            <a:pPr indent="0" marL="0">
+            <a:pPr marL="0" indent="0">
               <a:buNone/>
             </a:pPr>
             <a:r>
@@ -10808,7 +10613,7 @@
           <a:bodyPr wrap="square" lIns="0" tIns="0" rIns="0" bIns="0" rtlCol="0" anchor="t"/>
           <a:lstStyle/>
           <a:p>
-            <a:pPr indent="0" marL="0">
+            <a:pPr marL="0" indent="0">
               <a:buNone/>
             </a:pPr>
             <a:r>
@@ -10847,11 +10652,11 @@
           <a:bodyPr wrap="square" lIns="0" tIns="0" rIns="0" bIns="0" rtlCol="0" anchor="t"/>
           <a:lstStyle/>
           <a:p>
-            <a:pPr indent="0" marL="0">
-              <a:buNone/>
-            </a:pPr>
-            <a:r>
-              <a:rPr lang="en-US" sz="1000" b="1" spc="120" kern="0" dirty="0">
+            <a:pPr marL="0" indent="0">
+              <a:buNone/>
+            </a:pPr>
+            <a:r>
+              <a:rPr lang="en-US" sz="1000" b="1" kern="0" spc="120" dirty="0">
                 <a:solidFill>
                   <a:srgbClr val="7D849C"/>
                 </a:solidFill>
@@ -10867,14 +10672,14 @@
       </p:sp>
       <p:pic>
         <p:nvPicPr>
-          <p:cNvPr id="26" name="Image 5" descr="C:/Users/49816471825/AppData/Local/Temp/lockmachine/deck/cards/painel-cobalt-229x110.png">    </p:cNvPr>
+          <p:cNvPr id="26" name="Image 5" descr="C:/Users/49816471825/AppData/Local/Temp/lockmachine/deck/cards/painel-cobalt-229x110.png"/>
           <p:cNvPicPr>
             <a:picLocks noChangeAspect="1"/>
           </p:cNvPicPr>
           <p:nvPr/>
         </p:nvPicPr>
         <p:blipFill>
-          <a:blip r:embed="rId6"/>
+          <a:blip r:embed="rId8"/>
           <a:stretch>
             <a:fillRect/>
           </a:stretch>
@@ -10942,14 +10747,14 @@
       </p:sp>
       <p:pic>
         <p:nvPicPr>
-          <p:cNvPr id="29" name="Image 6" descr="C:/Users/49816471825/AppData/Local/Temp/lockmachine/deck/icones/browser-8C9BFF.png">    </p:cNvPr>
+          <p:cNvPr id="29" name="Image 6" descr="C:/Users/49816471825/AppData/Local/Temp/lockmachine/deck/icones/browser-8C9BFF.png"/>
           <p:cNvPicPr>
             <a:picLocks noChangeAspect="1"/>
           </p:cNvPicPr>
           <p:nvPr/>
         </p:nvPicPr>
         <p:blipFill>
-          <a:blip r:embed="rId7"/>
+          <a:blip r:embed="rId9"/>
           <a:stretch>
             <a:fillRect/>
           </a:stretch>
@@ -10985,7 +10790,7 @@
           <a:bodyPr wrap="square" lIns="0" tIns="0" rIns="0" bIns="0" rtlCol="0" anchor="ctr"/>
           <a:lstStyle/>
           <a:p>
-            <a:pPr indent="0" marL="0">
+            <a:pPr marL="0" indent="0">
               <a:buNone/>
             </a:pPr>
             <a:r>
@@ -11002,7 +10807,7 @@
             <a:endParaRPr lang="en-US" sz="1400" dirty="0"/>
           </a:p>
           <a:p>
-            <a:pPr indent="0" marL="0">
+            <a:pPr marL="0" indent="0">
               <a:buNone/>
             </a:pPr>
             <a:r>
@@ -11022,14 +10827,14 @@
       </p:sp>
       <p:pic>
         <p:nvPicPr>
-          <p:cNvPr id="31" name="Image 7" descr="C:/Users/49816471825/AppData/Local/Temp/lockmachine/deck/cards/painel-red-229x110.png">    </p:cNvPr>
+          <p:cNvPr id="31" name="Image 7" descr="C:/Users/49816471825/AppData/Local/Temp/lockmachine/deck/cards/painel-red-229x110.png"/>
           <p:cNvPicPr>
             <a:picLocks noChangeAspect="1"/>
           </p:cNvPicPr>
           <p:nvPr/>
         </p:nvPicPr>
         <p:blipFill>
-          <a:blip r:embed="rId8"/>
+          <a:blip r:embed="rId10"/>
           <a:stretch>
             <a:fillRect/>
           </a:stretch>
@@ -11097,14 +10902,14 @@
       </p:sp>
       <p:pic>
         <p:nvPicPr>
-          <p:cNvPr id="34" name="Image 8" descr="C:/Users/49816471825/AppData/Local/Temp/lockmachine/deck/icones/server-FF7A6F.png">    </p:cNvPr>
+          <p:cNvPr id="34" name="Image 8" descr="C:/Users/49816471825/AppData/Local/Temp/lockmachine/deck/icones/server-FF7A6F.png"/>
           <p:cNvPicPr>
             <a:picLocks noChangeAspect="1"/>
           </p:cNvPicPr>
           <p:nvPr/>
         </p:nvPicPr>
         <p:blipFill>
-          <a:blip r:embed="rId9"/>
+          <a:blip r:embed="rId11"/>
           <a:stretch>
             <a:fillRect/>
           </a:stretch>
@@ -11140,7 +10945,7 @@
           <a:bodyPr wrap="square" lIns="0" tIns="0" rIns="0" bIns="0" rtlCol="0" anchor="ctr"/>
           <a:lstStyle/>
           <a:p>
-            <a:pPr indent="0" marL="0">
+            <a:pPr marL="0" indent="0">
               <a:buNone/>
             </a:pPr>
             <a:r>
@@ -11157,7 +10962,7 @@
             <a:endParaRPr lang="en-US" sz="1400" dirty="0"/>
           </a:p>
           <a:p>
-            <a:pPr indent="0" marL="0">
+            <a:pPr marL="0" indent="0">
               <a:buNone/>
             </a:pPr>
             <a:r>
@@ -11177,14 +10982,14 @@
       </p:sp>
       <p:pic>
         <p:nvPicPr>
-          <p:cNvPr id="36" name="Image 9" descr="C:/Users/49816471825/AppData/Local/Temp/lockmachine/deck/cards/painel-green-229x110.png">    </p:cNvPr>
+          <p:cNvPr id="36" name="Image 9" descr="C:/Users/49816471825/AppData/Local/Temp/lockmachine/deck/cards/painel-green-229x110.png"/>
           <p:cNvPicPr>
             <a:picLocks noChangeAspect="1"/>
           </p:cNvPicPr>
           <p:nvPr/>
         </p:nvPicPr>
         <p:blipFill>
-          <a:blip r:embed="rId10"/>
+          <a:blip r:embed="rId12"/>
           <a:stretch>
             <a:fillRect/>
           </a:stretch>
@@ -11252,14 +11057,14 @@
       </p:sp>
       <p:pic>
         <p:nvPicPr>
-          <p:cNvPr id="39" name="Image 10" descr="C:/Users/49816471825/AppData/Local/Temp/lockmachine/deck/icones/db-22D07B.png">    </p:cNvPr>
+          <p:cNvPr id="39" name="Image 10" descr="C:/Users/49816471825/AppData/Local/Temp/lockmachine/deck/icones/db-22D07B.png"/>
           <p:cNvPicPr>
             <a:picLocks noChangeAspect="1"/>
           </p:cNvPicPr>
           <p:nvPr/>
         </p:nvPicPr>
         <p:blipFill>
-          <a:blip r:embed="rId11"/>
+          <a:blip r:embed="rId13"/>
           <a:stretch>
             <a:fillRect/>
           </a:stretch>
@@ -11295,7 +11100,7 @@
           <a:bodyPr wrap="square" lIns="0" tIns="0" rIns="0" bIns="0" rtlCol="0" anchor="ctr"/>
           <a:lstStyle/>
           <a:p>
-            <a:pPr indent="0" marL="0">
+            <a:pPr marL="0" indent="0">
               <a:buNone/>
             </a:pPr>
             <a:r>
@@ -11312,7 +11117,7 @@
             <a:endParaRPr lang="en-US" sz="1400" dirty="0"/>
           </a:p>
           <a:p>
-            <a:pPr indent="0" marL="0">
+            <a:pPr marL="0" indent="0">
               <a:buNone/>
             </a:pPr>
             <a:r>
@@ -11332,14 +11137,14 @@
       </p:sp>
       <p:pic>
         <p:nvPicPr>
-          <p:cNvPr id="41" name="Image 11" descr="C:/Users/49816471825/AppData/Local/Temp/lockmachine/deck/cards/painel-yellow-229x110.png">    </p:cNvPr>
+          <p:cNvPr id="41" name="Image 11" descr="C:/Users/49816471825/AppData/Local/Temp/lockmachine/deck/cards/painel-yellow-229x110.png"/>
           <p:cNvPicPr>
             <a:picLocks noChangeAspect="1"/>
           </p:cNvPicPr>
           <p:nvPr/>
         </p:nvPicPr>
         <p:blipFill>
-          <a:blip r:embed="rId12"/>
+          <a:blip r:embed="rId14"/>
           <a:stretch>
             <a:fillRect/>
           </a:stretch>
@@ -11407,14 +11212,14 @@
       </p:sp>
       <p:pic>
         <p:nvPicPr>
-          <p:cNvPr id="44" name="Image 12" descr="C:/Users/49816471825/AppData/Local/Temp/lockmachine/deck/icones/chip-FFD23F.png">    </p:cNvPr>
+          <p:cNvPr id="44" name="Image 12" descr="C:/Users/49816471825/AppData/Local/Temp/lockmachine/deck/icones/chip-FFD23F.png"/>
           <p:cNvPicPr>
             <a:picLocks noChangeAspect="1"/>
           </p:cNvPicPr>
           <p:nvPr/>
         </p:nvPicPr>
         <p:blipFill>
-          <a:blip r:embed="rId13"/>
+          <a:blip r:embed="rId15"/>
           <a:stretch>
             <a:fillRect/>
           </a:stretch>
@@ -11450,7 +11255,7 @@
           <a:bodyPr wrap="square" lIns="0" tIns="0" rIns="0" bIns="0" rtlCol="0" anchor="ctr"/>
           <a:lstStyle/>
           <a:p>
-            <a:pPr indent="0" marL="0">
+            <a:pPr marL="0" indent="0">
               <a:buNone/>
             </a:pPr>
             <a:r>
@@ -11467,7 +11272,7 @@
             <a:endParaRPr lang="en-US" sz="1400" dirty="0"/>
           </a:p>
           <a:p>
-            <a:pPr indent="0" marL="0">
+            <a:pPr marL="0" indent="0">
               <a:buNone/>
             </a:pPr>
             <a:r>
@@ -11487,14 +11292,14 @@
       </p:sp>
       <p:pic>
         <p:nvPicPr>
-          <p:cNvPr id="46" name="Image 13" descr="C:/Users/49816471825/AppData/Local/Temp/lockmachine/deck/cards/painel-steel-229x110.png">    </p:cNvPr>
+          <p:cNvPr id="46" name="Image 13" descr="C:/Users/49816471825/AppData/Local/Temp/lockmachine/deck/cards/painel-steel-229x110.png"/>
           <p:cNvPicPr>
             <a:picLocks noChangeAspect="1"/>
           </p:cNvPicPr>
           <p:nvPr/>
         </p:nvPicPr>
         <p:blipFill>
-          <a:blip r:embed="rId14"/>
+          <a:blip r:embed="rId16"/>
           <a:stretch>
             <a:fillRect/>
           </a:stretch>
@@ -11562,14 +11367,14 @@
       </p:sp>
       <p:pic>
         <p:nvPicPr>
-          <p:cNvPr id="49" name="Image 14" descr="C:/Users/49816471825/AppData/Local/Temp/lockmachine/deck/icones/files-A6ACC0.png">    </p:cNvPr>
+          <p:cNvPr id="49" name="Image 14" descr="C:/Users/49816471825/AppData/Local/Temp/lockmachine/deck/icones/files-A6ACC0.png"/>
           <p:cNvPicPr>
             <a:picLocks noChangeAspect="1"/>
           </p:cNvPicPr>
           <p:nvPr/>
         </p:nvPicPr>
         <p:blipFill>
-          <a:blip r:embed="rId15"/>
+          <a:blip r:embed="rId17"/>
           <a:stretch>
             <a:fillRect/>
           </a:stretch>
@@ -11605,7 +11410,7 @@
           <a:bodyPr wrap="square" lIns="0" tIns="0" rIns="0" bIns="0" rtlCol="0" anchor="ctr"/>
           <a:lstStyle/>
           <a:p>
-            <a:pPr indent="0" marL="0">
+            <a:pPr marL="0" indent="0">
               <a:buNone/>
             </a:pPr>
             <a:r>
@@ -11622,7 +11427,7 @@
             <a:endParaRPr lang="en-US" sz="1400" dirty="0"/>
           </a:p>
           <a:p>
-            <a:pPr indent="0" marL="0">
+            <a:pPr marL="0" indent="0">
               <a:buNone/>
             </a:pPr>
             <a:r>
@@ -11642,7 +11447,7 @@
       </p:sp>
       <p:sp>
         <p:nvSpPr>
-          <p:cNvPr id="25" name="Slide Number Placeholder 0"/>
+          <p:cNvPr id="51" name="Slide Number Placeholder 0"/>
           <p:cNvSpPr>
             <a:spLocks noGrp="1"/>
           </p:cNvSpPr>
@@ -11660,7 +11465,7 @@
           </a:prstGeom>
           <a:extLst>
             <a:ext uri="{C572A759-6A51-4108-AA02-DFA0A04FC94B}">
-              <ma14:wrappingTextBoxFlag xmlns:ma14="http://schemas.microsoft.com/office/mac/drawingml/2011/main" val="0"/>
+              <ma14:wrappingTextBoxFlag xmlns="" xmlns:ma14="http://schemas.microsoft.com/office/mac/drawingml/2011/main" val="0"/>
             </a:ext>
           </a:extLst>
         </p:spPr>
@@ -11681,7 +11486,7 @@
           <a:p>
             <a:pPr algn="r"/>
             <a:fld id="{F7021451-1387-4CA6-816F-3879F97B5CBC}" type="slidenum">
-              <a:rPr b="0" lang="en-US"/>
+              <a:rPr lang="en-US" b="0"/>
               <a:t>6</a:t>
             </a:fld>
             <a:endParaRPr lang="en-US"/>
@@ -11716,9 +11521,11 @@
       <p:sp>
         <p:nvSpPr>
           <p:cNvPr id="2" name="Text 1"/>
-          <p:cNvSpPr/>
+          <p:cNvSpPr>
+            <a:spLocks noGrp="1"/>
+          </p:cNvSpPr>
           <p:nvPr>
-            <p:ph idx="102" type="title" hasCustomPrompt="1"/>
+            <p:ph type="title" idx="102" hasCustomPrompt="1"/>
           </p:nvPr>
         </p:nvSpPr>
         <p:spPr>
@@ -11736,11 +11543,11 @@
           <a:bodyPr wrap="square" lIns="0" tIns="0" rIns="0" bIns="0" rtlCol="0" anchor="ctr"/>
           <a:lstStyle/>
           <a:p>
-            <a:pPr algn="l" indent="0" marL="0">
-              <a:buNone/>
-            </a:pPr>
-            <a:r>
-              <a:rPr lang="en-US" sz="2000" b="1" dirty="0">
+            <a:pPr marL="0" indent="0" algn="l">
+              <a:buNone/>
+            </a:pPr>
+            <a:r>
+              <a:rPr lang="en-US" sz="2000" b="1">
                 <a:solidFill>
                   <a:srgbClr val="FFD23F"/>
                 </a:solidFill>
@@ -11748,11 +11555,8 @@
                 <a:ea typeface="Consolas" pitchFamily="34" charset="-122"/>
                 <a:cs typeface="Consolas" pitchFamily="34" charset="-120"/>
               </a:rPr>
-              <a:t>08 · 09  </a:t>
-            </a:r>
-            <a:pPr algn="l" indent="0" marL="0">
-              <a:buNone/>
-            </a:pPr>
+              <a:t>06  </a:t>
+            </a:r>
             <a:r>
               <a:rPr lang="en-US" sz="3200" b="1" dirty="0">
                 <a:solidFill>
@@ -11789,7 +11593,7 @@
           <a:bodyPr wrap="square" lIns="0" tIns="0" rIns="0" bIns="0" rtlCol="0" anchor="t"/>
           <a:lstStyle/>
           <a:p>
-            <a:pPr indent="0" marL="0">
+            <a:pPr marL="0" indent="0">
               <a:buNone/>
             </a:pPr>
             <a:r>
@@ -11809,14 +11613,14 @@
       </p:sp>
       <p:pic>
         <p:nvPicPr>
-          <p:cNvPr id="4" name="Image 0" descr="C:/Users/49816471825/AppData/Local/Temp/lockmachine/deck/cards/painel-cobalt-340x155.png">    </p:cNvPr>
+          <p:cNvPr id="4" name="Image 0" descr="C:/Users/49816471825/AppData/Local/Temp/lockmachine/deck/cards/painel-cobalt-340x155.png"/>
           <p:cNvPicPr>
             <a:picLocks noChangeAspect="1"/>
           </p:cNvPicPr>
           <p:nvPr/>
         </p:nvPicPr>
         <p:blipFill>
-          <a:blip r:embed="rId1"/>
+          <a:blip r:embed="rId3"/>
           <a:stretch>
             <a:fillRect/>
           </a:stretch>
@@ -11884,14 +11688,14 @@
       </p:sp>
       <p:pic>
         <p:nvPicPr>
-          <p:cNvPr id="7" name="Image 1" descr="C:/Users/49816471825/AppData/Local/Temp/lockmachine/deck/icones/browser-8C9BFF.png">    </p:cNvPr>
+          <p:cNvPr id="7" name="Image 1" descr="C:/Users/49816471825/AppData/Local/Temp/lockmachine/deck/icones/browser-8C9BFF.png"/>
           <p:cNvPicPr>
             <a:picLocks noChangeAspect="1"/>
           </p:cNvPicPr>
           <p:nvPr/>
         </p:nvPicPr>
         <p:blipFill>
-          <a:blip r:embed="rId2"/>
+          <a:blip r:embed="rId4"/>
           <a:stretch>
             <a:fillRect/>
           </a:stretch>
@@ -11927,7 +11731,7 @@
           <a:bodyPr wrap="square" lIns="0" tIns="0" rIns="0" bIns="0" rtlCol="0" anchor="ctr"/>
           <a:lstStyle/>
           <a:p>
-            <a:pPr indent="0" marL="0">
+            <a:pPr marL="0" indent="0">
               <a:buNone/>
             </a:pPr>
             <a:r>
@@ -11966,7 +11770,7 @@
           <a:bodyPr wrap="square" lIns="0" tIns="0" rIns="0" bIns="0" rtlCol="0" anchor="t"/>
           <a:lstStyle/>
           <a:p>
-            <a:pPr indent="0" marL="0">
+            <a:pPr marL="0" indent="0">
               <a:buNone/>
             </a:pPr>
             <a:r>
@@ -11986,14 +11790,14 @@
       </p:sp>
       <p:pic>
         <p:nvPicPr>
-          <p:cNvPr id="10" name="Image 2" descr="C:/Users/49816471825/AppData/Local/Temp/lockmachine/deck/cards/painel-red-340x155.png">    </p:cNvPr>
+          <p:cNvPr id="10" name="Image 2" descr="C:/Users/49816471825/AppData/Local/Temp/lockmachine/deck/cards/painel-red-340x155.png"/>
           <p:cNvPicPr>
             <a:picLocks noChangeAspect="1"/>
           </p:cNvPicPr>
           <p:nvPr/>
         </p:nvPicPr>
         <p:blipFill>
-          <a:blip r:embed="rId3"/>
+          <a:blip r:embed="rId5"/>
           <a:stretch>
             <a:fillRect/>
           </a:stretch>
@@ -12061,14 +11865,14 @@
       </p:sp>
       <p:pic>
         <p:nvPicPr>
-          <p:cNvPr id="13" name="Image 3" descr="C:/Users/49816471825/AppData/Local/Temp/lockmachine/deck/icones/server-FF7A6F.png">    </p:cNvPr>
+          <p:cNvPr id="13" name="Image 3" descr="C:/Users/49816471825/AppData/Local/Temp/lockmachine/deck/icones/server-FF7A6F.png"/>
           <p:cNvPicPr>
             <a:picLocks noChangeAspect="1"/>
           </p:cNvPicPr>
           <p:nvPr/>
         </p:nvPicPr>
         <p:blipFill>
-          <a:blip r:embed="rId4"/>
+          <a:blip r:embed="rId6"/>
           <a:stretch>
             <a:fillRect/>
           </a:stretch>
@@ -12104,7 +11908,7 @@
           <a:bodyPr wrap="square" lIns="0" tIns="0" rIns="0" bIns="0" rtlCol="0" anchor="ctr"/>
           <a:lstStyle/>
           <a:p>
-            <a:pPr indent="0" marL="0">
+            <a:pPr marL="0" indent="0">
               <a:buNone/>
             </a:pPr>
             <a:r>
@@ -12143,7 +11947,7 @@
           <a:bodyPr wrap="square" lIns="0" tIns="0" rIns="0" bIns="0" rtlCol="0" anchor="t"/>
           <a:lstStyle/>
           <a:p>
-            <a:pPr indent="0" marL="0">
+            <a:pPr marL="0" indent="0">
               <a:buNone/>
             </a:pPr>
             <a:r>
@@ -12163,14 +11967,14 @@
       </p:sp>
       <p:pic>
         <p:nvPicPr>
-          <p:cNvPr id="16" name="Image 4" descr="C:/Users/49816471825/AppData/Local/Temp/lockmachine/deck/cards/painel-green-340x155.png">    </p:cNvPr>
+          <p:cNvPr id="16" name="Image 4" descr="C:/Users/49816471825/AppData/Local/Temp/lockmachine/deck/cards/painel-green-340x155.png"/>
           <p:cNvPicPr>
             <a:picLocks noChangeAspect="1"/>
           </p:cNvPicPr>
           <p:nvPr/>
         </p:nvPicPr>
         <p:blipFill>
-          <a:blip r:embed="rId5"/>
+          <a:blip r:embed="rId7"/>
           <a:stretch>
             <a:fillRect/>
           </a:stretch>
@@ -12238,14 +12042,14 @@
       </p:sp>
       <p:pic>
         <p:nvPicPr>
-          <p:cNvPr id="19" name="Image 5" descr="C:/Users/49816471825/AppData/Local/Temp/lockmachine/deck/icones/db-22D07B.png">    </p:cNvPr>
+          <p:cNvPr id="19" name="Image 5" descr="C:/Users/49816471825/AppData/Local/Temp/lockmachine/deck/icones/db-22D07B.png"/>
           <p:cNvPicPr>
             <a:picLocks noChangeAspect="1"/>
           </p:cNvPicPr>
           <p:nvPr/>
         </p:nvPicPr>
         <p:blipFill>
-          <a:blip r:embed="rId6"/>
+          <a:blip r:embed="rId8"/>
           <a:stretch>
             <a:fillRect/>
           </a:stretch>
@@ -12281,7 +12085,7 @@
           <a:bodyPr wrap="square" lIns="0" tIns="0" rIns="0" bIns="0" rtlCol="0" anchor="ctr"/>
           <a:lstStyle/>
           <a:p>
-            <a:pPr indent="0" marL="0">
+            <a:pPr marL="0" indent="0">
               <a:buNone/>
             </a:pPr>
             <a:r>
@@ -12320,7 +12124,7 @@
           <a:bodyPr wrap="square" lIns="0" tIns="0" rIns="0" bIns="0" rtlCol="0" anchor="t"/>
           <a:lstStyle/>
           <a:p>
-            <a:pPr indent="0" marL="0">
+            <a:pPr marL="0" indent="0">
               <a:buNone/>
             </a:pPr>
             <a:r>
@@ -12340,14 +12144,14 @@
       </p:sp>
       <p:pic>
         <p:nvPicPr>
-          <p:cNvPr id="22" name="Image 6" descr="C:/Users/49816471825/AppData/Local/Temp/lockmachine/deck/cards/painel-yellow-340x155.png">    </p:cNvPr>
+          <p:cNvPr id="22" name="Image 6" descr="C:/Users/49816471825/AppData/Local/Temp/lockmachine/deck/cards/painel-yellow-340x155.png"/>
           <p:cNvPicPr>
             <a:picLocks noChangeAspect="1"/>
           </p:cNvPicPr>
           <p:nvPr/>
         </p:nvPicPr>
         <p:blipFill>
-          <a:blip r:embed="rId7"/>
+          <a:blip r:embed="rId9"/>
           <a:stretch>
             <a:fillRect/>
           </a:stretch>
@@ -12415,14 +12219,14 @@
       </p:sp>
       <p:pic>
         <p:nvPicPr>
-          <p:cNvPr id="25" name="Image 7" descr="C:/Users/49816471825/AppData/Local/Temp/lockmachine/deck/icones/chip-FFD23F.png">    </p:cNvPr>
+          <p:cNvPr id="25" name="Image 7" descr="C:/Users/49816471825/AppData/Local/Temp/lockmachine/deck/icones/chip-FFD23F.png"/>
           <p:cNvPicPr>
             <a:picLocks noChangeAspect="1"/>
           </p:cNvPicPr>
           <p:nvPr/>
         </p:nvPicPr>
         <p:blipFill>
-          <a:blip r:embed="rId8"/>
+          <a:blip r:embed="rId10"/>
           <a:stretch>
             <a:fillRect/>
           </a:stretch>
@@ -12458,7 +12262,7 @@
           <a:bodyPr wrap="square" lIns="0" tIns="0" rIns="0" bIns="0" rtlCol="0" anchor="ctr"/>
           <a:lstStyle/>
           <a:p>
-            <a:pPr indent="0" marL="0">
+            <a:pPr marL="0" indent="0">
               <a:buNone/>
             </a:pPr>
             <a:r>
@@ -12497,7 +12301,7 @@
           <a:bodyPr wrap="square" lIns="0" tIns="0" rIns="0" bIns="0" rtlCol="0" anchor="t"/>
           <a:lstStyle/>
           <a:p>
-            <a:pPr indent="0" marL="0">
+            <a:pPr marL="0" indent="0">
               <a:buNone/>
             </a:pPr>
             <a:r>
@@ -12806,7 +12610,7 @@
           <a:bodyPr wrap="square" lIns="0" tIns="0" rIns="0" bIns="0" rtlCol="0" anchor="ctr"/>
           <a:lstStyle/>
           <a:p>
-            <a:pPr indent="0" marL="0">
+            <a:pPr marL="0" indent="0">
               <a:buNone/>
             </a:pPr>
             <a:r>
@@ -12823,7 +12627,7 @@
             <a:endParaRPr lang="en-US" sz="1100" dirty="0"/>
           </a:p>
           <a:p>
-            <a:pPr indent="0" marL="0">
+            <a:pPr marL="0" indent="0">
               <a:buNone/>
             </a:pPr>
             <a:r>
@@ -12843,14 +12647,14 @@
       </p:sp>
       <p:pic>
         <p:nvPicPr>
-          <p:cNvPr id="41" name="Image 8" descr="C:/Users/49816471825/AppData/Local/Temp/lockmachine/deck/cards/papel-x-220x112.png">    </p:cNvPr>
+          <p:cNvPr id="41" name="Image 8" descr="C:/Users/49816471825/AppData/Local/Temp/lockmachine/deck/cards/papel-x-220x112.png"/>
           <p:cNvPicPr>
             <a:picLocks noChangeAspect="1"/>
           </p:cNvPicPr>
           <p:nvPr/>
         </p:nvPicPr>
         <p:blipFill>
-          <a:blip r:embed="rId9"/>
+          <a:blip r:embed="rId11"/>
           <a:stretch>
             <a:fillRect/>
           </a:stretch>
@@ -12886,7 +12690,7 @@
           <a:bodyPr wrap="square" lIns="152400" tIns="152400" rIns="152400" bIns="152400" rtlCol="0" anchor="ctr"/>
           <a:lstStyle/>
           <a:p>
-            <a:pPr indent="0" marL="0">
+            <a:pPr marL="0" indent="0">
               <a:buNone/>
             </a:pPr>
             <a:r>
@@ -12903,7 +12707,7 @@
             <a:endParaRPr lang="en-US" sz="1400" dirty="0"/>
           </a:p>
           <a:p>
-            <a:pPr indent="0" marL="0">
+            <a:pPr marL="0" indent="0">
               <a:buNone/>
             </a:pPr>
             <a:r>
@@ -12923,14 +12727,14 @@
       </p:sp>
       <p:pic>
         <p:nvPicPr>
-          <p:cNvPr id="43" name="Image 9" descr="C:/Users/49816471825/AppData/Local/Temp/lockmachine/deck/icones/waves-FFD23F.png">    </p:cNvPr>
+          <p:cNvPr id="43" name="Image 9" descr="C:/Users/49816471825/AppData/Local/Temp/lockmachine/deck/icones/waves-FFD23F.png"/>
           <p:cNvPicPr>
             <a:picLocks noChangeAspect="1"/>
           </p:cNvPicPr>
           <p:nvPr/>
         </p:nvPicPr>
         <p:blipFill>
-          <a:blip r:embed="rId10"/>
+          <a:blip r:embed="rId12"/>
           <a:stretch>
             <a:fillRect/>
           </a:stretch>
@@ -12947,14 +12751,14 @@
       </p:pic>
       <p:pic>
         <p:nvPicPr>
-          <p:cNvPr id="44" name="Image 10" descr="C:/Users/49816471825/AppData/Local/Temp/lockmachine/deck/cards/painel-red-340x155.png">    </p:cNvPr>
+          <p:cNvPr id="44" name="Image 10" descr="C:/Users/49816471825/AppData/Local/Temp/lockmachine/deck/cards/painel-red-340x155.png"/>
           <p:cNvPicPr>
             <a:picLocks noChangeAspect="1"/>
           </p:cNvPicPr>
           <p:nvPr/>
         </p:nvPicPr>
         <p:blipFill>
-          <a:blip r:embed="rId11"/>
+          <a:blip r:embed="rId5"/>
           <a:stretch>
             <a:fillRect/>
           </a:stretch>
@@ -13022,14 +12826,14 @@
       </p:sp>
       <p:pic>
         <p:nvPicPr>
-          <p:cNvPr id="47" name="Image 11" descr="C:/Users/49816471825/AppData/Local/Temp/lockmachine/deck/icones/lock-FF7A6F.png">    </p:cNvPr>
+          <p:cNvPr id="47" name="Image 11" descr="C:/Users/49816471825/AppData/Local/Temp/lockmachine/deck/icones/lock-FF7A6F.png"/>
           <p:cNvPicPr>
             <a:picLocks noChangeAspect="1"/>
           </p:cNvPicPr>
           <p:nvPr/>
         </p:nvPicPr>
         <p:blipFill>
-          <a:blip r:embed="rId12"/>
+          <a:blip r:embed="rId13"/>
           <a:stretch>
             <a:fillRect/>
           </a:stretch>
@@ -13065,7 +12869,7 @@
           <a:bodyPr wrap="square" lIns="0" tIns="0" rIns="0" bIns="0" rtlCol="0" anchor="ctr"/>
           <a:lstStyle/>
           <a:p>
-            <a:pPr indent="0" marL="0">
+            <a:pPr marL="0" indent="0">
               <a:buNone/>
             </a:pPr>
             <a:r>
@@ -13104,7 +12908,7 @@
           <a:bodyPr wrap="square" lIns="0" tIns="0" rIns="0" bIns="0" rtlCol="0" anchor="t"/>
           <a:lstStyle/>
           <a:p>
-            <a:pPr indent="0" marL="0">
+            <a:pPr marL="0" indent="0">
               <a:buNone/>
             </a:pPr>
             <a:r>
@@ -13175,14 +12979,14 @@
       </p:sp>
       <p:pic>
         <p:nvPicPr>
-          <p:cNvPr id="52" name="Image 12" descr="C:/Users/49816471825/AppData/Local/Temp/lockmachine/deck/icones/history-22D07B.png">    </p:cNvPr>
+          <p:cNvPr id="52" name="Image 12" descr="C:/Users/49816471825/AppData/Local/Temp/lockmachine/deck/icones/history-22D07B.png"/>
           <p:cNvPicPr>
             <a:picLocks noChangeAspect="1"/>
           </p:cNvPicPr>
           <p:nvPr/>
         </p:nvPicPr>
         <p:blipFill>
-          <a:blip r:embed="rId13"/>
+          <a:blip r:embed="rId14"/>
           <a:stretch>
             <a:fillRect/>
           </a:stretch>
@@ -13218,7 +13022,7 @@
           <a:bodyPr wrap="square" lIns="0" tIns="0" rIns="0" bIns="0" rtlCol="0" anchor="ctr"/>
           <a:lstStyle/>
           <a:p>
-            <a:pPr indent="0" marL="0">
+            <a:pPr marL="0" indent="0">
               <a:buNone/>
             </a:pPr>
             <a:r>
@@ -13238,7 +13042,7 @@
       </p:sp>
       <p:sp>
         <p:nvSpPr>
-          <p:cNvPr id="25" name="Slide Number Placeholder 0"/>
+          <p:cNvPr id="54" name="Slide Number Placeholder 0"/>
           <p:cNvSpPr>
             <a:spLocks noGrp="1"/>
           </p:cNvSpPr>
@@ -13256,7 +13060,7 @@
           </a:prstGeom>
           <a:extLst>
             <a:ext uri="{C572A759-6A51-4108-AA02-DFA0A04FC94B}">
-              <ma14:wrappingTextBoxFlag xmlns:ma14="http://schemas.microsoft.com/office/mac/drawingml/2011/main" val="0"/>
+              <ma14:wrappingTextBoxFlag xmlns="" xmlns:ma14="http://schemas.microsoft.com/office/mac/drawingml/2011/main" val="0"/>
             </a:ext>
           </a:extLst>
         </p:spPr>
@@ -13277,7 +13081,7 @@
           <a:p>
             <a:pPr algn="r"/>
             <a:fld id="{F7021451-1387-4CA6-816F-3879F97B5CBC}" type="slidenum">
-              <a:rPr b="0" lang="en-US"/>
+              <a:rPr lang="en-US" b="0"/>
               <a:t>7</a:t>
             </a:fld>
             <a:endParaRPr lang="en-US"/>
@@ -13312,9 +13116,11 @@
       <p:sp>
         <p:nvSpPr>
           <p:cNvPr id="2" name="Text 1"/>
-          <p:cNvSpPr/>
+          <p:cNvSpPr>
+            <a:spLocks noGrp="1"/>
+          </p:cNvSpPr>
           <p:nvPr>
-            <p:ph idx="102" type="title" hasCustomPrompt="1"/>
+            <p:ph type="title" idx="102" hasCustomPrompt="1"/>
           </p:nvPr>
         </p:nvSpPr>
         <p:spPr>
@@ -13332,11 +13138,11 @@
           <a:bodyPr wrap="square" lIns="0" tIns="0" rIns="0" bIns="0" rtlCol="0" anchor="ctr"/>
           <a:lstStyle/>
           <a:p>
-            <a:pPr algn="l" indent="0" marL="0">
-              <a:buNone/>
-            </a:pPr>
-            <a:r>
-              <a:rPr lang="en-US" sz="2000" b="1" dirty="0">
+            <a:pPr marL="0" indent="0" algn="l">
+              <a:buNone/>
+            </a:pPr>
+            <a:r>
+              <a:rPr lang="en-US" sz="2000" b="1">
                 <a:solidFill>
                   <a:srgbClr val="FFD23F"/>
                 </a:solidFill>
@@ -13344,11 +13150,8 @@
                 <a:ea typeface="Consolas" pitchFamily="34" charset="-122"/>
                 <a:cs typeface="Consolas" pitchFamily="34" charset="-120"/>
               </a:rPr>
-              <a:t>11 · 12  </a:t>
-            </a:r>
-            <a:pPr algn="l" indent="0" marL="0">
-              <a:buNone/>
-            </a:pPr>
+              <a:t>07  </a:t>
+            </a:r>
             <a:r>
               <a:rPr lang="en-US" sz="3200" b="1" dirty="0">
                 <a:solidFill>
@@ -13366,14 +13169,14 @@
       </p:sp>
       <p:pic>
         <p:nvPicPr>
-          <p:cNvPr id="3" name="Image 0" descr="C:/Users/49816471825/AppData/Local/Temp/lockmachine/deck/cards/painel2-green-360x495.png">    </p:cNvPr>
+          <p:cNvPr id="3" name="Image 0" descr="C:/Users/49816471825/AppData/Local/Temp/lockmachine/deck/cards/painel2-green-360x495.png"/>
           <p:cNvPicPr>
             <a:picLocks noChangeAspect="1"/>
           </p:cNvPicPr>
           <p:nvPr/>
         </p:nvPicPr>
         <p:blipFill>
-          <a:blip r:embed="rId1"/>
+          <a:blip r:embed="rId3"/>
           <a:stretch>
             <a:fillRect/>
           </a:stretch>
@@ -13409,7 +13212,7 @@
           <a:bodyPr wrap="square" lIns="0" tIns="0" rIns="0" bIns="0" rtlCol="0" anchor="b"/>
           <a:lstStyle/>
           <a:p>
-            <a:pPr indent="0" marL="0">
+            <a:pPr marL="0" indent="0">
               <a:buNone/>
             </a:pPr>
             <a:r>
@@ -13423,9 +13226,6 @@
               </a:rPr>
               <a:t>6</a:t>
             </a:r>
-            <a:pPr indent="0" marL="0">
-              <a:buNone/>
-            </a:pPr>
             <a:r>
               <a:rPr lang="en-US" sz="2800" b="1" dirty="0">
                 <a:solidFill>
@@ -13462,7 +13262,7 @@
           <a:bodyPr wrap="square" lIns="0" tIns="0" rIns="0" bIns="0" rtlCol="0" anchor="t"/>
           <a:lstStyle/>
           <a:p>
-            <a:pPr indent="0" marL="0">
+            <a:pPr marL="0" indent="0">
               <a:buNone/>
             </a:pPr>
             <a:r>
@@ -13501,7 +13301,7 @@
           <a:bodyPr wrap="square" lIns="0" tIns="0" rIns="0" bIns="0" rtlCol="0" anchor="t"/>
           <a:lstStyle/>
           <a:p>
-            <a:pPr indent="0" marL="0">
+            <a:pPr marL="0" indent="0">
               <a:buNone/>
             </a:pPr>
             <a:r>
@@ -13540,7 +13340,7 @@
           <a:bodyPr wrap="square" lIns="0" tIns="0" rIns="0" bIns="0" rtlCol="0" anchor="t"/>
           <a:lstStyle/>
           <a:p>
-            <a:pPr indent="0" marL="0">
+            <a:pPr marL="0" indent="0">
               <a:buNone/>
             </a:pPr>
             <a:r>
@@ -13621,7 +13421,7 @@
           <a:bodyPr wrap="square" lIns="0" tIns="0" rIns="0" bIns="0" rtlCol="0" anchor="ctr"/>
           <a:lstStyle/>
           <a:p>
-            <a:pPr indent="0" marL="0">
+            <a:pPr marL="0" indent="0">
               <a:buNone/>
             </a:pPr>
             <a:r>
@@ -13672,7 +13472,7 @@
           <a:bodyPr wrap="square" lIns="0" tIns="0" rIns="0" bIns="0" rtlCol="0" anchor="ctr"/>
           <a:lstStyle/>
           <a:p>
-            <a:pPr algn="ctr" indent="0" marL="0">
+            <a:pPr marL="0" indent="0" algn="ctr">
               <a:buNone/>
             </a:pPr>
             <a:r>
@@ -13723,7 +13523,7 @@
           <a:bodyPr wrap="square" lIns="0" tIns="0" rIns="0" bIns="0" rtlCol="0" anchor="ctr"/>
           <a:lstStyle/>
           <a:p>
-            <a:pPr algn="ctr" indent="0" marL="0">
+            <a:pPr marL="0" indent="0" algn="ctr">
               <a:buNone/>
             </a:pPr>
             <a:r>
@@ -13774,7 +13574,7 @@
           <a:bodyPr wrap="square" lIns="0" tIns="0" rIns="0" bIns="0" rtlCol="0" anchor="ctr"/>
           <a:lstStyle/>
           <a:p>
-            <a:pPr algn="ctr" indent="0" marL="0">
+            <a:pPr marL="0" indent="0" algn="ctr">
               <a:buNone/>
             </a:pPr>
             <a:r>
@@ -13825,7 +13625,7 @@
           <a:bodyPr wrap="square" lIns="0" tIns="0" rIns="0" bIns="0" rtlCol="0" anchor="ctr"/>
           <a:lstStyle/>
           <a:p>
-            <a:pPr algn="ctr" indent="0" marL="0">
+            <a:pPr marL="0" indent="0" algn="ctr">
               <a:buNone/>
             </a:pPr>
             <a:r>
@@ -13876,7 +13676,7 @@
           <a:bodyPr wrap="square" lIns="0" tIns="0" rIns="0" bIns="0" rtlCol="0" anchor="ctr"/>
           <a:lstStyle/>
           <a:p>
-            <a:pPr algn="ctr" indent="0" marL="0">
+            <a:pPr marL="0" indent="0" algn="ctr">
               <a:buNone/>
             </a:pPr>
             <a:r>
@@ -13927,7 +13727,7 @@
           <a:bodyPr wrap="square" lIns="0" tIns="0" rIns="0" bIns="0" rtlCol="0" anchor="ctr"/>
           <a:lstStyle/>
           <a:p>
-            <a:pPr algn="ctr" indent="0" marL="0">
+            <a:pPr marL="0" indent="0" algn="ctr">
               <a:buNone/>
             </a:pPr>
             <a:r>
@@ -14008,7 +13808,7 @@
           <a:bodyPr wrap="square" lIns="0" tIns="0" rIns="0" bIns="0" rtlCol="0" anchor="ctr"/>
           <a:lstStyle/>
           <a:p>
-            <a:pPr indent="0" marL="0">
+            <a:pPr marL="0" indent="0">
               <a:buNone/>
             </a:pPr>
             <a:r>
@@ -14059,7 +13859,7 @@
           <a:bodyPr wrap="square" lIns="0" tIns="0" rIns="0" bIns="0" rtlCol="0" anchor="ctr"/>
           <a:lstStyle/>
           <a:p>
-            <a:pPr algn="ctr" indent="0" marL="0">
+            <a:pPr marL="0" indent="0" algn="ctr">
               <a:buNone/>
             </a:pPr>
             <a:r>
@@ -14110,7 +13910,7 @@
           <a:bodyPr wrap="square" lIns="0" tIns="0" rIns="0" bIns="0" rtlCol="0" anchor="ctr"/>
           <a:lstStyle/>
           <a:p>
-            <a:pPr algn="ctr" indent="0" marL="0">
+            <a:pPr marL="0" indent="0" algn="ctr">
               <a:buNone/>
             </a:pPr>
             <a:r>
@@ -14191,7 +13991,7 @@
           <a:bodyPr wrap="square" lIns="0" tIns="0" rIns="0" bIns="0" rtlCol="0" anchor="ctr"/>
           <a:lstStyle/>
           <a:p>
-            <a:pPr indent="0" marL="0">
+            <a:pPr marL="0" indent="0">
               <a:buNone/>
             </a:pPr>
             <a:r>
@@ -14242,7 +14042,7 @@
           <a:bodyPr wrap="square" lIns="0" tIns="0" rIns="0" bIns="0" rtlCol="0" anchor="ctr"/>
           <a:lstStyle/>
           <a:p>
-            <a:pPr algn="ctr" indent="0" marL="0">
+            <a:pPr marL="0" indent="0" algn="ctr">
               <a:buNone/>
             </a:pPr>
             <a:r>
@@ -14281,11 +14081,11 @@
           <a:bodyPr wrap="square" lIns="0" tIns="0" rIns="0" bIns="0" rtlCol="0" anchor="t"/>
           <a:lstStyle/>
           <a:p>
-            <a:pPr indent="0" marL="0">
-              <a:buNone/>
-            </a:pPr>
-            <a:r>
-              <a:rPr lang="en-US" sz="1400" dirty="0">
+            <a:pPr marL="0" indent="0">
+              <a:buNone/>
+            </a:pPr>
+            <a:r>
+              <a:rPr lang="pt-BR" sz="1400">
                 <a:solidFill>
                   <a:srgbClr val="A6ACC0"/>
                 </a:solidFill>
@@ -14293,7 +14093,29 @@
                 <a:ea typeface="Arial" pitchFamily="34" charset="-122"/>
                 <a:cs typeface="Arial" pitchFamily="34" charset="-120"/>
               </a:rPr>
-              <a:t>Os módulos prontos foram testados durante o desenvolvimento. A execução formal dos testes, com evidências, vem a seguir.</a:t>
+              <a:t>Os módulos prontos foram testados no desenvolvimento e já estão no ar em </a:t>
+            </a:r>
+            <a:r>
+              <a:rPr lang="pt-BR" sz="1400" b="1">
+                <a:solidFill>
+                  <a:srgbClr val="ECEEF4"/>
+                </a:solidFill>
+                <a:latin typeface="Arial" pitchFamily="34" charset="0"/>
+                <a:ea typeface="Arial" pitchFamily="34" charset="-122"/>
+                <a:cs typeface="Arial" pitchFamily="34" charset="-120"/>
+              </a:rPr>
+              <a:t>somoslinkwave.com.br</a:t>
+            </a:r>
+            <a:r>
+              <a:rPr lang="pt-BR" sz="1400">
+                <a:solidFill>
+                  <a:srgbClr val="A6ACC0"/>
+                </a:solidFill>
+                <a:latin typeface="Arial" pitchFamily="34" charset="0"/>
+                <a:ea typeface="Arial" pitchFamily="34" charset="-122"/>
+                <a:cs typeface="Arial" pitchFamily="34" charset="-120"/>
+              </a:rPr>
+              <a:t>. Os testes formais, com evidências, vêm a seguir.</a:t>
             </a:r>
             <a:endParaRPr lang="en-US" sz="1400" dirty="0"/>
           </a:p>
@@ -14301,7 +14123,7 @@
       </p:sp>
       <p:sp>
         <p:nvSpPr>
-          <p:cNvPr id="25" name="Slide Number Placeholder 0"/>
+          <p:cNvPr id="27" name="Slide Number Placeholder 0"/>
           <p:cNvSpPr>
             <a:spLocks noGrp="1"/>
           </p:cNvSpPr>
@@ -14319,7 +14141,7 @@
           </a:prstGeom>
           <a:extLst>
             <a:ext uri="{C572A759-6A51-4108-AA02-DFA0A04FC94B}">
-              <ma14:wrappingTextBoxFlag xmlns:ma14="http://schemas.microsoft.com/office/mac/drawingml/2011/main" val="0"/>
+              <ma14:wrappingTextBoxFlag xmlns="" xmlns:ma14="http://schemas.microsoft.com/office/mac/drawingml/2011/main" val="0"/>
             </a:ext>
           </a:extLst>
         </p:spPr>
@@ -14340,7 +14162,7 @@
           <a:p>
             <a:pPr algn="r"/>
             <a:fld id="{F7021451-1387-4CA6-816F-3879F97B5CBC}" type="slidenum">
-              <a:rPr b="0" lang="en-US"/>
+              <a:rPr lang="en-US" b="0"/>
               <a:t>8</a:t>
             </a:fld>
             <a:endParaRPr lang="en-US"/>
@@ -14375,9 +14197,11 @@
       <p:sp>
         <p:nvSpPr>
           <p:cNvPr id="2" name="Text 1"/>
-          <p:cNvSpPr/>
+          <p:cNvSpPr>
+            <a:spLocks noGrp="1"/>
+          </p:cNvSpPr>
           <p:nvPr>
-            <p:ph idx="102" type="title" hasCustomPrompt="1"/>
+            <p:ph type="title" idx="102" hasCustomPrompt="1"/>
           </p:nvPr>
         </p:nvSpPr>
         <p:spPr>
@@ -14395,11 +14219,11 @@
           <a:bodyPr wrap="square" lIns="0" tIns="0" rIns="0" bIns="0" rtlCol="0" anchor="ctr"/>
           <a:lstStyle/>
           <a:p>
-            <a:pPr algn="l" indent="0" marL="0">
-              <a:buNone/>
-            </a:pPr>
-            <a:r>
-              <a:rPr lang="en-US" sz="2000" b="1" dirty="0">
+            <a:pPr marL="0" indent="0" algn="l">
+              <a:buNone/>
+            </a:pPr>
+            <a:r>
+              <a:rPr lang="en-US" sz="2000" b="1">
                 <a:solidFill>
                   <a:srgbClr val="FFD23F"/>
                 </a:solidFill>
@@ -14407,11 +14231,8 @@
                 <a:ea typeface="Consolas" pitchFamily="34" charset="-122"/>
                 <a:cs typeface="Consolas" pitchFamily="34" charset="-120"/>
               </a:rPr>
-              <a:t>13  </a:t>
-            </a:r>
-            <a:pPr algn="l" indent="0" marL="0">
-              <a:buNone/>
-            </a:pPr>
+              <a:t>08  </a:t>
+            </a:r>
             <a:r>
               <a:rPr lang="en-US" sz="3200" b="1" dirty="0">
                 <a:solidFill>
@@ -14465,6 +14286,129 @@
             <a:avLst/>
           </a:prstGeom>
           <a:solidFill>
+            <a:srgbClr val="22D07B"/>
+          </a:solidFill>
+          <a:ln/>
+        </p:spPr>
+        <p:txBody>
+          <a:bodyPr wrap="square" lIns="0" tIns="0" rIns="0" bIns="0" rtlCol="0" anchor="ctr"/>
+          <a:lstStyle/>
+          <a:p>
+            <a:pPr marL="0" indent="0" algn="ctr">
+              <a:buNone/>
+            </a:pPr>
+            <a:r>
+              <a:rPr lang="en-US" sz="1300" b="1" dirty="0">
+                <a:solidFill>
+                  <a:srgbClr val="000000"/>
+                </a:solidFill>
+                <a:latin typeface="Arial" pitchFamily="34" charset="0"/>
+                <a:ea typeface="Arial" pitchFamily="34" charset="-122"/>
+                <a:cs typeface="Arial" pitchFamily="34" charset="-120"/>
+              </a:rPr>
+              <a:t>1</a:t>
+            </a:r>
+            <a:endParaRPr lang="en-US" sz="1300" dirty="0">
+              <a:solidFill>
+                <a:srgbClr val="000000"/>
+              </a:solidFill>
+            </a:endParaRPr>
+          </a:p>
+        </p:txBody>
+      </p:sp>
+      <p:sp>
+        <p:nvSpPr>
+          <p:cNvPr id="5" name="Text 3"/>
+          <p:cNvSpPr txBox="1"/>
+          <p:nvPr/>
+        </p:nvSpPr>
+        <p:spPr>
+          <a:xfrm>
+            <a:off x="548640" y="2240280"/>
+            <a:ext cx="1737360" cy="548640"/>
+          </a:xfrm>
+          <a:prstGeom prst="rect">
+            <a:avLst/>
+          </a:prstGeom>
+          <a:noFill/>
+          <a:ln/>
+        </p:spPr>
+        <p:txBody>
+          <a:bodyPr wrap="square" lIns="0" tIns="0" rIns="0" bIns="0" rtlCol="0" anchor="t"/>
+          <a:lstStyle/>
+          <a:p>
+            <a:pPr marL="0" indent="0" algn="ctr">
+              <a:buNone/>
+            </a:pPr>
+            <a:r>
+              <a:rPr lang="en-US" sz="1500" b="1" dirty="0">
+                <a:solidFill>
+                  <a:srgbClr val="ECEEF4"/>
+                </a:solidFill>
+                <a:latin typeface="Arial" pitchFamily="34" charset="0"/>
+                <a:ea typeface="Arial" pitchFamily="34" charset="-122"/>
+                <a:cs typeface="Arial" pitchFamily="34" charset="-120"/>
+              </a:rPr>
+              <a:t>Publicar no servidor</a:t>
+            </a:r>
+            <a:endParaRPr lang="en-US" sz="1500" dirty="0"/>
+          </a:p>
+        </p:txBody>
+      </p:sp>
+      <p:sp>
+        <p:nvSpPr>
+          <p:cNvPr id="6" name="Text 4"/>
+          <p:cNvSpPr txBox="1"/>
+          <p:nvPr/>
+        </p:nvSpPr>
+        <p:spPr>
+          <a:xfrm>
+            <a:off x="548640" y="2788920"/>
+            <a:ext cx="1737360" cy="457200"/>
+          </a:xfrm>
+          <a:prstGeom prst="rect">
+            <a:avLst/>
+          </a:prstGeom>
+          <a:noFill/>
+          <a:ln/>
+        </p:spPr>
+        <p:txBody>
+          <a:bodyPr wrap="square" lIns="0" tIns="0" rIns="0" bIns="0" rtlCol="0" anchor="t"/>
+          <a:lstStyle/>
+          <a:p>
+            <a:pPr marL="0" indent="0" algn="ctr">
+              <a:buNone/>
+            </a:pPr>
+            <a:r>
+              <a:rPr lang="en-US" sz="1200" dirty="0">
+                <a:solidFill>
+                  <a:srgbClr val="A6ACC0"/>
+                </a:solidFill>
+                <a:latin typeface="Arial" pitchFamily="34" charset="0"/>
+                <a:ea typeface="Arial" pitchFamily="34" charset="-122"/>
+                <a:cs typeface="Arial" pitchFamily="34" charset="-120"/>
+              </a:rPr>
+              <a:t>Site e app no ar</a:t>
+            </a:r>
+            <a:endParaRPr lang="en-US" sz="1200" dirty="0"/>
+          </a:p>
+        </p:txBody>
+      </p:sp>
+      <p:sp>
+        <p:nvSpPr>
+          <p:cNvPr id="7" name="Text 5"/>
+          <p:cNvSpPr/>
+          <p:nvPr/>
+        </p:nvSpPr>
+        <p:spPr>
+          <a:xfrm>
+            <a:off x="3059582" y="1645920"/>
+            <a:ext cx="457200" cy="457200"/>
+          </a:xfrm>
+          <a:prstGeom prst="ellipse">
+            <a:avLst/>
+          </a:prstGeom>
+          <a:solidFill>
             <a:srgbClr val="FFD23F"/>
           </a:solidFill>
           <a:ln/>
@@ -14473,33 +14417,37 @@
           <a:bodyPr wrap="square" lIns="0" tIns="0" rIns="0" bIns="0" rtlCol="0" anchor="ctr"/>
           <a:lstStyle/>
           <a:p>
-            <a:pPr algn="ctr" indent="0" marL="0">
+            <a:pPr marL="0" indent="0" algn="ctr">
               <a:buNone/>
             </a:pPr>
             <a:r>
               <a:rPr lang="en-US" sz="1300" b="1" dirty="0">
                 <a:solidFill>
-                  <a:srgbClr val="1C212D"/>
-                </a:solidFill>
-                <a:latin typeface="Arial" pitchFamily="34" charset="0"/>
-                <a:ea typeface="Arial" pitchFamily="34" charset="-122"/>
-                <a:cs typeface="Arial" pitchFamily="34" charset="-120"/>
-              </a:rPr>
-              <a:t>1</a:t>
-            </a:r>
-            <a:endParaRPr lang="en-US" sz="1300" dirty="0"/>
-          </a:p>
-        </p:txBody>
-      </p:sp>
-      <p:sp>
-        <p:nvSpPr>
-          <p:cNvPr id="5" name="Text 3"/>
+                  <a:srgbClr val="000000"/>
+                </a:solidFill>
+                <a:latin typeface="Arial" pitchFamily="34" charset="0"/>
+                <a:ea typeface="Arial" pitchFamily="34" charset="-122"/>
+                <a:cs typeface="Arial" pitchFamily="34" charset="-120"/>
+              </a:rPr>
+              <a:t>2</a:t>
+            </a:r>
+            <a:endParaRPr lang="en-US" sz="1300" dirty="0">
+              <a:solidFill>
+                <a:srgbClr val="000000"/>
+              </a:solidFill>
+            </a:endParaRPr>
+          </a:p>
+        </p:txBody>
+      </p:sp>
+      <p:sp>
+        <p:nvSpPr>
+          <p:cNvPr id="8" name="Text 6"/>
           <p:cNvSpPr txBox="1"/>
           <p:nvPr/>
         </p:nvSpPr>
         <p:spPr>
           <a:xfrm>
-            <a:off x="548640" y="2240280"/>
+            <a:off x="2419502" y="2240280"/>
             <a:ext cx="1737360" cy="548640"/>
           </a:xfrm>
           <a:prstGeom prst="rect">
@@ -14512,7 +14460,7 @@
           <a:bodyPr wrap="square" lIns="0" tIns="0" rIns="0" bIns="0" rtlCol="0" anchor="t"/>
           <a:lstStyle/>
           <a:p>
-            <a:pPr algn="ctr" indent="0" marL="0">
+            <a:pPr marL="0" indent="0" algn="ctr">
               <a:buNone/>
             </a:pPr>
             <a:r>
@@ -14524,7 +14472,7 @@
                 <a:ea typeface="Arial" pitchFamily="34" charset="-122"/>
                 <a:cs typeface="Arial" pitchFamily="34" charset="-120"/>
               </a:rPr>
-              <a:t>Publicar no servidor</a:t>
+              <a:t>Gerar o APK</a:t>
             </a:r>
             <a:endParaRPr lang="en-US" sz="1500" dirty="0"/>
           </a:p>
@@ -14532,13 +14480,13 @@
       </p:sp>
       <p:sp>
         <p:nvSpPr>
-          <p:cNvPr id="6" name="Text 4"/>
+          <p:cNvPr id="9" name="Text 7"/>
           <p:cNvSpPr txBox="1"/>
           <p:nvPr/>
         </p:nvSpPr>
         <p:spPr>
           <a:xfrm>
-            <a:off x="548640" y="2788920"/>
+            <a:off x="2419502" y="2788920"/>
             <a:ext cx="1737360" cy="457200"/>
           </a:xfrm>
           <a:prstGeom prst="rect">
@@ -14551,7 +14499,7 @@
           <a:bodyPr wrap="square" lIns="0" tIns="0" rIns="0" bIns="0" rtlCol="0" anchor="t"/>
           <a:lstStyle/>
           <a:p>
-            <a:pPr algn="ctr" indent="0" marL="0">
+            <a:pPr marL="0" indent="0" algn="ctr">
               <a:buNone/>
             </a:pPr>
             <a:r>
@@ -14563,7 +14511,7 @@
                 <a:ea typeface="Arial" pitchFamily="34" charset="-122"/>
                 <a:cs typeface="Arial" pitchFamily="34" charset="-120"/>
               </a:rPr>
-              <a:t>Site e app no ar</a:t>
+              <a:t>App no Android</a:t>
             </a:r>
             <a:endParaRPr lang="en-US" sz="1200" dirty="0"/>
           </a:p>
@@ -14571,13 +14519,13 @@
       </p:sp>
       <p:sp>
         <p:nvSpPr>
-          <p:cNvPr id="7" name="Text 5"/>
+          <p:cNvPr id="10" name="Text 8"/>
           <p:cNvSpPr/>
           <p:nvPr/>
         </p:nvSpPr>
         <p:spPr>
           <a:xfrm>
-            <a:off x="3059582" y="1645920"/>
+            <a:off x="4930445" y="1645920"/>
             <a:ext cx="457200" cy="457200"/>
           </a:xfrm>
           <a:prstGeom prst="ellipse">
@@ -14592,7 +14540,7 @@
           <a:bodyPr wrap="square" lIns="0" tIns="0" rIns="0" bIns="0" rtlCol="0" anchor="ctr"/>
           <a:lstStyle/>
           <a:p>
-            <a:pPr algn="ctr" indent="0" marL="0">
+            <a:pPr marL="0" indent="0" algn="ctr">
               <a:buNone/>
             </a:pPr>
             <a:r>
@@ -14604,7 +14552,7 @@
                 <a:ea typeface="Arial" pitchFamily="34" charset="-122"/>
                 <a:cs typeface="Arial" pitchFamily="34" charset="-120"/>
               </a:rPr>
-              <a:t>2</a:t>
+              <a:t>3</a:t>
             </a:r>
             <a:endParaRPr lang="en-US" sz="1300" dirty="0"/>
           </a:p>
@@ -14612,13 +14560,13 @@
       </p:sp>
       <p:sp>
         <p:nvSpPr>
-          <p:cNvPr id="8" name="Text 6"/>
+          <p:cNvPr id="11" name="Text 9"/>
           <p:cNvSpPr txBox="1"/>
           <p:nvPr/>
         </p:nvSpPr>
         <p:spPr>
           <a:xfrm>
-            <a:off x="2419502" y="2240280"/>
+            <a:off x="4290365" y="2240280"/>
             <a:ext cx="1737360" cy="548640"/>
           </a:xfrm>
           <a:prstGeom prst="rect">
@@ -14631,7 +14579,7 @@
           <a:bodyPr wrap="square" lIns="0" tIns="0" rIns="0" bIns="0" rtlCol="0" anchor="t"/>
           <a:lstStyle/>
           <a:p>
-            <a:pPr algn="ctr" indent="0" marL="0">
+            <a:pPr marL="0" indent="0" algn="ctr">
               <a:buNone/>
             </a:pPr>
             <a:r>
@@ -14643,7 +14591,7 @@
                 <a:ea typeface="Arial" pitchFamily="34" charset="-122"/>
                 <a:cs typeface="Arial" pitchFamily="34" charset="-120"/>
               </a:rPr>
-              <a:t>Gerar o APK</a:t>
+              <a:t>Montar a bancada</a:t>
             </a:r>
             <a:endParaRPr lang="en-US" sz="1500" dirty="0"/>
           </a:p>
@@ -14651,13 +14599,13 @@
       </p:sp>
       <p:sp>
         <p:nvSpPr>
-          <p:cNvPr id="9" name="Text 7"/>
+          <p:cNvPr id="12" name="Text 10"/>
           <p:cNvSpPr txBox="1"/>
           <p:nvPr/>
         </p:nvSpPr>
         <p:spPr>
           <a:xfrm>
-            <a:off x="2419502" y="2788920"/>
+            <a:off x="4290365" y="2788920"/>
             <a:ext cx="1737360" cy="457200"/>
           </a:xfrm>
           <a:prstGeom prst="rect">
@@ -14670,7 +14618,7 @@
           <a:bodyPr wrap="square" lIns="0" tIns="0" rIns="0" bIns="0" rtlCol="0" anchor="t"/>
           <a:lstStyle/>
           <a:p>
-            <a:pPr algn="ctr" indent="0" marL="0">
+            <a:pPr marL="0" indent="0" algn="ctr">
               <a:buNone/>
             </a:pPr>
             <a:r>
@@ -14682,7 +14630,7 @@
                 <a:ea typeface="Arial" pitchFamily="34" charset="-122"/>
                 <a:cs typeface="Arial" pitchFamily="34" charset="-120"/>
               </a:rPr>
-              <a:t>App no Android</a:t>
+              <a:t>Leitora com cartões</a:t>
             </a:r>
             <a:endParaRPr lang="en-US" sz="1200" dirty="0"/>
           </a:p>
@@ -14690,13 +14638,13 @@
       </p:sp>
       <p:sp>
         <p:nvSpPr>
-          <p:cNvPr id="10" name="Text 8"/>
+          <p:cNvPr id="13" name="Text 11"/>
           <p:cNvSpPr/>
           <p:nvPr/>
         </p:nvSpPr>
         <p:spPr>
           <a:xfrm>
-            <a:off x="4930445" y="1645920"/>
+            <a:off x="6801307" y="1645920"/>
             <a:ext cx="457200" cy="457200"/>
           </a:xfrm>
           <a:prstGeom prst="ellipse">
@@ -14711,7 +14659,7 @@
           <a:bodyPr wrap="square" lIns="0" tIns="0" rIns="0" bIns="0" rtlCol="0" anchor="ctr"/>
           <a:lstStyle/>
           <a:p>
-            <a:pPr algn="ctr" indent="0" marL="0">
+            <a:pPr marL="0" indent="0" algn="ctr">
               <a:buNone/>
             </a:pPr>
             <a:r>
@@ -14723,7 +14671,7 @@
                 <a:ea typeface="Arial" pitchFamily="34" charset="-122"/>
                 <a:cs typeface="Arial" pitchFamily="34" charset="-120"/>
               </a:rPr>
-              <a:t>3</a:t>
+              <a:t>4</a:t>
             </a:r>
             <a:endParaRPr lang="en-US" sz="1300" dirty="0"/>
           </a:p>
@@ -14731,13 +14679,13 @@
       </p:sp>
       <p:sp>
         <p:nvSpPr>
-          <p:cNvPr id="11" name="Text 9"/>
+          <p:cNvPr id="14" name="Text 12"/>
           <p:cNvSpPr txBox="1"/>
           <p:nvPr/>
         </p:nvSpPr>
         <p:spPr>
           <a:xfrm>
-            <a:off x="4290365" y="2240280"/>
+            <a:off x="6161227" y="2240280"/>
             <a:ext cx="1737360" cy="548640"/>
           </a:xfrm>
           <a:prstGeom prst="rect">
@@ -14750,7 +14698,7 @@
           <a:bodyPr wrap="square" lIns="0" tIns="0" rIns="0" bIns="0" rtlCol="0" anchor="t"/>
           <a:lstStyle/>
           <a:p>
-            <a:pPr algn="ctr" indent="0" marL="0">
+            <a:pPr marL="0" indent="0" algn="ctr">
               <a:buNone/>
             </a:pPr>
             <a:r>
@@ -14762,7 +14710,7 @@
                 <a:ea typeface="Arial" pitchFamily="34" charset="-122"/>
                 <a:cs typeface="Arial" pitchFamily="34" charset="-120"/>
               </a:rPr>
-              <a:t>Montar a bancada</a:t>
+              <a:t>Executar os testes</a:t>
             </a:r>
             <a:endParaRPr lang="en-US" sz="1500" dirty="0"/>
           </a:p>
@@ -14770,13 +14718,13 @@
       </p:sp>
       <p:sp>
         <p:nvSpPr>
-          <p:cNvPr id="12" name="Text 10"/>
+          <p:cNvPr id="15" name="Text 13"/>
           <p:cNvSpPr txBox="1"/>
           <p:nvPr/>
         </p:nvSpPr>
         <p:spPr>
           <a:xfrm>
-            <a:off x="4290365" y="2788920"/>
+            <a:off x="6161227" y="2788920"/>
             <a:ext cx="1737360" cy="457200"/>
           </a:xfrm>
           <a:prstGeom prst="rect">
@@ -14789,7 +14737,7 @@
           <a:bodyPr wrap="square" lIns="0" tIns="0" rIns="0" bIns="0" rtlCol="0" anchor="t"/>
           <a:lstStyle/>
           <a:p>
-            <a:pPr algn="ctr" indent="0" marL="0">
+            <a:pPr marL="0" indent="0" algn="ctr">
               <a:buNone/>
             </a:pPr>
             <a:r>
@@ -14801,7 +14749,7 @@
                 <a:ea typeface="Arial" pitchFamily="34" charset="-122"/>
                 <a:cs typeface="Arial" pitchFamily="34" charset="-120"/>
               </a:rPr>
-              <a:t>Leitora com cartões</a:t>
+              <a:t>Casos normais e de falha</a:t>
             </a:r>
             <a:endParaRPr lang="en-US" sz="1200" dirty="0"/>
           </a:p>
@@ -14809,13 +14757,13 @@
       </p:sp>
       <p:sp>
         <p:nvSpPr>
-          <p:cNvPr id="13" name="Text 11"/>
+          <p:cNvPr id="16" name="Text 14"/>
           <p:cNvSpPr/>
           <p:nvPr/>
         </p:nvSpPr>
         <p:spPr>
           <a:xfrm>
-            <a:off x="6801307" y="1645920"/>
+            <a:off x="8672170" y="1645920"/>
             <a:ext cx="457200" cy="457200"/>
           </a:xfrm>
           <a:prstGeom prst="ellipse">
@@ -14830,7 +14778,7 @@
           <a:bodyPr wrap="square" lIns="0" tIns="0" rIns="0" bIns="0" rtlCol="0" anchor="ctr"/>
           <a:lstStyle/>
           <a:p>
-            <a:pPr algn="ctr" indent="0" marL="0">
+            <a:pPr marL="0" indent="0" algn="ctr">
               <a:buNone/>
             </a:pPr>
             <a:r>
@@ -14842,7 +14790,7 @@
                 <a:ea typeface="Arial" pitchFamily="34" charset="-122"/>
                 <a:cs typeface="Arial" pitchFamily="34" charset="-120"/>
               </a:rPr>
-              <a:t>4</a:t>
+              <a:t>5</a:t>
             </a:r>
             <a:endParaRPr lang="en-US" sz="1300" dirty="0"/>
           </a:p>
@@ -14850,13 +14798,13 @@
       </p:sp>
       <p:sp>
         <p:nvSpPr>
-          <p:cNvPr id="14" name="Text 12"/>
+          <p:cNvPr id="17" name="Text 15"/>
           <p:cNvSpPr txBox="1"/>
           <p:nvPr/>
         </p:nvSpPr>
         <p:spPr>
           <a:xfrm>
-            <a:off x="6161227" y="2240280"/>
+            <a:off x="8032090" y="2240280"/>
             <a:ext cx="1737360" cy="548640"/>
           </a:xfrm>
           <a:prstGeom prst="rect">
@@ -14869,7 +14817,7 @@
           <a:bodyPr wrap="square" lIns="0" tIns="0" rIns="0" bIns="0" rtlCol="0" anchor="t"/>
           <a:lstStyle/>
           <a:p>
-            <a:pPr algn="ctr" indent="0" marL="0">
+            <a:pPr marL="0" indent="0" algn="ctr">
               <a:buNone/>
             </a:pPr>
             <a:r>
@@ -14881,7 +14829,7 @@
                 <a:ea typeface="Arial" pitchFamily="34" charset="-122"/>
                 <a:cs typeface="Arial" pitchFamily="34" charset="-120"/>
               </a:rPr>
-              <a:t>Executar os testes</a:t>
+              <a:t>Registrar evidências</a:t>
             </a:r>
             <a:endParaRPr lang="en-US" sz="1500" dirty="0"/>
           </a:p>
@@ -14889,13 +14837,13 @@
       </p:sp>
       <p:sp>
         <p:nvSpPr>
-          <p:cNvPr id="15" name="Text 13"/>
+          <p:cNvPr id="18" name="Text 16"/>
           <p:cNvSpPr txBox="1"/>
           <p:nvPr/>
         </p:nvSpPr>
         <p:spPr>
           <a:xfrm>
-            <a:off x="6161227" y="2788920"/>
+            <a:off x="8032090" y="2788920"/>
             <a:ext cx="1737360" cy="457200"/>
           </a:xfrm>
           <a:prstGeom prst="rect">
@@ -14908,7 +14856,7 @@
           <a:bodyPr wrap="square" lIns="0" tIns="0" rIns="0" bIns="0" rtlCol="0" anchor="t"/>
           <a:lstStyle/>
           <a:p>
-            <a:pPr algn="ctr" indent="0" marL="0">
+            <a:pPr marL="0" indent="0" algn="ctr">
               <a:buNone/>
             </a:pPr>
             <a:r>
@@ -14920,7 +14868,7 @@
                 <a:ea typeface="Arial" pitchFamily="34" charset="-122"/>
                 <a:cs typeface="Arial" pitchFamily="34" charset="-120"/>
               </a:rPr>
-              <a:t>Casos normais e de falha</a:t>
+              <a:t>Prints e fotos</a:t>
             </a:r>
             <a:endParaRPr lang="en-US" sz="1200" dirty="0"/>
           </a:p>
@@ -14928,13 +14876,13 @@
       </p:sp>
       <p:sp>
         <p:nvSpPr>
-          <p:cNvPr id="16" name="Text 14"/>
+          <p:cNvPr id="19" name="Text 17"/>
           <p:cNvSpPr/>
           <p:nvPr/>
         </p:nvSpPr>
         <p:spPr>
           <a:xfrm>
-            <a:off x="8672170" y="1645920"/>
+            <a:off x="10543032" y="1645920"/>
             <a:ext cx="457200" cy="457200"/>
           </a:xfrm>
           <a:prstGeom prst="ellipse">
@@ -14949,126 +14897,7 @@
           <a:bodyPr wrap="square" lIns="0" tIns="0" rIns="0" bIns="0" rtlCol="0" anchor="ctr"/>
           <a:lstStyle/>
           <a:p>
-            <a:pPr algn="ctr" indent="0" marL="0">
-              <a:buNone/>
-            </a:pPr>
-            <a:r>
-              <a:rPr lang="en-US" sz="1300" b="1" dirty="0">
-                <a:solidFill>
-                  <a:srgbClr val="ECEEF4"/>
-                </a:solidFill>
-                <a:latin typeface="Arial" pitchFamily="34" charset="0"/>
-                <a:ea typeface="Arial" pitchFamily="34" charset="-122"/>
-                <a:cs typeface="Arial" pitchFamily="34" charset="-120"/>
-              </a:rPr>
-              <a:t>5</a:t>
-            </a:r>
-            <a:endParaRPr lang="en-US" sz="1300" dirty="0"/>
-          </a:p>
-        </p:txBody>
-      </p:sp>
-      <p:sp>
-        <p:nvSpPr>
-          <p:cNvPr id="17" name="Text 15"/>
-          <p:cNvSpPr txBox="1"/>
-          <p:nvPr/>
-        </p:nvSpPr>
-        <p:spPr>
-          <a:xfrm>
-            <a:off x="8032090" y="2240280"/>
-            <a:ext cx="1737360" cy="548640"/>
-          </a:xfrm>
-          <a:prstGeom prst="rect">
-            <a:avLst/>
-          </a:prstGeom>
-          <a:noFill/>
-          <a:ln/>
-        </p:spPr>
-        <p:txBody>
-          <a:bodyPr wrap="square" lIns="0" tIns="0" rIns="0" bIns="0" rtlCol="0" anchor="t"/>
-          <a:lstStyle/>
-          <a:p>
-            <a:pPr algn="ctr" indent="0" marL="0">
-              <a:buNone/>
-            </a:pPr>
-            <a:r>
-              <a:rPr lang="en-US" sz="1500" b="1" dirty="0">
-                <a:solidFill>
-                  <a:srgbClr val="ECEEF4"/>
-                </a:solidFill>
-                <a:latin typeface="Arial" pitchFamily="34" charset="0"/>
-                <a:ea typeface="Arial" pitchFamily="34" charset="-122"/>
-                <a:cs typeface="Arial" pitchFamily="34" charset="-120"/>
-              </a:rPr>
-              <a:t>Registrar evidências</a:t>
-            </a:r>
-            <a:endParaRPr lang="en-US" sz="1500" dirty="0"/>
-          </a:p>
-        </p:txBody>
-      </p:sp>
-      <p:sp>
-        <p:nvSpPr>
-          <p:cNvPr id="18" name="Text 16"/>
-          <p:cNvSpPr txBox="1"/>
-          <p:nvPr/>
-        </p:nvSpPr>
-        <p:spPr>
-          <a:xfrm>
-            <a:off x="8032090" y="2788920"/>
-            <a:ext cx="1737360" cy="457200"/>
-          </a:xfrm>
-          <a:prstGeom prst="rect">
-            <a:avLst/>
-          </a:prstGeom>
-          <a:noFill/>
-          <a:ln/>
-        </p:spPr>
-        <p:txBody>
-          <a:bodyPr wrap="square" lIns="0" tIns="0" rIns="0" bIns="0" rtlCol="0" anchor="t"/>
-          <a:lstStyle/>
-          <a:p>
-            <a:pPr algn="ctr" indent="0" marL="0">
-              <a:buNone/>
-            </a:pPr>
-            <a:r>
-              <a:rPr lang="en-US" sz="1200" dirty="0">
-                <a:solidFill>
-                  <a:srgbClr val="A6ACC0"/>
-                </a:solidFill>
-                <a:latin typeface="Arial" pitchFamily="34" charset="0"/>
-                <a:ea typeface="Arial" pitchFamily="34" charset="-122"/>
-                <a:cs typeface="Arial" pitchFamily="34" charset="-120"/>
-              </a:rPr>
-              <a:t>Prints e fotos</a:t>
-            </a:r>
-            <a:endParaRPr lang="en-US" sz="1200" dirty="0"/>
-          </a:p>
-        </p:txBody>
-      </p:sp>
-      <p:sp>
-        <p:nvSpPr>
-          <p:cNvPr id="19" name="Text 17"/>
-          <p:cNvSpPr/>
-          <p:nvPr/>
-        </p:nvSpPr>
-        <p:spPr>
-          <a:xfrm>
-            <a:off x="10543032" y="1645920"/>
-            <a:ext cx="457200" cy="457200"/>
-          </a:xfrm>
-          <a:prstGeom prst="ellipse">
-            <a:avLst/>
-          </a:prstGeom>
-          <a:solidFill>
-            <a:srgbClr val="1C212D"/>
-          </a:solidFill>
-          <a:ln/>
-        </p:spPr>
-        <p:txBody>
-          <a:bodyPr wrap="square" lIns="0" tIns="0" rIns="0" bIns="0" rtlCol="0" anchor="ctr"/>
-          <a:lstStyle/>
-          <a:p>
-            <a:pPr algn="ctr" indent="0" marL="0">
+            <a:pPr marL="0" indent="0" algn="ctr">
               <a:buNone/>
             </a:pPr>
             <a:r>
@@ -15107,7 +14936,7 @@
           <a:bodyPr wrap="square" lIns="0" tIns="0" rIns="0" bIns="0" rtlCol="0" anchor="t"/>
           <a:lstStyle/>
           <a:p>
-            <a:pPr algn="ctr" indent="0" marL="0">
+            <a:pPr marL="0" indent="0" algn="ctr">
               <a:buNone/>
             </a:pPr>
             <a:r>
@@ -15146,7 +14975,7 @@
           <a:bodyPr wrap="square" lIns="0" tIns="0" rIns="0" bIns="0" rtlCol="0" anchor="t"/>
           <a:lstStyle/>
           <a:p>
-            <a:pPr algn="ctr" indent="0" marL="0">
+            <a:pPr marL="0" indent="0" algn="ctr">
               <a:buNone/>
             </a:pPr>
             <a:r>
@@ -15172,7 +15001,7 @@
         </p:nvSpPr>
         <p:spPr>
           <a:xfrm>
-            <a:off x="1033272" y="1298448"/>
+            <a:off x="2904134" y="1298448"/>
             <a:ext cx="768096" cy="274320"/>
           </a:xfrm>
           <a:prstGeom prst="roundRect">
@@ -15197,7 +15026,7 @@
           <a:bodyPr wrap="square" lIns="0" tIns="0" rIns="0" bIns="0" rtlCol="0" anchor="ctr"/>
           <a:lstStyle/>
           <a:p>
-            <a:pPr algn="ctr" indent="0" marL="0">
+            <a:pPr marL="0" indent="0" algn="ctr">
               <a:buNone/>
             </a:pPr>
             <a:r>
@@ -15217,14 +15046,14 @@
       </p:sp>
       <p:pic>
         <p:nvPicPr>
-          <p:cNvPr id="23" name="Image 0" descr="C:/Users/49816471825/AppData/Local/Temp/lockmachine/deck/cards/painel2-yellow-1213x195.png">    </p:cNvPr>
+          <p:cNvPr id="23" name="Image 0" descr="C:/Users/49816471825/AppData/Local/Temp/lockmachine/deck/cards/painel2-yellow-1213x195.png"/>
           <p:cNvPicPr>
             <a:picLocks noChangeAspect="1"/>
           </p:cNvPicPr>
           <p:nvPr/>
         </p:nvPicPr>
         <p:blipFill>
-          <a:blip r:embed="rId1"/>
+          <a:blip r:embed="rId3"/>
           <a:stretch>
             <a:fillRect/>
           </a:stretch>
@@ -15260,7 +15089,7 @@
           <a:bodyPr wrap="square" lIns="0" tIns="0" rIns="0" bIns="0" rtlCol="0" anchor="t"/>
           <a:lstStyle/>
           <a:p>
-            <a:pPr indent="0" marL="0">
+            <a:pPr marL="0" indent="0">
               <a:buNone/>
             </a:pPr>
             <a:r>
@@ -15331,14 +15160,14 @@
       </p:sp>
       <p:pic>
         <p:nvPicPr>
-          <p:cNvPr id="27" name="Image 1" descr="C:/Users/49816471825/AppData/Local/Temp/lockmachine/deck/icones/alert-FFD23F.png">    </p:cNvPr>
+          <p:cNvPr id="27" name="Image 1" descr="C:/Users/49816471825/AppData/Local/Temp/lockmachine/deck/icones/alert-FFD23F.png"/>
           <p:cNvPicPr>
             <a:picLocks noChangeAspect="1"/>
           </p:cNvPicPr>
           <p:nvPr/>
         </p:nvPicPr>
         <p:blipFill>
-          <a:blip r:embed="rId2"/>
+          <a:blip r:embed="rId4"/>
           <a:stretch>
             <a:fillRect/>
           </a:stretch>
@@ -15374,7 +15203,7 @@
           <a:bodyPr wrap="square" lIns="0" tIns="0" rIns="0" bIns="0" rtlCol="0" anchor="t"/>
           <a:lstStyle/>
           <a:p>
-            <a:pPr indent="0" marL="0">
+            <a:pPr marL="0" indent="0">
               <a:buNone/>
             </a:pPr>
             <a:r>
@@ -15445,14 +15274,14 @@
       </p:sp>
       <p:pic>
         <p:nvPicPr>
-          <p:cNvPr id="31" name="Image 2" descr="C:/Users/49816471825/AppData/Local/Temp/lockmachine/deck/icones/alert-FFD23F.png">    </p:cNvPr>
+          <p:cNvPr id="31" name="Image 2" descr="C:/Users/49816471825/AppData/Local/Temp/lockmachine/deck/icones/alert-FFD23F.png"/>
           <p:cNvPicPr>
             <a:picLocks noChangeAspect="1"/>
           </p:cNvPicPr>
           <p:nvPr/>
         </p:nvPicPr>
         <p:blipFill>
-          <a:blip r:embed="rId3"/>
+          <a:blip r:embed="rId4"/>
           <a:stretch>
             <a:fillRect/>
           </a:stretch>
@@ -15488,7 +15317,7 @@
           <a:bodyPr wrap="square" lIns="0" tIns="0" rIns="0" bIns="0" rtlCol="0" anchor="t"/>
           <a:lstStyle/>
           <a:p>
-            <a:pPr indent="0" marL="0">
+            <a:pPr marL="0" indent="0">
               <a:buNone/>
             </a:pPr>
             <a:r>
@@ -15559,7 +15388,7 @@
       </p:sp>
       <p:pic>
         <p:nvPicPr>
-          <p:cNvPr id="35" name="Image 3" descr="C:/Users/49816471825/AppData/Local/Temp/lockmachine/deck/icones/alert-FFD23F.png">    </p:cNvPr>
+          <p:cNvPr id="35" name="Image 3" descr="C:/Users/49816471825/AppData/Local/Temp/lockmachine/deck/icones/alert-FFD23F.png"/>
           <p:cNvPicPr>
             <a:picLocks noChangeAspect="1"/>
           </p:cNvPicPr>
@@ -15602,7 +15431,7 @@
           <a:bodyPr wrap="square" lIns="0" tIns="0" rIns="0" bIns="0" rtlCol="0" anchor="t"/>
           <a:lstStyle/>
           <a:p>
-            <a:pPr indent="0" marL="0">
+            <a:pPr marL="0" indent="0">
               <a:buNone/>
             </a:pPr>
             <a:r>
@@ -15622,7 +15451,7 @@
       </p:sp>
       <p:sp>
         <p:nvSpPr>
-          <p:cNvPr id="25" name="Slide Number Placeholder 0"/>
+          <p:cNvPr id="37" name="Slide Number Placeholder 0"/>
           <p:cNvSpPr>
             <a:spLocks noGrp="1"/>
           </p:cNvSpPr>
@@ -15640,7 +15469,7 @@
           </a:prstGeom>
           <a:extLst>
             <a:ext uri="{C572A759-6A51-4108-AA02-DFA0A04FC94B}">
-              <ma14:wrappingTextBoxFlag xmlns:ma14="http://schemas.microsoft.com/office/mac/drawingml/2011/main" val="0"/>
+              <ma14:wrappingTextBoxFlag xmlns="" xmlns:ma14="http://schemas.microsoft.com/office/mac/drawingml/2011/main" val="0"/>
             </a:ext>
           </a:extLst>
         </p:spPr>
@@ -15661,10 +15490,71 @@
           <a:p>
             <a:pPr algn="r"/>
             <a:fld id="{F7021451-1387-4CA6-816F-3879F97B5CBC}" type="slidenum">
-              <a:rPr b="0" lang="en-US"/>
+              <a:rPr lang="en-US" b="0"/>
               <a:t>9</a:t>
             </a:fld>
             <a:endParaRPr lang="en-US"/>
+          </a:p>
+        </p:txBody>
+      </p:sp>
+      <p:sp>
+        <p:nvSpPr>
+          <p:cNvPr id="38" name="Selo Feito">
+            <a:extLst>
+              <a:ext uri="{FF2B5EF4-FFF2-40B4-BE49-F238E27FC236}">
+                <a16:creationId xmlns:a16="http://schemas.microsoft.com/office/drawing/2014/main" id="{98F999A2-E794-D5FD-3A1F-B182C3349210}"/>
+              </a:ext>
+            </a:extLst>
+          </p:cNvPr>
+          <p:cNvSpPr/>
+          <p:nvPr/>
+        </p:nvSpPr>
+        <p:spPr>
+          <a:xfrm>
+            <a:off x="1033272" y="1298448"/>
+            <a:ext cx="768096" cy="274320"/>
+          </a:xfrm>
+          <a:prstGeom prst="roundRect">
+            <a:avLst>
+              <a:gd name="adj" fmla="val 50000"/>
+            </a:avLst>
+          </a:prstGeom>
+          <a:solidFill>
+            <a:srgbClr val="22D07B">
+              <a:alpha val="18000"/>
+            </a:srgbClr>
+          </a:solidFill>
+          <a:ln w="9525">
+            <a:solidFill>
+              <a:srgbClr val="22D07B">
+                <a:alpha val="45000"/>
+              </a:srgbClr>
+            </a:solidFill>
+          </a:ln>
+        </p:spPr>
+        <p:txBody>
+          <a:bodyPr wrap="square" lIns="0" tIns="0" rIns="0" bIns="0" rtlCol="0" anchor="ctr"/>
+          <a:lstStyle/>
+          <a:p>
+            <a:pPr marL="0" indent="0" algn="ctr">
+              <a:buNone/>
+            </a:pPr>
+            <a:r>
+              <a:rPr lang="en-US" sz="1050" b="1">
+                <a:solidFill>
+                  <a:srgbClr val="63E6A6"/>
+                </a:solidFill>
+                <a:latin typeface="Arial" pitchFamily="34" charset="0"/>
+                <a:ea typeface="Arial" pitchFamily="34" charset="-122"/>
+                <a:cs typeface="Arial" pitchFamily="34" charset="-120"/>
+              </a:rPr>
+              <a:t>Feito</a:t>
+            </a:r>
+            <a:endParaRPr lang="en-US" sz="1050" dirty="0">
+              <a:solidFill>
+                <a:srgbClr val="63E6A6"/>
+              </a:solidFill>
+            </a:endParaRPr>
           </a:p>
         </p:txBody>
       </p:sp>
@@ -15969,4 +15859,299 @@
     </a:ext>
   </a:extLst>
 </a:theme>
+</file>
+
+<file path=ppt/theme/theme2.xml><?xml version="1.0" encoding="utf-8"?>
+<a:theme xmlns:a="http://schemas.openxmlformats.org/drawingml/2006/main" name="Tema do Office">
+  <a:themeElements>
+    <a:clrScheme name="Office">
+      <a:dk1>
+        <a:sysClr val="windowText" lastClr="000000"/>
+      </a:dk1>
+      <a:lt1>
+        <a:sysClr val="window" lastClr="FFFFFF"/>
+      </a:lt1>
+      <a:dk2>
+        <a:srgbClr val="44546A"/>
+      </a:dk2>
+      <a:lt2>
+        <a:srgbClr val="E7E6E6"/>
+      </a:lt2>
+      <a:accent1>
+        <a:srgbClr val="4472C4"/>
+      </a:accent1>
+      <a:accent2>
+        <a:srgbClr val="ED7D31"/>
+      </a:accent2>
+      <a:accent3>
+        <a:srgbClr val="A5A5A5"/>
+      </a:accent3>
+      <a:accent4>
+        <a:srgbClr val="FFC000"/>
+      </a:accent4>
+      <a:accent5>
+        <a:srgbClr val="5B9BD5"/>
+      </a:accent5>
+      <a:accent6>
+        <a:srgbClr val="70AD47"/>
+      </a:accent6>
+      <a:hlink>
+        <a:srgbClr val="0563C1"/>
+      </a:hlink>
+      <a:folHlink>
+        <a:srgbClr val="954F72"/>
+      </a:folHlink>
+    </a:clrScheme>
+    <a:fontScheme name="Office">
+      <a:majorFont>
+        <a:latin typeface="Calibri Light" panose="020F0302020204030204"/>
+        <a:ea typeface=""/>
+        <a:cs typeface=""/>
+        <a:font script="Jpan" typeface="游ゴシック Light"/>
+        <a:font script="Hang" typeface="맑은 고딕"/>
+        <a:font script="Hans" typeface="等线 Light"/>
+        <a:font script="Hant" typeface="新細明體"/>
+        <a:font script="Arab" typeface="Times New Roman"/>
+        <a:font script="Hebr" typeface="Times New Roman"/>
+        <a:font script="Thai" typeface="Angsana New"/>
+        <a:font script="Ethi" typeface="Nyala"/>
+        <a:font script="Beng" typeface="Vrinda"/>
+        <a:font script="Gujr" typeface="Shruti"/>
+        <a:font script="Khmr" typeface="MoolBoran"/>
+        <a:font script="Knda" typeface="Tunga"/>
+        <a:font script="Guru" typeface="Raavi"/>
+        <a:font script="Cans" typeface="Euphemia"/>
+        <a:font script="Cher" typeface="Plantagenet Cherokee"/>
+        <a:font script="Yiii" typeface="Microsoft Yi Baiti"/>
+        <a:font script="Tibt" typeface="Microsoft Himalaya"/>
+        <a:font script="Thaa" typeface="MV Boli"/>
+        <a:font script="Deva" typeface="Mangal"/>
+        <a:font script="Telu" typeface="Gautami"/>
+        <a:font script="Taml" typeface="Latha"/>
+        <a:font script="Syrc" typeface="Estrangelo Edessa"/>
+        <a:font script="Orya" typeface="Kalinga"/>
+        <a:font script="Mlym" typeface="Kartika"/>
+        <a:font script="Laoo" typeface="DokChampa"/>
+        <a:font script="Sinh" typeface="Iskoola Pota"/>
+        <a:font script="Mong" typeface="Mongolian Baiti"/>
+        <a:font script="Viet" typeface="Times New Roman"/>
+        <a:font script="Uigh" typeface="Microsoft Uighur"/>
+        <a:font script="Geor" typeface="Sylfaen"/>
+        <a:font script="Armn" typeface="Arial"/>
+        <a:font script="Bugi" typeface="Leelawadee UI"/>
+        <a:font script="Bopo" typeface="Microsoft JhengHei"/>
+        <a:font script="Java" typeface="Javanese Text"/>
+        <a:font script="Lisu" typeface="Segoe UI"/>
+        <a:font script="Mymr" typeface="Myanmar Text"/>
+        <a:font script="Nkoo" typeface="Ebrima"/>
+        <a:font script="Olck" typeface="Nirmala UI"/>
+        <a:font script="Osma" typeface="Ebrima"/>
+        <a:font script="Phag" typeface="Phagspa"/>
+        <a:font script="Syrn" typeface="Estrangelo Edessa"/>
+        <a:font script="Syrj" typeface="Estrangelo Edessa"/>
+        <a:font script="Syre" typeface="Estrangelo Edessa"/>
+        <a:font script="Sora" typeface="Nirmala UI"/>
+        <a:font script="Tale" typeface="Microsoft Tai Le"/>
+        <a:font script="Talu" typeface="Microsoft New Tai Lue"/>
+        <a:font script="Tfng" typeface="Ebrima"/>
+      </a:majorFont>
+      <a:minorFont>
+        <a:latin typeface="Calibri" panose="020F0502020204030204"/>
+        <a:ea typeface=""/>
+        <a:cs typeface=""/>
+        <a:font script="Jpan" typeface="游ゴシック"/>
+        <a:font script="Hang" typeface="맑은 고딕"/>
+        <a:font script="Hans" typeface="等线"/>
+        <a:font script="Hant" typeface="新細明體"/>
+        <a:font script="Arab" typeface="Arial"/>
+        <a:font script="Hebr" typeface="Arial"/>
+        <a:font script="Thai" typeface="Cordia New"/>
+        <a:font script="Ethi" typeface="Nyala"/>
+        <a:font script="Beng" typeface="Vrinda"/>
+        <a:font script="Gujr" typeface="Shruti"/>
+        <a:font script="Khmr" typeface="DaunPenh"/>
+        <a:font script="Knda" typeface="Tunga"/>
+        <a:font script="Guru" typeface="Raavi"/>
+        <a:font script="Cans" typeface="Euphemia"/>
+        <a:font script="Cher" typeface="Plantagenet Cherokee"/>
+        <a:font script="Yiii" typeface="Microsoft Yi Baiti"/>
+        <a:font script="Tibt" typeface="Microsoft Himalaya"/>
+        <a:font script="Thaa" typeface="MV Boli"/>
+        <a:font script="Deva" typeface="Mangal"/>
+        <a:font script="Telu" typeface="Gautami"/>
+        <a:font script="Taml" typeface="Latha"/>
+        <a:font script="Syrc" typeface="Estrangelo Edessa"/>
+        <a:font script="Orya" typeface="Kalinga"/>
+        <a:font script="Mlym" typeface="Kartika"/>
+        <a:font script="Laoo" typeface="DokChampa"/>
+        <a:font script="Sinh" typeface="Iskoola Pota"/>
+        <a:font script="Mong" typeface="Mongolian Baiti"/>
+        <a:font script="Viet" typeface="Arial"/>
+        <a:font script="Uigh" typeface="Microsoft Uighur"/>
+        <a:font script="Geor" typeface="Sylfaen"/>
+        <a:font script="Armn" typeface="Arial"/>
+        <a:font script="Bugi" typeface="Leelawadee UI"/>
+        <a:font script="Bopo" typeface="Microsoft JhengHei"/>
+        <a:font script="Java" typeface="Javanese Text"/>
+        <a:font script="Lisu" typeface="Segoe UI"/>
+        <a:font script="Mymr" typeface="Myanmar Text"/>
+        <a:font script="Nkoo" typeface="Ebrima"/>
+        <a:font script="Olck" typeface="Nirmala UI"/>
+        <a:font script="Osma" typeface="Ebrima"/>
+        <a:font script="Phag" typeface="Phagspa"/>
+        <a:font script="Syrn" typeface="Estrangelo Edessa"/>
+        <a:font script="Syrj" typeface="Estrangelo Edessa"/>
+        <a:font script="Syre" typeface="Estrangelo Edessa"/>
+        <a:font script="Sora" typeface="Nirmala UI"/>
+        <a:font script="Tale" typeface="Microsoft Tai Le"/>
+        <a:font script="Talu" typeface="Microsoft New Tai Lue"/>
+        <a:font script="Tfng" typeface="Ebrima"/>
+      </a:minorFont>
+    </a:fontScheme>
+    <a:fmtScheme name="Office">
+      <a:fillStyleLst>
+        <a:solidFill>
+          <a:schemeClr val="phClr"/>
+        </a:solidFill>
+        <a:gradFill rotWithShape="1">
+          <a:gsLst>
+            <a:gs pos="0">
+              <a:schemeClr val="phClr">
+                <a:lumMod val="110000"/>
+                <a:satMod val="105000"/>
+                <a:tint val="67000"/>
+              </a:schemeClr>
+            </a:gs>
+            <a:gs pos="50000">
+              <a:schemeClr val="phClr">
+                <a:lumMod val="105000"/>
+                <a:satMod val="103000"/>
+                <a:tint val="73000"/>
+              </a:schemeClr>
+            </a:gs>
+            <a:gs pos="100000">
+              <a:schemeClr val="phClr">
+                <a:lumMod val="105000"/>
+                <a:satMod val="109000"/>
+                <a:tint val="81000"/>
+              </a:schemeClr>
+            </a:gs>
+          </a:gsLst>
+          <a:lin ang="5400000" scaled="0"/>
+        </a:gradFill>
+        <a:gradFill rotWithShape="1">
+          <a:gsLst>
+            <a:gs pos="0">
+              <a:schemeClr val="phClr">
+                <a:satMod val="103000"/>
+                <a:lumMod val="102000"/>
+                <a:tint val="94000"/>
+              </a:schemeClr>
+            </a:gs>
+            <a:gs pos="50000">
+              <a:schemeClr val="phClr">
+                <a:satMod val="110000"/>
+                <a:lumMod val="100000"/>
+                <a:shade val="100000"/>
+              </a:schemeClr>
+            </a:gs>
+            <a:gs pos="100000">
+              <a:schemeClr val="phClr">
+                <a:lumMod val="99000"/>
+                <a:satMod val="120000"/>
+                <a:shade val="78000"/>
+              </a:schemeClr>
+            </a:gs>
+          </a:gsLst>
+          <a:lin ang="5400000" scaled="0"/>
+        </a:gradFill>
+      </a:fillStyleLst>
+      <a:lnStyleLst>
+        <a:ln w="6350" cap="flat" cmpd="sng" algn="ctr">
+          <a:solidFill>
+            <a:schemeClr val="phClr"/>
+          </a:solidFill>
+          <a:prstDash val="solid"/>
+          <a:miter lim="800000"/>
+        </a:ln>
+        <a:ln w="12700" cap="flat" cmpd="sng" algn="ctr">
+          <a:solidFill>
+            <a:schemeClr val="phClr"/>
+          </a:solidFill>
+          <a:prstDash val="solid"/>
+          <a:miter lim="800000"/>
+        </a:ln>
+        <a:ln w="19050" cap="flat" cmpd="sng" algn="ctr">
+          <a:solidFill>
+            <a:schemeClr val="phClr"/>
+          </a:solidFill>
+          <a:prstDash val="solid"/>
+          <a:miter lim="800000"/>
+        </a:ln>
+      </a:lnStyleLst>
+      <a:effectStyleLst>
+        <a:effectStyle>
+          <a:effectLst/>
+        </a:effectStyle>
+        <a:effectStyle>
+          <a:effectLst/>
+        </a:effectStyle>
+        <a:effectStyle>
+          <a:effectLst>
+            <a:outerShdw blurRad="57150" dist="19050" dir="5400000" algn="ctr" rotWithShape="0">
+              <a:srgbClr val="000000">
+                <a:alpha val="63000"/>
+              </a:srgbClr>
+            </a:outerShdw>
+          </a:effectLst>
+        </a:effectStyle>
+      </a:effectStyleLst>
+      <a:bgFillStyleLst>
+        <a:solidFill>
+          <a:schemeClr val="phClr"/>
+        </a:solidFill>
+        <a:solidFill>
+          <a:schemeClr val="phClr">
+            <a:tint val="95000"/>
+            <a:satMod val="170000"/>
+          </a:schemeClr>
+        </a:solidFill>
+        <a:gradFill rotWithShape="1">
+          <a:gsLst>
+            <a:gs pos="0">
+              <a:schemeClr val="phClr">
+                <a:tint val="93000"/>
+                <a:satMod val="150000"/>
+                <a:shade val="98000"/>
+                <a:lumMod val="102000"/>
+              </a:schemeClr>
+            </a:gs>
+            <a:gs pos="50000">
+              <a:schemeClr val="phClr">
+                <a:tint val="98000"/>
+                <a:satMod val="130000"/>
+                <a:shade val="90000"/>
+                <a:lumMod val="103000"/>
+              </a:schemeClr>
+            </a:gs>
+            <a:gs pos="100000">
+              <a:schemeClr val="phClr">
+                <a:shade val="63000"/>
+                <a:satMod val="120000"/>
+              </a:schemeClr>
+            </a:gs>
+          </a:gsLst>
+          <a:lin ang="5400000" scaled="0"/>
+        </a:gradFill>
+      </a:bgFillStyleLst>
+    </a:fmtScheme>
+  </a:themeElements>
+  <a:objectDefaults/>
+  <a:extraClrSchemeLst/>
+  <a:extLst>
+    <a:ext uri="{05A4C25C-085E-4340-85A3-A5531E510DB2}">
+      <thm15:themeFamily xmlns:thm15="http://schemas.microsoft.com/office/thememl/2012/main" name="Office Theme" id="{62F939B6-93AF-4DB8-9C6B-D6C7DFDC589F}" vid="{4A3C46E8-61CC-4603-A589-7422A47A8E4A}"/>
+    </a:ext>
+  </a:extLst>
+</a:theme>
 </file>